--- a/lessons/lesson-11/slides.pptx
+++ b/lessons/lesson-11/slides.pptx
@@ -2,31 +2,31 @@
 <file path=ppt/presentation.xml><?xml version="1.0" encoding="utf-8"?>
 <p:presentation xmlns:p="http://schemas.openxmlformats.org/presentationml/2006/main">
   <p:sldMasterIdLst>
-    <p:sldMasterId xmlns:r="http://schemas.openxmlformats.org/officeDocument/2006/relationships" id="2147483648" r:id="R7379e59f563d436d"/>
+    <p:sldMasterId xmlns:r="http://schemas.openxmlformats.org/officeDocument/2006/relationships" id="2147483648" r:id="Rb68680c573ec4bd6"/>
   </p:sldMasterIdLst>
   <p:notesMasterIdLst>
-    <p:notesMasterId xmlns:r="http://schemas.openxmlformats.org/officeDocument/2006/relationships" r:id="R25e9a9ad2ccb46a0"/>
+    <p:notesMasterId xmlns:r="http://schemas.openxmlformats.org/officeDocument/2006/relationships" r:id="R8a89b42e8e014da1"/>
   </p:notesMasterIdLst>
   <p:sldIdLst>
-    <p:sldId xmlns:r="http://schemas.openxmlformats.org/officeDocument/2006/relationships" id="256" r:id="R7c988caa347b4068"/>
-    <p:sldId xmlns:r="http://schemas.openxmlformats.org/officeDocument/2006/relationships" id="257" r:id="Rf2a3a712af234c73"/>
-    <p:sldId xmlns:r="http://schemas.openxmlformats.org/officeDocument/2006/relationships" id="258" r:id="Re8b93e9ed7344af0"/>
-    <p:sldId xmlns:r="http://schemas.openxmlformats.org/officeDocument/2006/relationships" id="259" r:id="Re06f4511dbcd43a6"/>
-    <p:sldId xmlns:r="http://schemas.openxmlformats.org/officeDocument/2006/relationships" id="260" r:id="R2aeea73da7034d7f"/>
-    <p:sldId xmlns:r="http://schemas.openxmlformats.org/officeDocument/2006/relationships" id="261" r:id="Rcd1f0cb224774de0"/>
-    <p:sldId xmlns:r="http://schemas.openxmlformats.org/officeDocument/2006/relationships" id="262" r:id="R23ed6ab1cd9a41e4"/>
-    <p:sldId xmlns:r="http://schemas.openxmlformats.org/officeDocument/2006/relationships" id="263" r:id="Rd7bbd2c88a994f05"/>
-    <p:sldId xmlns:r="http://schemas.openxmlformats.org/officeDocument/2006/relationships" id="264" r:id="R8b058a6054eb4c7d"/>
-    <p:sldId xmlns:r="http://schemas.openxmlformats.org/officeDocument/2006/relationships" id="265" r:id="Rc5cece8f64494bb1"/>
-    <p:sldId xmlns:r="http://schemas.openxmlformats.org/officeDocument/2006/relationships" id="266" r:id="R6d2ce16f11624e78"/>
-    <p:sldId xmlns:r="http://schemas.openxmlformats.org/officeDocument/2006/relationships" id="267" r:id="R23abce8e4e52403b"/>
-    <p:sldId xmlns:r="http://schemas.openxmlformats.org/officeDocument/2006/relationships" id="268" r:id="R48cd168777164ad4"/>
-    <p:sldId xmlns:r="http://schemas.openxmlformats.org/officeDocument/2006/relationships" id="269" r:id="R86c2ebf71cc44ede"/>
-    <p:sldId xmlns:r="http://schemas.openxmlformats.org/officeDocument/2006/relationships" id="270" r:id="Rf82f0da9c87a4ceb"/>
-    <p:sldId xmlns:r="http://schemas.openxmlformats.org/officeDocument/2006/relationships" id="271" r:id="R449f24da2bce4c3c"/>
-    <p:sldId xmlns:r="http://schemas.openxmlformats.org/officeDocument/2006/relationships" id="272" r:id="Rd8103607f6b64ff6"/>
-    <p:sldId xmlns:r="http://schemas.openxmlformats.org/officeDocument/2006/relationships" id="273" r:id="R630b4cb1846546a9"/>
-    <p:sldId xmlns:r="http://schemas.openxmlformats.org/officeDocument/2006/relationships" id="274" r:id="R8945f7742af64c30"/>
+    <p:sldId xmlns:r="http://schemas.openxmlformats.org/officeDocument/2006/relationships" id="256" r:id="Rc3a43011a5424e28"/>
+    <p:sldId xmlns:r="http://schemas.openxmlformats.org/officeDocument/2006/relationships" id="257" r:id="R58f7bff1dbbd435a"/>
+    <p:sldId xmlns:r="http://schemas.openxmlformats.org/officeDocument/2006/relationships" id="258" r:id="R290b51743dc4477f"/>
+    <p:sldId xmlns:r="http://schemas.openxmlformats.org/officeDocument/2006/relationships" id="259" r:id="Red5504c0a0a44082"/>
+    <p:sldId xmlns:r="http://schemas.openxmlformats.org/officeDocument/2006/relationships" id="260" r:id="R2d040e55840c4737"/>
+    <p:sldId xmlns:r="http://schemas.openxmlformats.org/officeDocument/2006/relationships" id="261" r:id="R0ae37d96049a4c39"/>
+    <p:sldId xmlns:r="http://schemas.openxmlformats.org/officeDocument/2006/relationships" id="262" r:id="R44fe960b2f6a4445"/>
+    <p:sldId xmlns:r="http://schemas.openxmlformats.org/officeDocument/2006/relationships" id="263" r:id="R438c21cbb1f64a72"/>
+    <p:sldId xmlns:r="http://schemas.openxmlformats.org/officeDocument/2006/relationships" id="264" r:id="Red2b1f2f34fc40c7"/>
+    <p:sldId xmlns:r="http://schemas.openxmlformats.org/officeDocument/2006/relationships" id="265" r:id="R1661afeeaff14fc9"/>
+    <p:sldId xmlns:r="http://schemas.openxmlformats.org/officeDocument/2006/relationships" id="266" r:id="Ra948802ed52145ef"/>
+    <p:sldId xmlns:r="http://schemas.openxmlformats.org/officeDocument/2006/relationships" id="267" r:id="R3011f303497c4eb5"/>
+    <p:sldId xmlns:r="http://schemas.openxmlformats.org/officeDocument/2006/relationships" id="268" r:id="Rca9cfbea9e6d49d6"/>
+    <p:sldId xmlns:r="http://schemas.openxmlformats.org/officeDocument/2006/relationships" id="269" r:id="R42b48bc1c99942eb"/>
+    <p:sldId xmlns:r="http://schemas.openxmlformats.org/officeDocument/2006/relationships" id="270" r:id="R19abd37d34e44c77"/>
+    <p:sldId xmlns:r="http://schemas.openxmlformats.org/officeDocument/2006/relationships" id="271" r:id="R396d6135109d490a"/>
+    <p:sldId xmlns:r="http://schemas.openxmlformats.org/officeDocument/2006/relationships" id="272" r:id="Rd2f02814e3714291"/>
+    <p:sldId xmlns:r="http://schemas.openxmlformats.org/officeDocument/2006/relationships" id="273" r:id="R4f41c50303ae43e0"/>
+    <p:sldId xmlns:r="http://schemas.openxmlformats.org/officeDocument/2006/relationships" id="274" r:id="R5d83e51bfb77425a"/>
   </p:sldIdLst>
   <p:sldSz cx="12192000" cy="6858000"/>
   <p:notesSz cx="6858000" cy="9144000"/>
@@ -1511,7 +1511,7 @@
           <a:lstStyle xmlns:a="http://schemas.openxmlformats.org/drawingml/2006/main"/>
           <a:p xmlns:a="http://schemas.openxmlformats.org/drawingml/2006/main">
             <a:r>
-              <a:t>快问学生：第 10 课的指标是否在执行前固定？失败日志是否能与运行次数对账？只听回答，不在此页展开。</a:t>
+              <a:t>停留 1 分钟：请学生在第 10 课记录中圈出指标、预算、停止、回退里最缺的一项。再快问指标是否在执行前固定，失败日志是否能与运行次数对账。</a:t>
             </a:r>
           </a:p>
           <a:p xmlns:a="http://schemas.openxmlformats.org/drawingml/2006/main">
@@ -2277,7 +2277,7 @@
           <p:nvPr/>
         </p:nvPicPr>
         <p:blipFill>
-          <a:blip xmlns:r="http://schemas.openxmlformats.org/officeDocument/2006/relationships" xmlns:a="http://schemas.openxmlformats.org/drawingml/2006/main" r:embed="R2764e15959e840b3">
+          <a:blip xmlns:r="http://schemas.openxmlformats.org/officeDocument/2006/relationships" xmlns:a="http://schemas.openxmlformats.org/drawingml/2006/main" r:embed="R77d90bcdf7fa4a97">
             <a:duotone>
               <a:prstClr val="black"/>
               <a:schemeClr val="accent1">
@@ -2455,7 +2455,7 @@
           <p:nvPr/>
         </p:nvPicPr>
         <p:blipFill rotWithShape="1">
-          <a:blip xmlns:r="http://schemas.openxmlformats.org/officeDocument/2006/relationships" xmlns:a="http://schemas.openxmlformats.org/drawingml/2006/main" r:embed="Re899a7f7f5014eba"/>
+          <a:blip xmlns:r="http://schemas.openxmlformats.org/officeDocument/2006/relationships" xmlns:a="http://schemas.openxmlformats.org/drawingml/2006/main" r:embed="R6e79a70517954ea0"/>
           <a:srcRect xmlns:a="http://schemas.openxmlformats.org/drawingml/2006/main" l="74359" t="0" r="1346" b="0"/>
           <a:stretch xmlns:a="http://schemas.openxmlformats.org/drawingml/2006/main"/>
         </p:blipFill>
@@ -2478,7 +2478,7 @@
           <p:nvPr/>
         </p:nvPicPr>
         <p:blipFill rotWithShape="1">
-          <a:blip xmlns:r="http://schemas.openxmlformats.org/officeDocument/2006/relationships" xmlns:a="http://schemas.openxmlformats.org/drawingml/2006/main" r:embed="R64c8f46214cd41ea">
+          <a:blip xmlns:r="http://schemas.openxmlformats.org/officeDocument/2006/relationships" xmlns:a="http://schemas.openxmlformats.org/drawingml/2006/main" r:embed="R09ccf1bd37a04fc2">
             <a:alphaModFix amt="35000"/>
           </a:blip>
           <a:srcRect xmlns:a="http://schemas.openxmlformats.org/drawingml/2006/main" l="0" t="9831" r="0" b="36385"/>
@@ -2740,7 +2740,7 @@
           <p:nvPr/>
         </p:nvPicPr>
         <p:blipFill>
-          <a:blip xmlns:r="http://schemas.openxmlformats.org/officeDocument/2006/relationships" xmlns:a="http://schemas.openxmlformats.org/drawingml/2006/main" r:embed="R75e1862c7fa14aae"/>
+          <a:blip xmlns:r="http://schemas.openxmlformats.org/officeDocument/2006/relationships" xmlns:a="http://schemas.openxmlformats.org/drawingml/2006/main" r:embed="Rdc490e5727fc4b99"/>
           <a:srcRect xmlns:a="http://schemas.openxmlformats.org/drawingml/2006/main" l="0" t="0" r="54251" b="0"/>
           <a:stretch xmlns:a="http://schemas.openxmlformats.org/drawingml/2006/main"/>
         </p:blipFill>
@@ -2997,7 +2997,7 @@
           <p:nvPr/>
         </p:nvPicPr>
         <p:blipFill rotWithShape="1">
-          <a:blip xmlns:r="http://schemas.openxmlformats.org/officeDocument/2006/relationships" xmlns:a="http://schemas.openxmlformats.org/drawingml/2006/main" r:embed="R3b235932b54e480c"/>
+          <a:blip xmlns:r="http://schemas.openxmlformats.org/officeDocument/2006/relationships" xmlns:a="http://schemas.openxmlformats.org/drawingml/2006/main" r:embed="R64713872c6ff419b"/>
           <a:srcRect xmlns:a="http://schemas.openxmlformats.org/drawingml/2006/main" l="0" t="0" r="1346" b="0"/>
           <a:stretch xmlns:a="http://schemas.openxmlformats.org/drawingml/2006/main"/>
         </p:blipFill>
@@ -3180,7 +3180,7 @@
           <p:nvPr/>
         </p:nvPicPr>
         <p:blipFill>
-          <a:blip xmlns:r="http://schemas.openxmlformats.org/officeDocument/2006/relationships" xmlns:a="http://schemas.openxmlformats.org/drawingml/2006/main" r:embed="Rb9f518143a484a1e"/>
+          <a:blip xmlns:r="http://schemas.openxmlformats.org/officeDocument/2006/relationships" xmlns:a="http://schemas.openxmlformats.org/drawingml/2006/main" r:embed="R6010eb3e632540d6"/>
           <a:stretch xmlns:a="http://schemas.openxmlformats.org/drawingml/2006/main">
             <a:fillRect l="0" t="0" r="0" b="0"/>
           </a:stretch>
@@ -3276,7 +3276,7 @@
           <p:nvPr/>
         </p:nvPicPr>
         <p:blipFill>
-          <a:blip xmlns:r="http://schemas.openxmlformats.org/officeDocument/2006/relationships" xmlns:a="http://schemas.openxmlformats.org/drawingml/2006/main" r:embed="Ra2f5abded12a468c">
+          <a:blip xmlns:r="http://schemas.openxmlformats.org/officeDocument/2006/relationships" xmlns:a="http://schemas.openxmlformats.org/drawingml/2006/main" r:embed="Ra716c918d9e54165">
             <a:duotone>
               <a:prstClr val="black"/>
               <a:schemeClr val="accent1">
@@ -3443,7 +3443,7 @@
           <p:nvPr/>
         </p:nvPicPr>
         <p:blipFill rotWithShape="1">
-          <a:blip xmlns:r="http://schemas.openxmlformats.org/officeDocument/2006/relationships" xmlns:a="http://schemas.openxmlformats.org/drawingml/2006/main" r:embed="R17c7d86b37164508">
+          <a:blip xmlns:r="http://schemas.openxmlformats.org/officeDocument/2006/relationships" xmlns:a="http://schemas.openxmlformats.org/drawingml/2006/main" r:embed="R421538541d2040b5">
             <a:alphaModFix amt="20000"/>
             <a:duotone>
               <a:schemeClr val="accent4">
@@ -3541,10 +3541,10 @@
   </p:cSld>
   <p:clrMap bg1="lt1" tx1="dk1" bg2="lt2" tx2="dk2" accent1="accent1" accent2="accent2" accent3="accent3" accent4="accent4" accent5="accent5" accent6="accent6" hlink="hlink" folHlink="folHlink"/>
   <p:sldLayoutIdLst>
-    <p:sldLayoutId xmlns:r="http://schemas.openxmlformats.org/officeDocument/2006/relationships" id="2147483649" r:id="Re6180a7600784bf5"/>
-    <p:sldLayoutId xmlns:r="http://schemas.openxmlformats.org/officeDocument/2006/relationships" id="2147483650" r:id="R38a027ffcffb48fe"/>
-    <p:sldLayoutId xmlns:r="http://schemas.openxmlformats.org/officeDocument/2006/relationships" id="2147483651" r:id="R4e92945b45ad4ed8"/>
-    <p:sldLayoutId xmlns:r="http://schemas.openxmlformats.org/officeDocument/2006/relationships" id="2147483652" r:id="R8b55742f2df44327"/>
+    <p:sldLayoutId xmlns:r="http://schemas.openxmlformats.org/officeDocument/2006/relationships" id="2147483649" r:id="R4b5c9cf81a014229"/>
+    <p:sldLayoutId xmlns:r="http://schemas.openxmlformats.org/officeDocument/2006/relationships" id="2147483650" r:id="Rf30c2f50726346fb"/>
+    <p:sldLayoutId xmlns:r="http://schemas.openxmlformats.org/officeDocument/2006/relationships" id="2147483651" r:id="R9154193f9a104887"/>
+    <p:sldLayoutId xmlns:r="http://schemas.openxmlformats.org/officeDocument/2006/relationships" id="2147483652" r:id="R21d759a1da814757"/>
   </p:sldLayoutIdLst>
   <p:hf hdr="0" ftr="0" dt="0"/>
   <p:txStyles>
@@ -4345,7 +4345,7 @@
           <p:cNvPr id="6" name="p10-case">
             <a:extLst xmlns:a="http://schemas.openxmlformats.org/drawingml/2006/main">
               <a:ext uri="{FF2B5EF4-FFF2-40B4-BE49-F238E27FC236}">
-                <a16:creationId xmlns:a16="http://schemas.microsoft.com/office/drawing/2014/main" id="{892164B1-9788-4DC2-95CE-88DC305F30B6}"/>
+                <a16:creationId xmlns:a16="http://schemas.microsoft.com/office/drawing/2014/main" id="{28D9FF4F-85F3-48FA-B6F7-461A00023D23}"/>
               </a:ext>
             </a:extLst>
           </p:cNvPr>
@@ -4400,7 +4400,7 @@
           <p:cNvPr id="7" name="p10-ch-0">
             <a:extLst xmlns:a="http://schemas.openxmlformats.org/drawingml/2006/main">
               <a:ext uri="{FF2B5EF4-FFF2-40B4-BE49-F238E27FC236}">
-                <a16:creationId xmlns:a16="http://schemas.microsoft.com/office/drawing/2014/main" id="{FA405FF2-99C3-4593-AA57-478EB45EFFDC}"/>
+                <a16:creationId xmlns:a16="http://schemas.microsoft.com/office/drawing/2014/main" id="{919511C5-1E5C-4CC0-A288-FDCA6A3A9DAD}"/>
               </a:ext>
             </a:extLst>
           </p:cNvPr>
@@ -4455,7 +4455,7 @@
           <p:cNvPr id="8" name="p10-cd-0">
             <a:extLst xmlns:a="http://schemas.openxmlformats.org/drawingml/2006/main">
               <a:ext uri="{FF2B5EF4-FFF2-40B4-BE49-F238E27FC236}">
-                <a16:creationId xmlns:a16="http://schemas.microsoft.com/office/drawing/2014/main" id="{F4602357-C8E6-4C8A-9BC5-E537394203AE}"/>
+                <a16:creationId xmlns:a16="http://schemas.microsoft.com/office/drawing/2014/main" id="{D7D5C061-1117-4F49-8179-F67E7FF2D99D}"/>
               </a:ext>
             </a:extLst>
           </p:cNvPr>
@@ -4510,7 +4510,7 @@
           <p:cNvPr id="9" name="p10-ch-1">
             <a:extLst xmlns:a="http://schemas.openxmlformats.org/drawingml/2006/main">
               <a:ext uri="{FF2B5EF4-FFF2-40B4-BE49-F238E27FC236}">
-                <a16:creationId xmlns:a16="http://schemas.microsoft.com/office/drawing/2014/main" id="{88277795-3378-4538-A59A-5EC7A2DEDDC8}"/>
+                <a16:creationId xmlns:a16="http://schemas.microsoft.com/office/drawing/2014/main" id="{CE0A5C81-7E3B-4D09-A181-357A1938A081}"/>
               </a:ext>
             </a:extLst>
           </p:cNvPr>
@@ -4565,7 +4565,7 @@
           <p:cNvPr id="10" name="p10-cd-1">
             <a:extLst xmlns:a="http://schemas.openxmlformats.org/drawingml/2006/main">
               <a:ext uri="{FF2B5EF4-FFF2-40B4-BE49-F238E27FC236}">
-                <a16:creationId xmlns:a16="http://schemas.microsoft.com/office/drawing/2014/main" id="{7E8FE258-26DB-4ECA-9F06-9DFBE32406E8}"/>
+                <a16:creationId xmlns:a16="http://schemas.microsoft.com/office/drawing/2014/main" id="{6927DC39-39B1-46B6-A9E7-476A55CE5422}"/>
               </a:ext>
             </a:extLst>
           </p:cNvPr>
@@ -4620,7 +4620,7 @@
           <p:cNvPr id="11" name="p10-ch-2">
             <a:extLst xmlns:a="http://schemas.openxmlformats.org/drawingml/2006/main">
               <a:ext uri="{FF2B5EF4-FFF2-40B4-BE49-F238E27FC236}">
-                <a16:creationId xmlns:a16="http://schemas.microsoft.com/office/drawing/2014/main" id="{1F6941ED-5BFE-455E-B841-7E3DFAC72C89}"/>
+                <a16:creationId xmlns:a16="http://schemas.microsoft.com/office/drawing/2014/main" id="{B3D218FA-12D4-406A-B8EB-962A1CDC8140}"/>
               </a:ext>
             </a:extLst>
           </p:cNvPr>
@@ -4675,7 +4675,7 @@
           <p:cNvPr id="12" name="p10-cd-2">
             <a:extLst xmlns:a="http://schemas.openxmlformats.org/drawingml/2006/main">
               <a:ext uri="{FF2B5EF4-FFF2-40B4-BE49-F238E27FC236}">
-                <a16:creationId xmlns:a16="http://schemas.microsoft.com/office/drawing/2014/main" id="{C6E65A10-1BFC-42C6-B757-8BD29C2918A3}"/>
+                <a16:creationId xmlns:a16="http://schemas.microsoft.com/office/drawing/2014/main" id="{817D6315-42E8-44F1-ABDE-989F22DC4EF3}"/>
               </a:ext>
             </a:extLst>
           </p:cNvPr>
@@ -4730,7 +4730,7 @@
           <p:cNvPr id="13" name="p10-ch-3">
             <a:extLst xmlns:a="http://schemas.openxmlformats.org/drawingml/2006/main">
               <a:ext uri="{FF2B5EF4-FFF2-40B4-BE49-F238E27FC236}">
-                <a16:creationId xmlns:a16="http://schemas.microsoft.com/office/drawing/2014/main" id="{8A555DBC-63CE-40E0-B448-82C2EA931C28}"/>
+                <a16:creationId xmlns:a16="http://schemas.microsoft.com/office/drawing/2014/main" id="{94B4FBEB-589B-49D3-821C-604210F75AB6}"/>
               </a:ext>
             </a:extLst>
           </p:cNvPr>
@@ -4785,7 +4785,7 @@
           <p:cNvPr id="14" name="p10-cd-3">
             <a:extLst xmlns:a="http://schemas.openxmlformats.org/drawingml/2006/main">
               <a:ext uri="{FF2B5EF4-FFF2-40B4-BE49-F238E27FC236}">
-                <a16:creationId xmlns:a16="http://schemas.microsoft.com/office/drawing/2014/main" id="{80B69330-43AB-4807-85D7-1949019C1DF9}"/>
+                <a16:creationId xmlns:a16="http://schemas.microsoft.com/office/drawing/2014/main" id="{FBE49C6E-83C8-4798-81EC-897460EC1B7A}"/>
               </a:ext>
             </a:extLst>
           </p:cNvPr>
@@ -4840,7 +4840,7 @@
           <p:cNvPr id="15" name="p10-line-0">
             <a:extLst xmlns:a="http://schemas.openxmlformats.org/drawingml/2006/main">
               <a:ext uri="{FF2B5EF4-FFF2-40B4-BE49-F238E27FC236}">
-                <a16:creationId xmlns:a16="http://schemas.microsoft.com/office/drawing/2014/main" id="{B96155E7-140F-4BA2-AFF4-DB17A03EA87D}"/>
+                <a16:creationId xmlns:a16="http://schemas.microsoft.com/office/drawing/2014/main" id="{DA0FAA65-5C4D-4052-BE36-44B6E22173CD}"/>
               </a:ext>
             </a:extLst>
           </p:cNvPr>
@@ -4871,7 +4871,7 @@
           <p:cNvPr id="16" name="p10-line-1">
             <a:extLst xmlns:a="http://schemas.openxmlformats.org/drawingml/2006/main">
               <a:ext uri="{FF2B5EF4-FFF2-40B4-BE49-F238E27FC236}">
-                <a16:creationId xmlns:a16="http://schemas.microsoft.com/office/drawing/2014/main" id="{2EE11B58-863C-4B9C-8C9E-A5DDD172B34A}"/>
+                <a16:creationId xmlns:a16="http://schemas.microsoft.com/office/drawing/2014/main" id="{A2B67D7A-E1F7-46C9-99A1-C939E4EE3023}"/>
               </a:ext>
             </a:extLst>
           </p:cNvPr>
@@ -4902,7 +4902,7 @@
           <p:cNvPr id="17" name="p10-line-2">
             <a:extLst xmlns:a="http://schemas.openxmlformats.org/drawingml/2006/main">
               <a:ext uri="{FF2B5EF4-FFF2-40B4-BE49-F238E27FC236}">
-                <a16:creationId xmlns:a16="http://schemas.microsoft.com/office/drawing/2014/main" id="{1C73CC50-CE34-4A0A-A370-8DD1C55A8111}"/>
+                <a16:creationId xmlns:a16="http://schemas.microsoft.com/office/drawing/2014/main" id="{C4D1F16C-1BC3-4D17-8284-7D4A9AE13F38}"/>
               </a:ext>
             </a:extLst>
           </p:cNvPr>
@@ -4933,7 +4933,7 @@
           <p:cNvPr id="18" name="p10-line-3">
             <a:extLst xmlns:a="http://schemas.openxmlformats.org/drawingml/2006/main">
               <a:ext uri="{FF2B5EF4-FFF2-40B4-BE49-F238E27FC236}">
-                <a16:creationId xmlns:a16="http://schemas.microsoft.com/office/drawing/2014/main" id="{0796A293-812C-48A9-B799-28AAEAD530DE}"/>
+                <a16:creationId xmlns:a16="http://schemas.microsoft.com/office/drawing/2014/main" id="{B742EC9C-7E2D-47DD-9024-E592A7B41BEC}"/>
               </a:ext>
             </a:extLst>
           </p:cNvPr>
@@ -4964,7 +4964,7 @@
           <p:cNvPr id="19" name="p10-n-0">
             <a:extLst xmlns:a="http://schemas.openxmlformats.org/drawingml/2006/main">
               <a:ext uri="{FF2B5EF4-FFF2-40B4-BE49-F238E27FC236}">
-                <a16:creationId xmlns:a16="http://schemas.microsoft.com/office/drawing/2014/main" id="{509B2638-30FD-4AB0-A99C-F0FEA4F03875}"/>
+                <a16:creationId xmlns:a16="http://schemas.microsoft.com/office/drawing/2014/main" id="{5B139FB6-A7B4-48A2-A881-F26B62EB61FE}"/>
               </a:ext>
             </a:extLst>
           </p:cNvPr>
@@ -5021,7 +5021,7 @@
           <p:cNvPr id="20" name="p10-s-0">
             <a:extLst xmlns:a="http://schemas.openxmlformats.org/drawingml/2006/main">
               <a:ext uri="{FF2B5EF4-FFF2-40B4-BE49-F238E27FC236}">
-                <a16:creationId xmlns:a16="http://schemas.microsoft.com/office/drawing/2014/main" id="{1EDFC491-31C0-4DC4-908C-BBCF598623A3}"/>
+                <a16:creationId xmlns:a16="http://schemas.microsoft.com/office/drawing/2014/main" id="{9AFA718D-BAFC-437B-8011-205B902DB2D6}"/>
               </a:ext>
             </a:extLst>
           </p:cNvPr>
@@ -5108,7 +5108,7 @@
           <p:cNvPr id="21" name="p10-n-1">
             <a:extLst xmlns:a="http://schemas.openxmlformats.org/drawingml/2006/main">
               <a:ext uri="{FF2B5EF4-FFF2-40B4-BE49-F238E27FC236}">
-                <a16:creationId xmlns:a16="http://schemas.microsoft.com/office/drawing/2014/main" id="{E668EBC1-B16A-409E-8744-F600BD088D16}"/>
+                <a16:creationId xmlns:a16="http://schemas.microsoft.com/office/drawing/2014/main" id="{B8BBC75F-B911-4813-9231-C607ADAC93E9}"/>
               </a:ext>
             </a:extLst>
           </p:cNvPr>
@@ -5165,7 +5165,7 @@
           <p:cNvPr id="22" name="p10-s-1">
             <a:extLst xmlns:a="http://schemas.openxmlformats.org/drawingml/2006/main">
               <a:ext uri="{FF2B5EF4-FFF2-40B4-BE49-F238E27FC236}">
-                <a16:creationId xmlns:a16="http://schemas.microsoft.com/office/drawing/2014/main" id="{EBBD7CDB-F9D9-4098-B5CC-3CF10BC9BD1B}"/>
+                <a16:creationId xmlns:a16="http://schemas.microsoft.com/office/drawing/2014/main" id="{C2CE4E69-5B05-4485-827D-1A39DAE1FCEE}"/>
               </a:ext>
             </a:extLst>
           </p:cNvPr>
@@ -5252,7 +5252,7 @@
           <p:cNvPr id="23" name="p10-n-2">
             <a:extLst xmlns:a="http://schemas.openxmlformats.org/drawingml/2006/main">
               <a:ext uri="{FF2B5EF4-FFF2-40B4-BE49-F238E27FC236}">
-                <a16:creationId xmlns:a16="http://schemas.microsoft.com/office/drawing/2014/main" id="{B7DFB35B-1629-4C47-AF4B-C05D111B6765}"/>
+                <a16:creationId xmlns:a16="http://schemas.microsoft.com/office/drawing/2014/main" id="{699AA792-069F-4F6D-8790-C05C89DC564A}"/>
               </a:ext>
             </a:extLst>
           </p:cNvPr>
@@ -5309,7 +5309,7 @@
           <p:cNvPr id="24" name="p10-s-2">
             <a:extLst xmlns:a="http://schemas.openxmlformats.org/drawingml/2006/main">
               <a:ext uri="{FF2B5EF4-FFF2-40B4-BE49-F238E27FC236}">
-                <a16:creationId xmlns:a16="http://schemas.microsoft.com/office/drawing/2014/main" id="{DCEE6D01-8379-4F59-9958-F8C8D153E7DA}"/>
+                <a16:creationId xmlns:a16="http://schemas.microsoft.com/office/drawing/2014/main" id="{7063C85B-49E8-4630-BBCE-AA92B2C40DD6}"/>
               </a:ext>
             </a:extLst>
           </p:cNvPr>
@@ -5396,7 +5396,7 @@
           <p:cNvPr id="25" name="p10-n-3">
             <a:extLst xmlns:a="http://schemas.openxmlformats.org/drawingml/2006/main">
               <a:ext uri="{FF2B5EF4-FFF2-40B4-BE49-F238E27FC236}">
-                <a16:creationId xmlns:a16="http://schemas.microsoft.com/office/drawing/2014/main" id="{403294F6-AEAF-4FF1-96D9-40E9681288EA}"/>
+                <a16:creationId xmlns:a16="http://schemas.microsoft.com/office/drawing/2014/main" id="{7112212B-E052-48CD-A1FD-ED6EB2EE1298}"/>
               </a:ext>
             </a:extLst>
           </p:cNvPr>
@@ -5453,7 +5453,7 @@
           <p:cNvPr id="26" name="p10-s-3">
             <a:extLst xmlns:a="http://schemas.openxmlformats.org/drawingml/2006/main">
               <a:ext uri="{FF2B5EF4-FFF2-40B4-BE49-F238E27FC236}">
-                <a16:creationId xmlns:a16="http://schemas.microsoft.com/office/drawing/2014/main" id="{1E1B7A92-C14F-488A-A851-AFCB77198F5B}"/>
+                <a16:creationId xmlns:a16="http://schemas.microsoft.com/office/drawing/2014/main" id="{2AFC3CB9-D5BD-4254-9DBE-FB05A2BB5621}"/>
               </a:ext>
             </a:extLst>
           </p:cNvPr>
@@ -5540,7 +5540,7 @@
           <p:cNvPr id="27" name="p10-n-4">
             <a:extLst xmlns:a="http://schemas.openxmlformats.org/drawingml/2006/main">
               <a:ext uri="{FF2B5EF4-FFF2-40B4-BE49-F238E27FC236}">
-                <a16:creationId xmlns:a16="http://schemas.microsoft.com/office/drawing/2014/main" id="{D69CA5C3-0648-4002-8918-AAE18A83A18E}"/>
+                <a16:creationId xmlns:a16="http://schemas.microsoft.com/office/drawing/2014/main" id="{50F96ADA-4874-4D51-A67E-232CDA874AE8}"/>
               </a:ext>
             </a:extLst>
           </p:cNvPr>
@@ -5597,7 +5597,7 @@
           <p:cNvPr id="28" name="p10-s-4">
             <a:extLst xmlns:a="http://schemas.openxmlformats.org/drawingml/2006/main">
               <a:ext uri="{FF2B5EF4-FFF2-40B4-BE49-F238E27FC236}">
-                <a16:creationId xmlns:a16="http://schemas.microsoft.com/office/drawing/2014/main" id="{3A7131DC-2747-4F10-9150-1B2A89C5765E}"/>
+                <a16:creationId xmlns:a16="http://schemas.microsoft.com/office/drawing/2014/main" id="{20B3080F-9285-4069-A7CE-2BFD3C034073}"/>
               </a:ext>
             </a:extLst>
           </p:cNvPr>
@@ -5684,7 +5684,7 @@
           <p:cNvPr id="29" name="p10-audit">
             <a:extLst xmlns:a="http://schemas.openxmlformats.org/drawingml/2006/main">
               <a:ext uri="{FF2B5EF4-FFF2-40B4-BE49-F238E27FC236}">
-                <a16:creationId xmlns:a16="http://schemas.microsoft.com/office/drawing/2014/main" id="{621B4673-24B7-4354-AD90-6B98F2E1B77D}"/>
+                <a16:creationId xmlns:a16="http://schemas.microsoft.com/office/drawing/2014/main" id="{5B42EF57-7C48-41A2-AEBA-982E9B66F178}"/>
               </a:ext>
             </a:extLst>
           </p:cNvPr>
@@ -5741,7 +5741,7 @@
           <p:cNvPr id="30" name="p10-bottom">
             <a:extLst xmlns:a="http://schemas.openxmlformats.org/drawingml/2006/main">
               <a:ext uri="{FF2B5EF4-FFF2-40B4-BE49-F238E27FC236}">
-                <a16:creationId xmlns:a16="http://schemas.microsoft.com/office/drawing/2014/main" id="{B676603D-2990-4E15-89E1-8CA1CE602EA1}"/>
+                <a16:creationId xmlns:a16="http://schemas.microsoft.com/office/drawing/2014/main" id="{FD602A3E-ACB9-47C8-9388-A418EE37AFCE}"/>
               </a:ext>
             </a:extLst>
           </p:cNvPr>
@@ -5888,7 +5888,7 @@
           <p:cNvPr id="6" name="p11-h-0">
             <a:extLst xmlns:a="http://schemas.openxmlformats.org/drawingml/2006/main">
               <a:ext uri="{FF2B5EF4-FFF2-40B4-BE49-F238E27FC236}">
-                <a16:creationId xmlns:a16="http://schemas.microsoft.com/office/drawing/2014/main" id="{553365AB-CB0C-40A7-9FC2-F09EA53913FB}"/>
+                <a16:creationId xmlns:a16="http://schemas.microsoft.com/office/drawing/2014/main" id="{FA5BBA27-5906-4A90-83FB-FD1A45666C6C}"/>
               </a:ext>
             </a:extLst>
           </p:cNvPr>
@@ -5943,7 +5943,7 @@
           <p:cNvPr id="7" name="p11-h-1">
             <a:extLst xmlns:a="http://schemas.openxmlformats.org/drawingml/2006/main">
               <a:ext uri="{FF2B5EF4-FFF2-40B4-BE49-F238E27FC236}">
-                <a16:creationId xmlns:a16="http://schemas.microsoft.com/office/drawing/2014/main" id="{06AACEE4-014C-447E-BDA7-8950C9B4E5A1}"/>
+                <a16:creationId xmlns:a16="http://schemas.microsoft.com/office/drawing/2014/main" id="{5EBC883B-ECBC-4961-A266-0C7FBE83E025}"/>
               </a:ext>
             </a:extLst>
           </p:cNvPr>
@@ -5998,7 +5998,7 @@
           <p:cNvPr id="8" name="p11-r0-0">
             <a:extLst xmlns:a="http://schemas.openxmlformats.org/drawingml/2006/main">
               <a:ext uri="{FF2B5EF4-FFF2-40B4-BE49-F238E27FC236}">
-                <a16:creationId xmlns:a16="http://schemas.microsoft.com/office/drawing/2014/main" id="{39F60463-41E8-4107-A5E9-B900300329DE}"/>
+                <a16:creationId xmlns:a16="http://schemas.microsoft.com/office/drawing/2014/main" id="{DC9E75DE-F97A-43BC-B84E-05D21025B2DA}"/>
               </a:ext>
             </a:extLst>
           </p:cNvPr>
@@ -6059,7 +6059,7 @@
           <p:cNvPr id="9" name="p11-r0-1">
             <a:extLst xmlns:a="http://schemas.openxmlformats.org/drawingml/2006/main">
               <a:ext uri="{FF2B5EF4-FFF2-40B4-BE49-F238E27FC236}">
-                <a16:creationId xmlns:a16="http://schemas.microsoft.com/office/drawing/2014/main" id="{040034E7-AC3C-4E09-9216-4F68E74164EB}"/>
+                <a16:creationId xmlns:a16="http://schemas.microsoft.com/office/drawing/2014/main" id="{E20C1B27-75DB-4FA1-91DF-F4F1BF8FC2E7}"/>
               </a:ext>
             </a:extLst>
           </p:cNvPr>
@@ -6120,7 +6120,7 @@
           <p:cNvPr id="10" name="p11-r1-0">
             <a:extLst xmlns:a="http://schemas.openxmlformats.org/drawingml/2006/main">
               <a:ext uri="{FF2B5EF4-FFF2-40B4-BE49-F238E27FC236}">
-                <a16:creationId xmlns:a16="http://schemas.microsoft.com/office/drawing/2014/main" id="{8FC4313E-B3A8-41DB-B334-F67AA120658E}"/>
+                <a16:creationId xmlns:a16="http://schemas.microsoft.com/office/drawing/2014/main" id="{531DC93F-8DF4-4CA9-A642-DC6E09C42311}"/>
               </a:ext>
             </a:extLst>
           </p:cNvPr>
@@ -6181,7 +6181,7 @@
           <p:cNvPr id="11" name="p11-r1-1">
             <a:extLst xmlns:a="http://schemas.openxmlformats.org/drawingml/2006/main">
               <a:ext uri="{FF2B5EF4-FFF2-40B4-BE49-F238E27FC236}">
-                <a16:creationId xmlns:a16="http://schemas.microsoft.com/office/drawing/2014/main" id="{3BCEE4CE-0AD7-44AE-8477-B0573BB1E25E}"/>
+                <a16:creationId xmlns:a16="http://schemas.microsoft.com/office/drawing/2014/main" id="{D0DD1C66-CE68-4C93-B2E9-AAAD6BDD18B4}"/>
               </a:ext>
             </a:extLst>
           </p:cNvPr>
@@ -6242,7 +6242,7 @@
           <p:cNvPr id="12" name="p11-r2-0">
             <a:extLst xmlns:a="http://schemas.openxmlformats.org/drawingml/2006/main">
               <a:ext uri="{FF2B5EF4-FFF2-40B4-BE49-F238E27FC236}">
-                <a16:creationId xmlns:a16="http://schemas.microsoft.com/office/drawing/2014/main" id="{B6447BB1-5F1A-4F46-BCC1-46DB1EC64ADF}"/>
+                <a16:creationId xmlns:a16="http://schemas.microsoft.com/office/drawing/2014/main" id="{7EEF8B3B-0C1B-4C08-8C09-2BF2D9C4DBFC}"/>
               </a:ext>
             </a:extLst>
           </p:cNvPr>
@@ -6303,7 +6303,7 @@
           <p:cNvPr id="13" name="p11-r2-1">
             <a:extLst xmlns:a="http://schemas.openxmlformats.org/drawingml/2006/main">
               <a:ext uri="{FF2B5EF4-FFF2-40B4-BE49-F238E27FC236}">
-                <a16:creationId xmlns:a16="http://schemas.microsoft.com/office/drawing/2014/main" id="{9B76EF0A-B058-4116-9066-B0A143994821}"/>
+                <a16:creationId xmlns:a16="http://schemas.microsoft.com/office/drawing/2014/main" id="{7092D9C9-6B89-414B-A363-384D07338571}"/>
               </a:ext>
             </a:extLst>
           </p:cNvPr>
@@ -6364,7 +6364,7 @@
           <p:cNvPr id="14" name="p11-r3-0">
             <a:extLst xmlns:a="http://schemas.openxmlformats.org/drawingml/2006/main">
               <a:ext uri="{FF2B5EF4-FFF2-40B4-BE49-F238E27FC236}">
-                <a16:creationId xmlns:a16="http://schemas.microsoft.com/office/drawing/2014/main" id="{B03AD340-02ED-4065-AC2C-431EBF5CA489}"/>
+                <a16:creationId xmlns:a16="http://schemas.microsoft.com/office/drawing/2014/main" id="{D17E1D28-D04C-4393-AC9E-C55F598B520F}"/>
               </a:ext>
             </a:extLst>
           </p:cNvPr>
@@ -6425,7 +6425,7 @@
           <p:cNvPr id="15" name="p11-r3-1">
             <a:extLst xmlns:a="http://schemas.openxmlformats.org/drawingml/2006/main">
               <a:ext uri="{FF2B5EF4-FFF2-40B4-BE49-F238E27FC236}">
-                <a16:creationId xmlns:a16="http://schemas.microsoft.com/office/drawing/2014/main" id="{9E99304F-5C40-4EAC-BADF-C1CF82B8D60C}"/>
+                <a16:creationId xmlns:a16="http://schemas.microsoft.com/office/drawing/2014/main" id="{9049ACBE-860E-4BBE-892F-2C6CB7059A54}"/>
               </a:ext>
             </a:extLst>
           </p:cNvPr>
@@ -6486,7 +6486,7 @@
           <p:cNvPr id="16" name="p11-r4-0">
             <a:extLst xmlns:a="http://schemas.openxmlformats.org/drawingml/2006/main">
               <a:ext uri="{FF2B5EF4-FFF2-40B4-BE49-F238E27FC236}">
-                <a16:creationId xmlns:a16="http://schemas.microsoft.com/office/drawing/2014/main" id="{2D625192-7696-4EB9-83DB-71BCBB731A9A}"/>
+                <a16:creationId xmlns:a16="http://schemas.microsoft.com/office/drawing/2014/main" id="{C67F313F-7DC1-488D-B10A-26CB66388460}"/>
               </a:ext>
             </a:extLst>
           </p:cNvPr>
@@ -6547,7 +6547,7 @@
           <p:cNvPr id="17" name="p11-r4-1">
             <a:extLst xmlns:a="http://schemas.openxmlformats.org/drawingml/2006/main">
               <a:ext uri="{FF2B5EF4-FFF2-40B4-BE49-F238E27FC236}">
-                <a16:creationId xmlns:a16="http://schemas.microsoft.com/office/drawing/2014/main" id="{3FE2125F-1772-4966-BA30-6AD4F98CBF0F}"/>
+                <a16:creationId xmlns:a16="http://schemas.microsoft.com/office/drawing/2014/main" id="{D170B3DA-7CC2-44B5-96D7-F72A6ED55017}"/>
               </a:ext>
             </a:extLst>
           </p:cNvPr>
@@ -6608,7 +6608,7 @@
           <p:cNvPr id="18" name="p11-r5-0">
             <a:extLst xmlns:a="http://schemas.openxmlformats.org/drawingml/2006/main">
               <a:ext uri="{FF2B5EF4-FFF2-40B4-BE49-F238E27FC236}">
-                <a16:creationId xmlns:a16="http://schemas.microsoft.com/office/drawing/2014/main" id="{FCBD49CC-3AEB-430A-A177-DD7630FA9576}"/>
+                <a16:creationId xmlns:a16="http://schemas.microsoft.com/office/drawing/2014/main" id="{ED1D8453-64DB-408C-B0B6-DA2E514762D6}"/>
               </a:ext>
             </a:extLst>
           </p:cNvPr>
@@ -6669,7 +6669,7 @@
           <p:cNvPr id="19" name="p11-r5-1">
             <a:extLst xmlns:a="http://schemas.openxmlformats.org/drawingml/2006/main">
               <a:ext uri="{FF2B5EF4-FFF2-40B4-BE49-F238E27FC236}">
-                <a16:creationId xmlns:a16="http://schemas.microsoft.com/office/drawing/2014/main" id="{21774105-2DE3-4DF4-A6AF-917F1C0CB695}"/>
+                <a16:creationId xmlns:a16="http://schemas.microsoft.com/office/drawing/2014/main" id="{FE6B8D73-3385-4C42-8822-D24236A6B5CC}"/>
               </a:ext>
             </a:extLst>
           </p:cNvPr>
@@ -6730,7 +6730,7 @@
           <p:cNvPr id="20" name="p11-r6-0">
             <a:extLst xmlns:a="http://schemas.openxmlformats.org/drawingml/2006/main">
               <a:ext uri="{FF2B5EF4-FFF2-40B4-BE49-F238E27FC236}">
-                <a16:creationId xmlns:a16="http://schemas.microsoft.com/office/drawing/2014/main" id="{D61FD395-9880-4B4B-9676-FE763692CBA0}"/>
+                <a16:creationId xmlns:a16="http://schemas.microsoft.com/office/drawing/2014/main" id="{3441B251-F27B-4023-96EC-E6B13146579D}"/>
               </a:ext>
             </a:extLst>
           </p:cNvPr>
@@ -6791,7 +6791,7 @@
           <p:cNvPr id="21" name="p11-r6-1">
             <a:extLst xmlns:a="http://schemas.openxmlformats.org/drawingml/2006/main">
               <a:ext uri="{FF2B5EF4-FFF2-40B4-BE49-F238E27FC236}">
-                <a16:creationId xmlns:a16="http://schemas.microsoft.com/office/drawing/2014/main" id="{03C1DD4F-4CD5-4448-85DE-0FDAF827DD74}"/>
+                <a16:creationId xmlns:a16="http://schemas.microsoft.com/office/drawing/2014/main" id="{2F4514DC-1D63-4C59-926A-60F651B8B2D6}"/>
               </a:ext>
             </a:extLst>
           </p:cNvPr>
@@ -6852,7 +6852,7 @@
           <p:cNvPr id="22" name="p11-eq">
             <a:extLst xmlns:a="http://schemas.openxmlformats.org/drawingml/2006/main">
               <a:ext uri="{FF2B5EF4-FFF2-40B4-BE49-F238E27FC236}">
-                <a16:creationId xmlns:a16="http://schemas.microsoft.com/office/drawing/2014/main" id="{954D7D47-70A7-42EA-AEFD-DBF393E4CB83}"/>
+                <a16:creationId xmlns:a16="http://schemas.microsoft.com/office/drawing/2014/main" id="{12288A3A-9AA7-4E0E-AD30-BC054310D620}"/>
               </a:ext>
             </a:extLst>
           </p:cNvPr>
@@ -7003,18 +7003,18 @@
           <p:cNvPr id="6" name="p12-left-h">
             <a:extLst xmlns:a="http://schemas.openxmlformats.org/drawingml/2006/main">
               <a:ext uri="{FF2B5EF4-FFF2-40B4-BE49-F238E27FC236}">
-                <a16:creationId xmlns:a16="http://schemas.microsoft.com/office/drawing/2014/main" id="{84DB00FB-D1BF-4832-AE81-620F5AD9BE08}"/>
-              </a:ext>
-            </a:extLst>
-          </p:cNvPr>
-          <p:cNvSpPr>
-            <a:spLocks xmlns:a="http://schemas.openxmlformats.org/drawingml/2006/main" noGrp="1"/>
-          </p:cNvSpPr>
-          <p:nvPr/>
-        </p:nvSpPr>
-        <p:spPr>
-          <a:xfrm xmlns:a="http://schemas.openxmlformats.org/drawingml/2006/main">
-            <a:off x="685800" y="1028700"/>
+                <a16:creationId xmlns:a16="http://schemas.microsoft.com/office/drawing/2014/main" id="{21D70EC6-6FAE-46BB-8639-1605FA433DDA}"/>
+              </a:ext>
+            </a:extLst>
+          </p:cNvPr>
+          <p:cNvSpPr>
+            <a:spLocks xmlns:a="http://schemas.openxmlformats.org/drawingml/2006/main" noGrp="1"/>
+          </p:cNvSpPr>
+          <p:nvPr/>
+        </p:nvSpPr>
+        <p:spPr>
+          <a:xfrm xmlns:a="http://schemas.openxmlformats.org/drawingml/2006/main">
+            <a:off x="685800" y="952500"/>
             <a:ext cx="4953000" cy="552450"/>
           </a:xfrm>
           <a:prstGeom xmlns:a="http://schemas.openxmlformats.org/drawingml/2006/main" prst="rect">
@@ -7033,14 +7033,14 @@
           <a:lstStyle xmlns:a="http://schemas.openxmlformats.org/drawingml/2006/main"/>
           <a:p xmlns:a="http://schemas.openxmlformats.org/drawingml/2006/main">
             <a:pPr algn="ctr">
-              <a:defRPr sz="2100" b="1">
+              <a:defRPr sz="1875" b="1">
                 <a:solidFill>
                   <a:srgbClr val="FFFFFF"/>
                 </a:solidFill>
               </a:defRPr>
             </a:pPr>
             <a:r>
-              <a:rPr sz="2100" b="1">
+              <a:rPr sz="1875" b="1">
                 <a:solidFill>
                   <a:srgbClr val="FFFFFF"/>
                 </a:solidFill>
@@ -7048,7 +7048,7 @@
                 <a:ea typeface="Arial"/>
                 <a:cs typeface="Arial"/>
               </a:rPr>
-              <a:t>AutoResearch</a:t>
+              <a:t>program.md @ 228791f｜字段重绘</a:t>
             </a:r>
           </a:p>
         </p:txBody>
@@ -7058,25 +7058,292 @@
           <p:cNvPr id="7" name="p12-left">
             <a:extLst xmlns:a="http://schemas.openxmlformats.org/drawingml/2006/main">
               <a:ext uri="{FF2B5EF4-FFF2-40B4-BE49-F238E27FC236}">
-                <a16:creationId xmlns:a16="http://schemas.microsoft.com/office/drawing/2014/main" id="{5EA4FF49-E83B-446D-826D-3650052F56EA}"/>
-              </a:ext>
-            </a:extLst>
-          </p:cNvPr>
-          <p:cNvSpPr>
-            <a:spLocks xmlns:a="http://schemas.openxmlformats.org/drawingml/2006/main" noGrp="1"/>
-          </p:cNvSpPr>
-          <p:nvPr/>
-        </p:nvSpPr>
-        <p:spPr>
-          <a:xfrm xmlns:a="http://schemas.openxmlformats.org/drawingml/2006/main">
-            <a:off x="685800" y="1581150"/>
+                <a16:creationId xmlns:a16="http://schemas.microsoft.com/office/drawing/2014/main" id="{C4E48C4F-1AE1-4898-8D15-DD021A5582D1}"/>
+              </a:ext>
+            </a:extLst>
+          </p:cNvPr>
+          <p:cNvSpPr>
+            <a:spLocks xmlns:a="http://schemas.openxmlformats.org/drawingml/2006/main" noGrp="1"/>
+          </p:cNvSpPr>
+          <p:nvPr/>
+        </p:nvSpPr>
+        <p:spPr>
+          <a:xfrm xmlns:a="http://schemas.openxmlformats.org/drawingml/2006/main">
+            <a:off x="685800" y="1504950"/>
+            <a:ext cx="4953000" cy="2667000"/>
+          </a:xfrm>
+          <a:prstGeom xmlns:a="http://schemas.openxmlformats.org/drawingml/2006/main" prst="roundRect">
+            <a:avLst>
+              <a:gd name="adj" fmla="val 2857"/>
+            </a:avLst>
+          </a:prstGeom>
+          <a:solidFill xmlns:a="http://schemas.openxmlformats.org/drawingml/2006/main">
+            <a:srgbClr val="E8F0F6"/>
+          </a:solidFill>
+          <a:ln xmlns:a="http://schemas.openxmlformats.org/drawingml/2006/main" w="19050">
+            <a:solidFill>
+              <a:srgbClr val="18354E"/>
+            </a:solidFill>
+            <a:prstDash val="solid"/>
+          </a:ln>
+        </p:spPr>
+        <p:txBody>
+          <a:bodyPr xmlns:a="http://schemas.openxmlformats.org/drawingml/2006/main" lIns="266700" tIns="171450" rIns="171450" bIns="171450" anchor="ctr"/>
+          <a:lstStyle xmlns:a="http://schemas.openxmlformats.org/drawingml/2006/main"/>
+          <a:p xmlns:a="http://schemas.openxmlformats.org/drawingml/2006/main">
+            <a:pPr algn="l">
+              <a:lnSpc>
+                <a:spcPct val="135000"/>
+              </a:lnSpc>
+              <a:buNone/>
+              <a:defRPr sz="1800" b="1">
+                <a:solidFill>
+                  <a:srgbClr val="263746"/>
+                </a:solidFill>
+              </a:defRPr>
+            </a:pPr>
+            <a:r>
+              <a:rPr sz="1800" b="1">
+                <a:solidFill>
+                  <a:srgbClr val="263746"/>
+                </a:solidFill>
+                <a:latin typeface="Consolas"/>
+                <a:ea typeface="Consolas"/>
+                <a:cs typeface="Consolas"/>
+              </a:rPr>
+              <a:t>EDIT_SCOPE   train.py only</a:t>
+            </a:r>
+          </a:p>
+          <a:p xmlns:a="http://schemas.openxmlformats.org/drawingml/2006/main">
+            <a:pPr algn="l">
+              <a:lnSpc>
+                <a:spcPct val="135000"/>
+              </a:lnSpc>
+              <a:buNone/>
+              <a:defRPr sz="1800" b="1">
+                <a:solidFill>
+                  <a:srgbClr val="263746"/>
+                </a:solidFill>
+              </a:defRPr>
+            </a:pPr>
+            <a:r>
+              <a:rPr sz="1800" b="1">
+                <a:solidFill>
+                  <a:srgbClr val="263746"/>
+                </a:solidFill>
+                <a:latin typeface="Consolas"/>
+                <a:ea typeface="Consolas"/>
+                <a:cs typeface="Consolas"/>
+              </a:rPr>
+              <a:t>TIME_BUDGET  fixed 5 min</a:t>
+            </a:r>
+          </a:p>
+          <a:p xmlns:a="http://schemas.openxmlformats.org/drawingml/2006/main">
+            <a:pPr algn="l">
+              <a:lnSpc>
+                <a:spcPct val="135000"/>
+              </a:lnSpc>
+              <a:buNone/>
+              <a:defRPr sz="1800" b="1">
+                <a:solidFill>
+                  <a:srgbClr val="263746"/>
+                </a:solidFill>
+              </a:defRPr>
+            </a:pPr>
+            <a:r>
+              <a:rPr sz="1800" b="1">
+                <a:solidFill>
+                  <a:srgbClr val="263746"/>
+                </a:solidFill>
+                <a:latin typeface="Consolas"/>
+                <a:ea typeface="Consolas"/>
+                <a:cs typeface="Consolas"/>
+              </a:rPr>
+              <a:t>METRIC       val_bpb</a:t>
+            </a:r>
+          </a:p>
+          <a:p xmlns:a="http://schemas.openxmlformats.org/drawingml/2006/main">
+            <a:pPr algn="l">
+              <a:lnSpc>
+                <a:spcPct val="135000"/>
+              </a:lnSpc>
+              <a:buNone/>
+              <a:defRPr sz="1800" b="1">
+                <a:solidFill>
+                  <a:srgbClr val="263746"/>
+                </a:solidFill>
+              </a:defRPr>
+            </a:pPr>
+            <a:r>
+              <a:rPr sz="1800" b="1">
+                <a:solidFill>
+                  <a:srgbClr val="263746"/>
+                </a:solidFill>
+                <a:latin typeface="Consolas"/>
+                <a:ea typeface="Consolas"/>
+                <a:cs typeface="Consolas"/>
+              </a:rPr>
+              <a:t>DECISION     keep | discard | crash</a:t>
+            </a:r>
+          </a:p>
+          <a:p xmlns:a="http://schemas.openxmlformats.org/drawingml/2006/main">
+            <a:pPr algn="l">
+              <a:lnSpc>
+                <a:spcPct val="135000"/>
+              </a:lnSpc>
+              <a:buNone/>
+              <a:defRPr sz="1800" b="1">
+                <a:solidFill>
+                  <a:srgbClr val="263746"/>
+                </a:solidFill>
+              </a:defRPr>
+            </a:pPr>
+            <a:r>
+              <a:rPr sz="1800" b="1">
+                <a:solidFill>
+                  <a:srgbClr val="263746"/>
+                </a:solidFill>
+                <a:latin typeface="Consolas"/>
+                <a:ea typeface="Consolas"/>
+                <a:cs typeface="Consolas"/>
+              </a:rPr>
+              <a:t>TRACE        results.tsv</a:t>
+            </a:r>
+          </a:p>
+        </p:txBody>
+      </p:sp>
+      <p:sp>
+        <p:nvSpPr>
+          <p:cNvPr id="8" name="p12-left-src">
+            <a:extLst xmlns:a="http://schemas.openxmlformats.org/drawingml/2006/main">
+              <a:ext uri="{FF2B5EF4-FFF2-40B4-BE49-F238E27FC236}">
+                <a16:creationId xmlns:a16="http://schemas.microsoft.com/office/drawing/2014/main" id="{2852F72C-1E88-4AB9-87E3-174364B77626}"/>
+              </a:ext>
+            </a:extLst>
+          </p:cNvPr>
+          <p:cNvSpPr>
+            <a:spLocks xmlns:a="http://schemas.openxmlformats.org/drawingml/2006/main" noGrp="1"/>
+          </p:cNvSpPr>
+          <p:nvPr/>
+        </p:nvSpPr>
+        <p:spPr>
+          <a:xfrm xmlns:a="http://schemas.openxmlformats.org/drawingml/2006/main">
+            <a:off x="685800" y="4286250"/>
+            <a:ext cx="4953000" cy="400050"/>
+          </a:xfrm>
+          <a:prstGeom xmlns:a="http://schemas.openxmlformats.org/drawingml/2006/main" prst="rect">
+            <a:avLst/>
+          </a:prstGeom>
+          <a:noFill xmlns:a="http://schemas.openxmlformats.org/drawingml/2006/main"/>
+          <a:ln xmlns:a="http://schemas.openxmlformats.org/drawingml/2006/main" w="0">
+            <a:noFill/>
+            <a:prstDash val="solid"/>
+          </a:ln>
+        </p:spPr>
+        <p:txBody>
+          <a:bodyPr xmlns:a="http://schemas.openxmlformats.org/drawingml/2006/main" lIns="76200" tIns="38100" rIns="76200" bIns="38100" anchor="ctr"/>
+          <a:lstStyle xmlns:a="http://schemas.openxmlformats.org/drawingml/2006/main"/>
+          <a:p xmlns:a="http://schemas.openxmlformats.org/drawingml/2006/main">
+            <a:pPr algn="ctr">
+              <a:defRPr sz="1800" b="1">
+                <a:solidFill>
+                  <a:srgbClr val="18354E"/>
+                </a:solidFill>
+              </a:defRPr>
+            </a:pPr>
+            <a:r>
+              <a:rPr sz="1800" b="1">
+                <a:solidFill>
+                  <a:srgbClr val="18354E"/>
+                </a:solidFill>
+                <a:latin typeface="Microsoft YaHei"/>
+                <a:ea typeface="Microsoft YaHei"/>
+                <a:cs typeface="Microsoft YaHei"/>
+              </a:rPr>
+              <a:t>可核验源对象｜GitHub 固定 commit，非运行截图</a:t>
+            </a:r>
+          </a:p>
+        </p:txBody>
+      </p:sp>
+      <p:sp>
+        <p:nvSpPr>
+          <p:cNvPr id="9" name="p12-right-h">
+            <a:extLst xmlns:a="http://schemas.openxmlformats.org/drawingml/2006/main">
+              <a:ext uri="{FF2B5EF4-FFF2-40B4-BE49-F238E27FC236}">
+                <a16:creationId xmlns:a16="http://schemas.microsoft.com/office/drawing/2014/main" id="{062943EB-A9CB-411F-8B86-4CF423F73F06}"/>
+              </a:ext>
+            </a:extLst>
+          </p:cNvPr>
+          <p:cNvSpPr>
+            <a:spLocks xmlns:a="http://schemas.openxmlformats.org/drawingml/2006/main" noGrp="1"/>
+          </p:cNvSpPr>
+          <p:nvPr/>
+        </p:nvSpPr>
+        <p:spPr>
+          <a:xfrm xmlns:a="http://schemas.openxmlformats.org/drawingml/2006/main">
+            <a:off x="6553200" y="1028700"/>
+            <a:ext cx="4953000" cy="552450"/>
+          </a:xfrm>
+          <a:prstGeom xmlns:a="http://schemas.openxmlformats.org/drawingml/2006/main" prst="rect">
+            <a:avLst/>
+          </a:prstGeom>
+          <a:solidFill xmlns:a="http://schemas.openxmlformats.org/drawingml/2006/main">
+            <a:srgbClr val="C8161E"/>
+          </a:solidFill>
+          <a:ln xmlns:a="http://schemas.openxmlformats.org/drawingml/2006/main" w="0">
+            <a:noFill/>
+            <a:prstDash val="solid"/>
+          </a:ln>
+        </p:spPr>
+        <p:txBody>
+          <a:bodyPr xmlns:a="http://schemas.openxmlformats.org/drawingml/2006/main" lIns="76200" tIns="38100" rIns="76200" bIns="38100" anchor="ctr"/>
+          <a:lstStyle xmlns:a="http://schemas.openxmlformats.org/drawingml/2006/main"/>
+          <a:p xmlns:a="http://schemas.openxmlformats.org/drawingml/2006/main">
+            <a:pPr algn="ctr">
+              <a:defRPr sz="2100" b="1">
+                <a:solidFill>
+                  <a:srgbClr val="FFFFFF"/>
+                </a:solidFill>
+              </a:defRPr>
+            </a:pPr>
+            <a:r>
+              <a:rPr sz="2100" b="1">
+                <a:solidFill>
+                  <a:srgbClr val="FFFFFF"/>
+                </a:solidFill>
+                <a:latin typeface="Arial"/>
+                <a:ea typeface="Arial"/>
+                <a:cs typeface="Arial"/>
+              </a:rPr>
+              <a:t>The AI Scientist</a:t>
+            </a:r>
+          </a:p>
+        </p:txBody>
+      </p:sp>
+      <p:sp>
+        <p:nvSpPr>
+          <p:cNvPr id="10" name="p12-right">
+            <a:extLst xmlns:a="http://schemas.openxmlformats.org/drawingml/2006/main">
+              <a:ext uri="{FF2B5EF4-FFF2-40B4-BE49-F238E27FC236}">
+                <a16:creationId xmlns:a16="http://schemas.microsoft.com/office/drawing/2014/main" id="{C1228EC7-C1CA-436A-B044-4D2898F32DB6}"/>
+              </a:ext>
+            </a:extLst>
+          </p:cNvPr>
+          <p:cNvSpPr>
+            <a:spLocks xmlns:a="http://schemas.openxmlformats.org/drawingml/2006/main" noGrp="1"/>
+          </p:cNvSpPr>
+          <p:nvPr/>
+        </p:nvSpPr>
+        <p:spPr>
+          <a:xfrm xmlns:a="http://schemas.openxmlformats.org/drawingml/2006/main">
+            <a:off x="6553200" y="1581150"/>
             <a:ext cx="4953000" cy="3048000"/>
           </a:xfrm>
           <a:prstGeom xmlns:a="http://schemas.openxmlformats.org/drawingml/2006/main" prst="rect">
             <a:avLst/>
           </a:prstGeom>
           <a:solidFill xmlns:a="http://schemas.openxmlformats.org/drawingml/2006/main">
-            <a:srgbClr val="E8F0F6"/>
+            <a:srgbClr val="F8E9EA"/>
           </a:solidFill>
           <a:ln xmlns:a="http://schemas.openxmlformats.org/drawingml/2006/main" w="0">
             <a:noFill/>
@@ -7107,7 +7374,7 @@
                 <a:ea typeface="Microsoft YaHei"/>
                 <a:cs typeface="Microsoft YaHei"/>
               </a:rPr>
-              <a:t>课程固定版本  228791f</a:t>
+              <a:t>Lu et al. · Nature 2026</a:t>
             </a:r>
           </a:p>
           <a:p xmlns:a="http://schemas.openxmlformats.org/drawingml/2006/main">
@@ -7136,7 +7403,7 @@
                 <a:ea typeface="Microsoft YaHei"/>
                 <a:cs typeface="Microsoft YaHei"/>
               </a:rPr>
-              <a:t>单 GPU nanochat 工程案例</a:t>
+              <a:t>计算型 ML 研究管线</a:t>
             </a:r>
           </a:p>
           <a:p xmlns:a="http://schemas.openxmlformats.org/drawingml/2006/main">
@@ -7160,7 +7427,7 @@
                 <a:ea typeface="Microsoft YaHei"/>
                 <a:cs typeface="Microsoft YaHei"/>
               </a:rPr>
-              <a:t>固定 5 分钟预算 · val_bpb</a:t>
+              <a:t>想法 → 代码 → 实验 → 分析</a:t>
             </a:r>
           </a:p>
           <a:p xmlns:a="http://schemas.openxmlformats.org/drawingml/2006/main">
@@ -7184,7 +7451,7 @@
                 <a:ea typeface="Microsoft YaHei"/>
                 <a:cs typeface="Microsoft YaHei"/>
               </a:rPr>
-              <a:t>keep / discard / crash 日志</a:t>
+              <a:t>→ 论文 → 自动评审</a:t>
             </a:r>
           </a:p>
           <a:p xmlns:a="http://schemas.openxmlformats.org/drawingml/2006/main">
@@ -7213,226 +7480,6 @@
                 <a:ea typeface="Microsoft YaHei"/>
                 <a:cs typeface="Microsoft YaHei"/>
               </a:rPr>
-              <a:t>角色：受限循环的最小骨架</a:t>
-            </a:r>
-          </a:p>
-        </p:txBody>
-      </p:sp>
-      <p:sp>
-        <p:nvSpPr>
-          <p:cNvPr id="8" name="p12-right-h">
-            <a:extLst xmlns:a="http://schemas.openxmlformats.org/drawingml/2006/main">
-              <a:ext uri="{FF2B5EF4-FFF2-40B4-BE49-F238E27FC236}">
-                <a16:creationId xmlns:a16="http://schemas.microsoft.com/office/drawing/2014/main" id="{E7C36CD8-4A86-4030-880D-CBDC95611F42}"/>
-              </a:ext>
-            </a:extLst>
-          </p:cNvPr>
-          <p:cNvSpPr>
-            <a:spLocks xmlns:a="http://schemas.openxmlformats.org/drawingml/2006/main" noGrp="1"/>
-          </p:cNvSpPr>
-          <p:nvPr/>
-        </p:nvSpPr>
-        <p:spPr>
-          <a:xfrm xmlns:a="http://schemas.openxmlformats.org/drawingml/2006/main">
-            <a:off x="6553200" y="1028700"/>
-            <a:ext cx="4953000" cy="552450"/>
-          </a:xfrm>
-          <a:prstGeom xmlns:a="http://schemas.openxmlformats.org/drawingml/2006/main" prst="rect">
-            <a:avLst/>
-          </a:prstGeom>
-          <a:solidFill xmlns:a="http://schemas.openxmlformats.org/drawingml/2006/main">
-            <a:srgbClr val="C8161E"/>
-          </a:solidFill>
-          <a:ln xmlns:a="http://schemas.openxmlformats.org/drawingml/2006/main" w="0">
-            <a:noFill/>
-            <a:prstDash val="solid"/>
-          </a:ln>
-        </p:spPr>
-        <p:txBody>
-          <a:bodyPr xmlns:a="http://schemas.openxmlformats.org/drawingml/2006/main" lIns="76200" tIns="38100" rIns="76200" bIns="38100" anchor="ctr"/>
-          <a:lstStyle xmlns:a="http://schemas.openxmlformats.org/drawingml/2006/main"/>
-          <a:p xmlns:a="http://schemas.openxmlformats.org/drawingml/2006/main">
-            <a:pPr algn="ctr">
-              <a:defRPr sz="2100" b="1">
-                <a:solidFill>
-                  <a:srgbClr val="FFFFFF"/>
-                </a:solidFill>
-              </a:defRPr>
-            </a:pPr>
-            <a:r>
-              <a:rPr sz="2100" b="1">
-                <a:solidFill>
-                  <a:srgbClr val="FFFFFF"/>
-                </a:solidFill>
-                <a:latin typeface="Arial"/>
-                <a:ea typeface="Arial"/>
-                <a:cs typeface="Arial"/>
-              </a:rPr>
-              <a:t>The AI Scientist</a:t>
-            </a:r>
-          </a:p>
-        </p:txBody>
-      </p:sp>
-      <p:sp>
-        <p:nvSpPr>
-          <p:cNvPr id="9" name="p12-right">
-            <a:extLst xmlns:a="http://schemas.openxmlformats.org/drawingml/2006/main">
-              <a:ext uri="{FF2B5EF4-FFF2-40B4-BE49-F238E27FC236}">
-                <a16:creationId xmlns:a16="http://schemas.microsoft.com/office/drawing/2014/main" id="{FB4D9774-F464-4583-AF1D-49E5A6A27862}"/>
-              </a:ext>
-            </a:extLst>
-          </p:cNvPr>
-          <p:cNvSpPr>
-            <a:spLocks xmlns:a="http://schemas.openxmlformats.org/drawingml/2006/main" noGrp="1"/>
-          </p:cNvSpPr>
-          <p:nvPr/>
-        </p:nvSpPr>
-        <p:spPr>
-          <a:xfrm xmlns:a="http://schemas.openxmlformats.org/drawingml/2006/main">
-            <a:off x="6553200" y="1581150"/>
-            <a:ext cx="4953000" cy="3048000"/>
-          </a:xfrm>
-          <a:prstGeom xmlns:a="http://schemas.openxmlformats.org/drawingml/2006/main" prst="rect">
-            <a:avLst/>
-          </a:prstGeom>
-          <a:solidFill xmlns:a="http://schemas.openxmlformats.org/drawingml/2006/main">
-            <a:srgbClr val="F8E9EA"/>
-          </a:solidFill>
-          <a:ln xmlns:a="http://schemas.openxmlformats.org/drawingml/2006/main" w="0">
-            <a:noFill/>
-            <a:prstDash val="solid"/>
-          </a:ln>
-        </p:spPr>
-        <p:txBody>
-          <a:bodyPr xmlns:a="http://schemas.openxmlformats.org/drawingml/2006/main" lIns="76200" tIns="38100" rIns="76200" bIns="38100" anchor="ctr"/>
-          <a:lstStyle xmlns:a="http://schemas.openxmlformats.org/drawingml/2006/main"/>
-          <a:p xmlns:a="http://schemas.openxmlformats.org/drawingml/2006/main">
-            <a:pPr algn="ctr">
-              <a:lnSpc>
-                <a:spcPct val="125000"/>
-              </a:lnSpc>
-              <a:buNone/>
-              <a:defRPr sz="1650" b="1">
-                <a:solidFill>
-                  <a:srgbClr val="263746"/>
-                </a:solidFill>
-              </a:defRPr>
-            </a:pPr>
-            <a:r>
-              <a:rPr sz="1650" b="1">
-                <a:solidFill>
-                  <a:srgbClr val="263746"/>
-                </a:solidFill>
-                <a:latin typeface="Microsoft YaHei"/>
-                <a:ea typeface="Microsoft YaHei"/>
-                <a:cs typeface="Microsoft YaHei"/>
-              </a:rPr>
-              <a:t>Lu et al. · Nature 2026</a:t>
-            </a:r>
-          </a:p>
-          <a:p xmlns:a="http://schemas.openxmlformats.org/drawingml/2006/main">
-            <a:r>
-              <a:t/>
-            </a:r>
-          </a:p>
-          <a:p xmlns:a="http://schemas.openxmlformats.org/drawingml/2006/main">
-            <a:pPr algn="ctr">
-              <a:lnSpc>
-                <a:spcPct val="125000"/>
-              </a:lnSpc>
-              <a:buNone/>
-              <a:defRPr sz="1650" b="1">
-                <a:solidFill>
-                  <a:srgbClr val="263746"/>
-                </a:solidFill>
-              </a:defRPr>
-            </a:pPr>
-            <a:r>
-              <a:rPr sz="1650" b="1">
-                <a:solidFill>
-                  <a:srgbClr val="263746"/>
-                </a:solidFill>
-                <a:latin typeface="Microsoft YaHei"/>
-                <a:ea typeface="Microsoft YaHei"/>
-                <a:cs typeface="Microsoft YaHei"/>
-              </a:rPr>
-              <a:t>计算型 ML 研究管线</a:t>
-            </a:r>
-          </a:p>
-          <a:p xmlns:a="http://schemas.openxmlformats.org/drawingml/2006/main">
-            <a:pPr algn="ctr">
-              <a:lnSpc>
-                <a:spcPct val="125000"/>
-              </a:lnSpc>
-              <a:buNone/>
-              <a:defRPr sz="1650" b="1">
-                <a:solidFill>
-                  <a:srgbClr val="263746"/>
-                </a:solidFill>
-              </a:defRPr>
-            </a:pPr>
-            <a:r>
-              <a:rPr sz="1650" b="1">
-                <a:solidFill>
-                  <a:srgbClr val="263746"/>
-                </a:solidFill>
-                <a:latin typeface="Microsoft YaHei"/>
-                <a:ea typeface="Microsoft YaHei"/>
-                <a:cs typeface="Microsoft YaHei"/>
-              </a:rPr>
-              <a:t>想法 → 代码 → 实验 → 分析</a:t>
-            </a:r>
-          </a:p>
-          <a:p xmlns:a="http://schemas.openxmlformats.org/drawingml/2006/main">
-            <a:pPr algn="ctr">
-              <a:lnSpc>
-                <a:spcPct val="125000"/>
-              </a:lnSpc>
-              <a:buNone/>
-              <a:defRPr sz="1650" b="1">
-                <a:solidFill>
-                  <a:srgbClr val="263746"/>
-                </a:solidFill>
-              </a:defRPr>
-            </a:pPr>
-            <a:r>
-              <a:rPr sz="1650" b="1">
-                <a:solidFill>
-                  <a:srgbClr val="263746"/>
-                </a:solidFill>
-                <a:latin typeface="Microsoft YaHei"/>
-                <a:ea typeface="Microsoft YaHei"/>
-                <a:cs typeface="Microsoft YaHei"/>
-              </a:rPr>
-              <a:t>→ 论文 → 自动评审</a:t>
-            </a:r>
-          </a:p>
-          <a:p xmlns:a="http://schemas.openxmlformats.org/drawingml/2006/main">
-            <a:r>
-              <a:t/>
-            </a:r>
-          </a:p>
-          <a:p xmlns:a="http://schemas.openxmlformats.org/drawingml/2006/main">
-            <a:pPr algn="ctr">
-              <a:lnSpc>
-                <a:spcPct val="125000"/>
-              </a:lnSpc>
-              <a:buNone/>
-              <a:defRPr sz="1650" b="1">
-                <a:solidFill>
-                  <a:srgbClr val="263746"/>
-                </a:solidFill>
-              </a:defRPr>
-            </a:pPr>
-            <a:r>
-              <a:rPr sz="1650" b="1">
-                <a:solidFill>
-                  <a:srgbClr val="263746"/>
-                </a:solidFill>
-                <a:latin typeface="Microsoft YaHei"/>
-                <a:ea typeface="Microsoft YaHei"/>
-                <a:cs typeface="Microsoft YaHei"/>
-              </a:rPr>
               <a:t>角色：端到端自动化的边界案例</a:t>
             </a:r>
           </a:p>
@@ -7440,10 +7487,10 @@
       </p:sp>
       <p:sp>
         <p:nvSpPr>
-          <p:cNvPr id="10" name="p12-bottom">
-            <a:extLst xmlns:a="http://schemas.openxmlformats.org/drawingml/2006/main">
-              <a:ext uri="{FF2B5EF4-FFF2-40B4-BE49-F238E27FC236}">
-                <a16:creationId xmlns:a16="http://schemas.microsoft.com/office/drawing/2014/main" id="{BBF0F5AF-705A-4702-BDBE-8F308ED10EF9}"/>
+          <p:cNvPr id="11" name="p12-bottom">
+            <a:extLst xmlns:a="http://schemas.openxmlformats.org/drawingml/2006/main">
+              <a:ext uri="{FF2B5EF4-FFF2-40B4-BE49-F238E27FC236}">
+                <a16:creationId xmlns:a16="http://schemas.microsoft.com/office/drawing/2014/main" id="{E4C0242B-F2F0-494D-8BDD-FA214FAE4E83}"/>
               </a:ext>
             </a:extLst>
           </p:cNvPr>
@@ -7594,7 +7641,7 @@
           <p:cNvPr id="6" name="p13-h-0">
             <a:extLst xmlns:a="http://schemas.openxmlformats.org/drawingml/2006/main">
               <a:ext uri="{FF2B5EF4-FFF2-40B4-BE49-F238E27FC236}">
-                <a16:creationId xmlns:a16="http://schemas.microsoft.com/office/drawing/2014/main" id="{7C324C15-95C7-4302-B862-A9DA6BCB760C}"/>
+                <a16:creationId xmlns:a16="http://schemas.microsoft.com/office/drawing/2014/main" id="{D3545370-DCB7-4AEC-B8A1-D6F666F4CE2A}"/>
               </a:ext>
             </a:extLst>
           </p:cNvPr>
@@ -7649,7 +7696,7 @@
           <p:cNvPr id="7" name="p13-h-1">
             <a:extLst xmlns:a="http://schemas.openxmlformats.org/drawingml/2006/main">
               <a:ext uri="{FF2B5EF4-FFF2-40B4-BE49-F238E27FC236}">
-                <a16:creationId xmlns:a16="http://schemas.microsoft.com/office/drawing/2014/main" id="{DC63C81A-1918-4722-A730-EF8B28BE3325}"/>
+                <a16:creationId xmlns:a16="http://schemas.microsoft.com/office/drawing/2014/main" id="{8D1FA177-F15A-49FF-9051-7557CC29DCF4}"/>
               </a:ext>
             </a:extLst>
           </p:cNvPr>
@@ -7704,7 +7751,7 @@
           <p:cNvPr id="8" name="p13-h-2">
             <a:extLst xmlns:a="http://schemas.openxmlformats.org/drawingml/2006/main">
               <a:ext uri="{FF2B5EF4-FFF2-40B4-BE49-F238E27FC236}">
-                <a16:creationId xmlns:a16="http://schemas.microsoft.com/office/drawing/2014/main" id="{48C1250C-76C0-4B90-A9C8-0ADE24549C4E}"/>
+                <a16:creationId xmlns:a16="http://schemas.microsoft.com/office/drawing/2014/main" id="{F2EE9042-C2A7-48B3-9010-C2ADE85595BD}"/>
               </a:ext>
             </a:extLst>
           </p:cNvPr>
@@ -7759,7 +7806,7 @@
           <p:cNvPr id="9" name="p13-r0-0">
             <a:extLst xmlns:a="http://schemas.openxmlformats.org/drawingml/2006/main">
               <a:ext uri="{FF2B5EF4-FFF2-40B4-BE49-F238E27FC236}">
-                <a16:creationId xmlns:a16="http://schemas.microsoft.com/office/drawing/2014/main" id="{64DA2065-2FB2-4BE8-92FE-087483A71EBB}"/>
+                <a16:creationId xmlns:a16="http://schemas.microsoft.com/office/drawing/2014/main" id="{476D6B87-6185-4192-AC06-CD461557CD98}"/>
               </a:ext>
             </a:extLst>
           </p:cNvPr>
@@ -7820,7 +7867,7 @@
           <p:cNvPr id="10" name="p13-r0-1">
             <a:extLst xmlns:a="http://schemas.openxmlformats.org/drawingml/2006/main">
               <a:ext uri="{FF2B5EF4-FFF2-40B4-BE49-F238E27FC236}">
-                <a16:creationId xmlns:a16="http://schemas.microsoft.com/office/drawing/2014/main" id="{FB4697A4-6747-4FE5-9B44-0EADAAE10B17}"/>
+                <a16:creationId xmlns:a16="http://schemas.microsoft.com/office/drawing/2014/main" id="{00BF110E-4854-4D8D-901D-54E9AD6A4B3C}"/>
               </a:ext>
             </a:extLst>
           </p:cNvPr>
@@ -7881,7 +7928,7 @@
           <p:cNvPr id="11" name="p13-r0-2">
             <a:extLst xmlns:a="http://schemas.openxmlformats.org/drawingml/2006/main">
               <a:ext uri="{FF2B5EF4-FFF2-40B4-BE49-F238E27FC236}">
-                <a16:creationId xmlns:a16="http://schemas.microsoft.com/office/drawing/2014/main" id="{43F54D03-AEE5-477B-B94C-DE02720EC4CE}"/>
+                <a16:creationId xmlns:a16="http://schemas.microsoft.com/office/drawing/2014/main" id="{6225E1A2-9A46-4029-8E44-7C8370296E1B}"/>
               </a:ext>
             </a:extLst>
           </p:cNvPr>
@@ -7942,7 +7989,7 @@
           <p:cNvPr id="12" name="p13-r1-0">
             <a:extLst xmlns:a="http://schemas.openxmlformats.org/drawingml/2006/main">
               <a:ext uri="{FF2B5EF4-FFF2-40B4-BE49-F238E27FC236}">
-                <a16:creationId xmlns:a16="http://schemas.microsoft.com/office/drawing/2014/main" id="{930F38BA-AC52-477A-A120-FB511EFD746F}"/>
+                <a16:creationId xmlns:a16="http://schemas.microsoft.com/office/drawing/2014/main" id="{E750D70A-9143-4AE1-98AF-D54286438FF1}"/>
               </a:ext>
             </a:extLst>
           </p:cNvPr>
@@ -8003,7 +8050,7 @@
           <p:cNvPr id="13" name="p13-r1-1">
             <a:extLst xmlns:a="http://schemas.openxmlformats.org/drawingml/2006/main">
               <a:ext uri="{FF2B5EF4-FFF2-40B4-BE49-F238E27FC236}">
-                <a16:creationId xmlns:a16="http://schemas.microsoft.com/office/drawing/2014/main" id="{0CEE8455-640C-490F-9BCA-0247BF62336C}"/>
+                <a16:creationId xmlns:a16="http://schemas.microsoft.com/office/drawing/2014/main" id="{728FFABD-80AD-4CB5-8DAC-D1F53F274908}"/>
               </a:ext>
             </a:extLst>
           </p:cNvPr>
@@ -8064,7 +8111,7 @@
           <p:cNvPr id="14" name="p13-r1-2">
             <a:extLst xmlns:a="http://schemas.openxmlformats.org/drawingml/2006/main">
               <a:ext uri="{FF2B5EF4-FFF2-40B4-BE49-F238E27FC236}">
-                <a16:creationId xmlns:a16="http://schemas.microsoft.com/office/drawing/2014/main" id="{70C86E5C-11A1-4D72-95DB-905CB081E4E8}"/>
+                <a16:creationId xmlns:a16="http://schemas.microsoft.com/office/drawing/2014/main" id="{1AC6D633-2696-474E-8E31-5F2CF1E8DB0B}"/>
               </a:ext>
             </a:extLst>
           </p:cNvPr>
@@ -8125,7 +8172,7 @@
           <p:cNvPr id="15" name="p13-r2-0">
             <a:extLst xmlns:a="http://schemas.openxmlformats.org/drawingml/2006/main">
               <a:ext uri="{FF2B5EF4-FFF2-40B4-BE49-F238E27FC236}">
-                <a16:creationId xmlns:a16="http://schemas.microsoft.com/office/drawing/2014/main" id="{80DA4B1C-4878-4AF2-A652-B83E0E0AEF27}"/>
+                <a16:creationId xmlns:a16="http://schemas.microsoft.com/office/drawing/2014/main" id="{131AD264-4570-41D0-B4F2-1D58F4BA713F}"/>
               </a:ext>
             </a:extLst>
           </p:cNvPr>
@@ -8186,7 +8233,7 @@
           <p:cNvPr id="16" name="p13-r2-1">
             <a:extLst xmlns:a="http://schemas.openxmlformats.org/drawingml/2006/main">
               <a:ext uri="{FF2B5EF4-FFF2-40B4-BE49-F238E27FC236}">
-                <a16:creationId xmlns:a16="http://schemas.microsoft.com/office/drawing/2014/main" id="{547BCA14-2F83-4056-A198-A6E39C0A8700}"/>
+                <a16:creationId xmlns:a16="http://schemas.microsoft.com/office/drawing/2014/main" id="{BA208958-0FF5-4C7D-AD7C-156A10918664}"/>
               </a:ext>
             </a:extLst>
           </p:cNvPr>
@@ -8247,7 +8294,7 @@
           <p:cNvPr id="17" name="p13-r2-2">
             <a:extLst xmlns:a="http://schemas.openxmlformats.org/drawingml/2006/main">
               <a:ext uri="{FF2B5EF4-FFF2-40B4-BE49-F238E27FC236}">
-                <a16:creationId xmlns:a16="http://schemas.microsoft.com/office/drawing/2014/main" id="{FADA4608-667B-4DD3-9A2D-A9C36914FDE4}"/>
+                <a16:creationId xmlns:a16="http://schemas.microsoft.com/office/drawing/2014/main" id="{AF0A683D-E2E3-4A38-B727-3A1E2539A6D6}"/>
               </a:ext>
             </a:extLst>
           </p:cNvPr>
@@ -8308,7 +8355,7 @@
           <p:cNvPr id="18" name="p13-r3-0">
             <a:extLst xmlns:a="http://schemas.openxmlformats.org/drawingml/2006/main">
               <a:ext uri="{FF2B5EF4-FFF2-40B4-BE49-F238E27FC236}">
-                <a16:creationId xmlns:a16="http://schemas.microsoft.com/office/drawing/2014/main" id="{00E7827D-04DE-4A8B-91CA-E54AC396EDCB}"/>
+                <a16:creationId xmlns:a16="http://schemas.microsoft.com/office/drawing/2014/main" id="{3B41FB65-2087-4F1C-BF94-AB7DE26EF9A0}"/>
               </a:ext>
             </a:extLst>
           </p:cNvPr>
@@ -8369,7 +8416,7 @@
           <p:cNvPr id="19" name="p13-r3-1">
             <a:extLst xmlns:a="http://schemas.openxmlformats.org/drawingml/2006/main">
               <a:ext uri="{FF2B5EF4-FFF2-40B4-BE49-F238E27FC236}">
-                <a16:creationId xmlns:a16="http://schemas.microsoft.com/office/drawing/2014/main" id="{E510314D-76E1-48AC-ACD6-2A6F1EA8424E}"/>
+                <a16:creationId xmlns:a16="http://schemas.microsoft.com/office/drawing/2014/main" id="{40CAD686-8C91-419A-9B76-B5EA0F5DC892}"/>
               </a:ext>
             </a:extLst>
           </p:cNvPr>
@@ -8430,7 +8477,7 @@
           <p:cNvPr id="20" name="p13-r3-2">
             <a:extLst xmlns:a="http://schemas.openxmlformats.org/drawingml/2006/main">
               <a:ext uri="{FF2B5EF4-FFF2-40B4-BE49-F238E27FC236}">
-                <a16:creationId xmlns:a16="http://schemas.microsoft.com/office/drawing/2014/main" id="{938556C0-6781-4932-A225-B93F9C14C206}"/>
+                <a16:creationId xmlns:a16="http://schemas.microsoft.com/office/drawing/2014/main" id="{A38D6B06-3979-4A93-B329-EC7FC65E5B91}"/>
               </a:ext>
             </a:extLst>
           </p:cNvPr>
@@ -8491,7 +8538,7 @@
           <p:cNvPr id="21" name="p13-r4-0">
             <a:extLst xmlns:a="http://schemas.openxmlformats.org/drawingml/2006/main">
               <a:ext uri="{FF2B5EF4-FFF2-40B4-BE49-F238E27FC236}">
-                <a16:creationId xmlns:a16="http://schemas.microsoft.com/office/drawing/2014/main" id="{4FA622D4-1E0C-41D8-845F-EAE9034F78BA}"/>
+                <a16:creationId xmlns:a16="http://schemas.microsoft.com/office/drawing/2014/main" id="{FFBB27FA-F127-4398-81F5-F217FBF2A162}"/>
               </a:ext>
             </a:extLst>
           </p:cNvPr>
@@ -8552,7 +8599,7 @@
           <p:cNvPr id="22" name="p13-r4-1">
             <a:extLst xmlns:a="http://schemas.openxmlformats.org/drawingml/2006/main">
               <a:ext uri="{FF2B5EF4-FFF2-40B4-BE49-F238E27FC236}">
-                <a16:creationId xmlns:a16="http://schemas.microsoft.com/office/drawing/2014/main" id="{73FA2842-8ACB-4E8C-878E-80D0E4AEBB80}"/>
+                <a16:creationId xmlns:a16="http://schemas.microsoft.com/office/drawing/2014/main" id="{BE9D1B2E-9262-45B6-89B4-A5E01A41CE03}"/>
               </a:ext>
             </a:extLst>
           </p:cNvPr>
@@ -8613,7 +8660,7 @@
           <p:cNvPr id="23" name="p13-r4-2">
             <a:extLst xmlns:a="http://schemas.openxmlformats.org/drawingml/2006/main">
               <a:ext uri="{FF2B5EF4-FFF2-40B4-BE49-F238E27FC236}">
-                <a16:creationId xmlns:a16="http://schemas.microsoft.com/office/drawing/2014/main" id="{CBA2975E-7AAC-4E93-9189-6642D6BF4127}"/>
+                <a16:creationId xmlns:a16="http://schemas.microsoft.com/office/drawing/2014/main" id="{780543DE-7D4C-4CC7-B15C-E5E2B38D3B59}"/>
               </a:ext>
             </a:extLst>
           </p:cNvPr>
@@ -8674,7 +8721,7 @@
           <p:cNvPr id="24" name="p13-r5-0">
             <a:extLst xmlns:a="http://schemas.openxmlformats.org/drawingml/2006/main">
               <a:ext uri="{FF2B5EF4-FFF2-40B4-BE49-F238E27FC236}">
-                <a16:creationId xmlns:a16="http://schemas.microsoft.com/office/drawing/2014/main" id="{62E77F4A-1CED-43C2-BF73-BC9F2845849C}"/>
+                <a16:creationId xmlns:a16="http://schemas.microsoft.com/office/drawing/2014/main" id="{57102E73-126D-441A-AC1B-F08D9381802D}"/>
               </a:ext>
             </a:extLst>
           </p:cNvPr>
@@ -8735,7 +8782,7 @@
           <p:cNvPr id="25" name="p13-r5-1">
             <a:extLst xmlns:a="http://schemas.openxmlformats.org/drawingml/2006/main">
               <a:ext uri="{FF2B5EF4-FFF2-40B4-BE49-F238E27FC236}">
-                <a16:creationId xmlns:a16="http://schemas.microsoft.com/office/drawing/2014/main" id="{A2F1FF13-9C17-49F7-AA10-CEDCB6B1CF3B}"/>
+                <a16:creationId xmlns:a16="http://schemas.microsoft.com/office/drawing/2014/main" id="{157549E4-3E88-4AFB-976C-7ED089BCE754}"/>
               </a:ext>
             </a:extLst>
           </p:cNvPr>
@@ -8796,7 +8843,7 @@
           <p:cNvPr id="26" name="p13-r5-2">
             <a:extLst xmlns:a="http://schemas.openxmlformats.org/drawingml/2006/main">
               <a:ext uri="{FF2B5EF4-FFF2-40B4-BE49-F238E27FC236}">
-                <a16:creationId xmlns:a16="http://schemas.microsoft.com/office/drawing/2014/main" id="{355DE4A4-7297-4315-A000-20E8C6D7A7BF}"/>
+                <a16:creationId xmlns:a16="http://schemas.microsoft.com/office/drawing/2014/main" id="{ACA40CFB-E3C4-4166-AF8B-F954DA39BB46}"/>
               </a:ext>
             </a:extLst>
           </p:cNvPr>
@@ -8857,7 +8904,7 @@
           <p:cNvPr id="27" name="p13-r6-0">
             <a:extLst xmlns:a="http://schemas.openxmlformats.org/drawingml/2006/main">
               <a:ext uri="{FF2B5EF4-FFF2-40B4-BE49-F238E27FC236}">
-                <a16:creationId xmlns:a16="http://schemas.microsoft.com/office/drawing/2014/main" id="{D54F69E1-9B3E-4344-A44C-674656DC4E27}"/>
+                <a16:creationId xmlns:a16="http://schemas.microsoft.com/office/drawing/2014/main" id="{724F8018-1725-41F8-B112-ACD87A9DCDA2}"/>
               </a:ext>
             </a:extLst>
           </p:cNvPr>
@@ -8918,7 +8965,7 @@
           <p:cNvPr id="28" name="p13-r6-1">
             <a:extLst xmlns:a="http://schemas.openxmlformats.org/drawingml/2006/main">
               <a:ext uri="{FF2B5EF4-FFF2-40B4-BE49-F238E27FC236}">
-                <a16:creationId xmlns:a16="http://schemas.microsoft.com/office/drawing/2014/main" id="{B39904D9-66CB-4118-9CEA-C36C3750A976}"/>
+                <a16:creationId xmlns:a16="http://schemas.microsoft.com/office/drawing/2014/main" id="{9F0105D3-AF1A-42E6-AFD0-DE277420B373}"/>
               </a:ext>
             </a:extLst>
           </p:cNvPr>
@@ -8979,7 +9026,7 @@
           <p:cNvPr id="29" name="p13-r6-2">
             <a:extLst xmlns:a="http://schemas.openxmlformats.org/drawingml/2006/main">
               <a:ext uri="{FF2B5EF4-FFF2-40B4-BE49-F238E27FC236}">
-                <a16:creationId xmlns:a16="http://schemas.microsoft.com/office/drawing/2014/main" id="{1CE9574B-6F44-4D54-AE6D-6D24C61D56AF}"/>
+                <a16:creationId xmlns:a16="http://schemas.microsoft.com/office/drawing/2014/main" id="{B7A8A9BE-9B3B-41C9-AD44-4268457EEC2A}"/>
               </a:ext>
             </a:extLst>
           </p:cNvPr>
@@ -9040,7 +9087,7 @@
           <p:cNvPr id="30" name="p13-r7-0">
             <a:extLst xmlns:a="http://schemas.openxmlformats.org/drawingml/2006/main">
               <a:ext uri="{FF2B5EF4-FFF2-40B4-BE49-F238E27FC236}">
-                <a16:creationId xmlns:a16="http://schemas.microsoft.com/office/drawing/2014/main" id="{F96FC65E-9048-4DE0-BBA3-B1D3392446B1}"/>
+                <a16:creationId xmlns:a16="http://schemas.microsoft.com/office/drawing/2014/main" id="{CB66898F-6391-4D40-8093-2E14BD9EA902}"/>
               </a:ext>
             </a:extLst>
           </p:cNvPr>
@@ -9101,7 +9148,7 @@
           <p:cNvPr id="31" name="p13-r7-1">
             <a:extLst xmlns:a="http://schemas.openxmlformats.org/drawingml/2006/main">
               <a:ext uri="{FF2B5EF4-FFF2-40B4-BE49-F238E27FC236}">
-                <a16:creationId xmlns:a16="http://schemas.microsoft.com/office/drawing/2014/main" id="{B0048E45-BA0D-48DC-8796-11652192F342}"/>
+                <a16:creationId xmlns:a16="http://schemas.microsoft.com/office/drawing/2014/main" id="{29A53EC1-AC9C-4345-9215-7E2E0C2AD82D}"/>
               </a:ext>
             </a:extLst>
           </p:cNvPr>
@@ -9162,7 +9209,7 @@
           <p:cNvPr id="32" name="p13-r7-2">
             <a:extLst xmlns:a="http://schemas.openxmlformats.org/drawingml/2006/main">
               <a:ext uri="{FF2B5EF4-FFF2-40B4-BE49-F238E27FC236}">
-                <a16:creationId xmlns:a16="http://schemas.microsoft.com/office/drawing/2014/main" id="{0C6EA572-701E-4A1A-9C67-E66A65173D7E}"/>
+                <a16:creationId xmlns:a16="http://schemas.microsoft.com/office/drawing/2014/main" id="{33EC097A-C968-4BAE-81AA-08991DA6FFA5}"/>
               </a:ext>
             </a:extLst>
           </p:cNvPr>
@@ -9223,7 +9270,7 @@
           <p:cNvPr id="33" name="p13-bottom">
             <a:extLst xmlns:a="http://schemas.openxmlformats.org/drawingml/2006/main">
               <a:ext uri="{FF2B5EF4-FFF2-40B4-BE49-F238E27FC236}">
-                <a16:creationId xmlns:a16="http://schemas.microsoft.com/office/drawing/2014/main" id="{78470E78-6597-4A01-83DD-B7692E7BA469}"/>
+                <a16:creationId xmlns:a16="http://schemas.microsoft.com/office/drawing/2014/main" id="{EEA274D9-C7C6-4489-818F-ED339ADB2439}"/>
               </a:ext>
             </a:extLst>
           </p:cNvPr>
@@ -9370,7 +9417,7 @@
           <p:cNvPr id="6" name="p14-b1">
             <a:extLst xmlns:a="http://schemas.openxmlformats.org/drawingml/2006/main">
               <a:ext uri="{FF2B5EF4-FFF2-40B4-BE49-F238E27FC236}">
-                <a16:creationId xmlns:a16="http://schemas.microsoft.com/office/drawing/2014/main" id="{BE7F8214-C5E0-4BC9-AD46-EEE46BFC2EDB}"/>
+                <a16:creationId xmlns:a16="http://schemas.microsoft.com/office/drawing/2014/main" id="{F7E3B5AD-6B3A-4D5D-9925-B90CAB998FB0}"/>
               </a:ext>
             </a:extLst>
           </p:cNvPr>
@@ -9427,7 +9474,7 @@
           <p:cNvPr id="7" name="p14-b2">
             <a:extLst xmlns:a="http://schemas.openxmlformats.org/drawingml/2006/main">
               <a:ext uri="{FF2B5EF4-FFF2-40B4-BE49-F238E27FC236}">
-                <a16:creationId xmlns:a16="http://schemas.microsoft.com/office/drawing/2014/main" id="{054BDCE4-27EA-488E-A9D4-BC684D84177B}"/>
+                <a16:creationId xmlns:a16="http://schemas.microsoft.com/office/drawing/2014/main" id="{892EEF22-9C8B-4A57-B648-79FE33CE37D2}"/>
               </a:ext>
             </a:extLst>
           </p:cNvPr>
@@ -9486,19 +9533,19 @@
           <p:cNvPr id="8" name="p14-h">
             <a:extLst xmlns:a="http://schemas.openxmlformats.org/drawingml/2006/main">
               <a:ext uri="{FF2B5EF4-FFF2-40B4-BE49-F238E27FC236}">
-                <a16:creationId xmlns:a16="http://schemas.microsoft.com/office/drawing/2014/main" id="{EA57762B-6266-4E06-93B5-B0D3F8E9DEBC}"/>
-              </a:ext>
-            </a:extLst>
-          </p:cNvPr>
-          <p:cNvSpPr>
-            <a:spLocks xmlns:a="http://schemas.openxmlformats.org/drawingml/2006/main" noGrp="1"/>
-          </p:cNvSpPr>
-          <p:nvPr/>
-        </p:nvSpPr>
-        <p:spPr>
-          <a:xfrm xmlns:a="http://schemas.openxmlformats.org/drawingml/2006/main">
-            <a:off x="685800" y="2647950"/>
-            <a:ext cx="2095500" cy="438150"/>
+                <a16:creationId xmlns:a16="http://schemas.microsoft.com/office/drawing/2014/main" id="{13A79DC9-EE61-40AB-B0A8-BE7543DF6979}"/>
+              </a:ext>
+            </a:extLst>
+          </p:cNvPr>
+          <p:cNvSpPr>
+            <a:spLocks xmlns:a="http://schemas.openxmlformats.org/drawingml/2006/main" noGrp="1"/>
+          </p:cNvSpPr>
+          <p:nvPr/>
+        </p:nvSpPr>
+        <p:spPr>
+          <a:xfrm xmlns:a="http://schemas.openxmlformats.org/drawingml/2006/main">
+            <a:off x="685800" y="2609850"/>
+            <a:ext cx="2400300" cy="476250"/>
           </a:xfrm>
           <a:prstGeom xmlns:a="http://schemas.openxmlformats.org/drawingml/2006/main" prst="rect">
             <a:avLst/>
@@ -9516,14 +9563,14 @@
           <a:lstStyle xmlns:a="http://schemas.openxmlformats.org/drawingml/2006/main"/>
           <a:p xmlns:a="http://schemas.openxmlformats.org/drawingml/2006/main">
             <a:pPr algn="ctr">
-              <a:defRPr sz="1725" b="1">
+              <a:defRPr sz="1800" b="1">
                 <a:solidFill>
                   <a:srgbClr val="FFFFFF"/>
                 </a:solidFill>
               </a:defRPr>
             </a:pPr>
             <a:r>
-              <a:rPr sz="1725" b="1">
+              <a:rPr sz="1800" b="1">
                 <a:solidFill>
                   <a:srgbClr val="FFFFFF"/>
                 </a:solidFill>
@@ -9541,19 +9588,19 @@
           <p:cNvPr id="9" name="p14-i-0">
             <a:extLst xmlns:a="http://schemas.openxmlformats.org/drawingml/2006/main">
               <a:ext uri="{FF2B5EF4-FFF2-40B4-BE49-F238E27FC236}">
-                <a16:creationId xmlns:a16="http://schemas.microsoft.com/office/drawing/2014/main" id="{BD6AFE6C-B4DB-49B3-87C8-78CEF034CFF2}"/>
-              </a:ext>
-            </a:extLst>
-          </p:cNvPr>
-          <p:cNvSpPr>
-            <a:spLocks xmlns:a="http://schemas.openxmlformats.org/drawingml/2006/main" noGrp="1"/>
-          </p:cNvSpPr>
-          <p:nvPr/>
-        </p:nvSpPr>
-        <p:spPr>
-          <a:xfrm xmlns:a="http://schemas.openxmlformats.org/drawingml/2006/main">
-            <a:off x="2971800" y="2647950"/>
-            <a:ext cx="8343900" cy="400050"/>
+                <a16:creationId xmlns:a16="http://schemas.microsoft.com/office/drawing/2014/main" id="{3FF50F01-0E3E-46A8-845E-35AB10A9ABB4}"/>
+              </a:ext>
+            </a:extLst>
+          </p:cNvPr>
+          <p:cNvSpPr>
+            <a:spLocks xmlns:a="http://schemas.openxmlformats.org/drawingml/2006/main" noGrp="1"/>
+          </p:cNvSpPr>
+          <p:nvPr/>
+        </p:nvSpPr>
+        <p:spPr>
+          <a:xfrm xmlns:a="http://schemas.openxmlformats.org/drawingml/2006/main">
+            <a:off x="3257550" y="2609850"/>
+            <a:ext cx="8058150" cy="457200"/>
           </a:xfrm>
           <a:prstGeom xmlns:a="http://schemas.openxmlformats.org/drawingml/2006/main" prst="rect">
             <a:avLst/>
@@ -9571,14 +9618,14 @@
           <a:lstStyle xmlns:a="http://schemas.openxmlformats.org/drawingml/2006/main"/>
           <a:p xmlns:a="http://schemas.openxmlformats.org/drawingml/2006/main">
             <a:pPr algn="l">
-              <a:defRPr sz="1500" b="1">
+              <a:defRPr sz="1800" b="1">
                 <a:solidFill>
                   <a:srgbClr val="C8161E"/>
                 </a:solidFill>
               </a:defRPr>
             </a:pPr>
             <a:r>
-              <a:rPr sz="1500" b="1">
+              <a:rPr sz="1800" b="1">
                 <a:solidFill>
                   <a:srgbClr val="C8161E"/>
                 </a:solidFill>
@@ -9586,7 +9633,7 @@
                 <a:ea typeface="Microsoft YaHei"/>
                 <a:cs typeface="Microsoft YaHei"/>
               </a:rPr>
-              <a:t>×  AI 已能自主完成科研</a:t>
+              <a:t>×  AI 已能自主科研 / Agent 可替代研究判断</a:t>
             </a:r>
           </a:p>
         </p:txBody>
@@ -9596,19 +9643,19 @@
           <p:cNvPr id="10" name="p14-i-1">
             <a:extLst xmlns:a="http://schemas.openxmlformats.org/drawingml/2006/main">
               <a:ext uri="{FF2B5EF4-FFF2-40B4-BE49-F238E27FC236}">
-                <a16:creationId xmlns:a16="http://schemas.microsoft.com/office/drawing/2014/main" id="{AD451324-0EB4-4B50-BA73-8DFEC2492CC7}"/>
-              </a:ext>
-            </a:extLst>
-          </p:cNvPr>
-          <p:cNvSpPr>
-            <a:spLocks xmlns:a="http://schemas.openxmlformats.org/drawingml/2006/main" noGrp="1"/>
-          </p:cNvSpPr>
-          <p:nvPr/>
-        </p:nvSpPr>
-        <p:spPr>
-          <a:xfrm xmlns:a="http://schemas.openxmlformats.org/drawingml/2006/main">
-            <a:off x="2971800" y="3181350"/>
-            <a:ext cx="8343900" cy="400050"/>
+                <a16:creationId xmlns:a16="http://schemas.microsoft.com/office/drawing/2014/main" id="{9D7AE4A2-6CE6-4AB6-B862-202DAD93AB7D}"/>
+              </a:ext>
+            </a:extLst>
+          </p:cNvPr>
+          <p:cNvSpPr>
+            <a:spLocks xmlns:a="http://schemas.openxmlformats.org/drawingml/2006/main" noGrp="1"/>
+          </p:cNvSpPr>
+          <p:nvPr/>
+        </p:nvSpPr>
+        <p:spPr>
+          <a:xfrm xmlns:a="http://schemas.openxmlformats.org/drawingml/2006/main">
+            <a:off x="3257550" y="3162300"/>
+            <a:ext cx="8058150" cy="457200"/>
           </a:xfrm>
           <a:prstGeom xmlns:a="http://schemas.openxmlformats.org/drawingml/2006/main" prst="rect">
             <a:avLst/>
@@ -9626,14 +9673,14 @@
           <a:lstStyle xmlns:a="http://schemas.openxmlformats.org/drawingml/2006/main"/>
           <a:p xmlns:a="http://schemas.openxmlformats.org/drawingml/2006/main">
             <a:pPr algn="l">
-              <a:defRPr sz="1500" b="1">
+              <a:defRPr sz="1800" b="1">
                 <a:solidFill>
                   <a:srgbClr val="C8161E"/>
                 </a:solidFill>
               </a:defRPr>
             </a:pPr>
             <a:r>
-              <a:rPr sz="1500" b="1">
+              <a:rPr sz="1800" b="1">
                 <a:solidFill>
                   <a:srgbClr val="C8161E"/>
                 </a:solidFill>
@@ -9641,7 +9688,7 @@
                 <a:ea typeface="Microsoft YaHei"/>
                 <a:cs typeface="Microsoft YaHei"/>
               </a:rPr>
-              <a:t>×  Agent 工作流可替代研究判断</a:t>
+              <a:t>×  自动评审可替代同行共识</a:t>
             </a:r>
           </a:p>
         </p:txBody>
@@ -9651,19 +9698,19 @@
           <p:cNvPr id="11" name="p14-i-2">
             <a:extLst xmlns:a="http://schemas.openxmlformats.org/drawingml/2006/main">
               <a:ext uri="{FF2B5EF4-FFF2-40B4-BE49-F238E27FC236}">
-                <a16:creationId xmlns:a16="http://schemas.microsoft.com/office/drawing/2014/main" id="{6790131D-133A-476B-AB54-EE1FBC370B97}"/>
-              </a:ext>
-            </a:extLst>
-          </p:cNvPr>
-          <p:cNvSpPr>
-            <a:spLocks xmlns:a="http://schemas.openxmlformats.org/drawingml/2006/main" noGrp="1"/>
-          </p:cNvSpPr>
-          <p:nvPr/>
-        </p:nvSpPr>
-        <p:spPr>
-          <a:xfrm xmlns:a="http://schemas.openxmlformats.org/drawingml/2006/main">
-            <a:off x="2971800" y="3714750"/>
-            <a:ext cx="8343900" cy="400050"/>
+                <a16:creationId xmlns:a16="http://schemas.microsoft.com/office/drawing/2014/main" id="{7CF41B2C-C1BE-4402-99C2-867A3868CBF1}"/>
+              </a:ext>
+            </a:extLst>
+          </p:cNvPr>
+          <p:cNvSpPr>
+            <a:spLocks xmlns:a="http://schemas.openxmlformats.org/drawingml/2006/main" noGrp="1"/>
+          </p:cNvSpPr>
+          <p:nvPr/>
+        </p:nvSpPr>
+        <p:spPr>
+          <a:xfrm xmlns:a="http://schemas.openxmlformats.org/drawingml/2006/main">
+            <a:off x="3257550" y="3714750"/>
+            <a:ext cx="8058150" cy="457200"/>
           </a:xfrm>
           <a:prstGeom xmlns:a="http://schemas.openxmlformats.org/drawingml/2006/main" prst="rect">
             <a:avLst/>
@@ -9681,14 +9728,14 @@
           <a:lstStyle xmlns:a="http://schemas.openxmlformats.org/drawingml/2006/main"/>
           <a:p xmlns:a="http://schemas.openxmlformats.org/drawingml/2006/main">
             <a:pPr algn="l">
-              <a:defRPr sz="1500" b="1">
+              <a:defRPr sz="1800" b="1">
                 <a:solidFill>
                   <a:srgbClr val="C8161E"/>
                 </a:solidFill>
               </a:defRPr>
             </a:pPr>
             <a:r>
-              <a:rPr sz="1500" b="1">
+              <a:rPr sz="1800" b="1">
                 <a:solidFill>
                   <a:srgbClr val="C8161E"/>
                 </a:solidFill>
@@ -9696,7 +9743,7 @@
                 <a:ea typeface="Microsoft YaHei"/>
                 <a:cs typeface="Microsoft YaHei"/>
               </a:rPr>
-              <a:t>×  自动评审可替代同行评审</a:t>
+              <a:t>×  端到端结果可外推到所有学科</a:t>
             </a:r>
           </a:p>
         </p:txBody>
@@ -9706,19 +9753,19 @@
           <p:cNvPr id="12" name="p14-i-3">
             <a:extLst xmlns:a="http://schemas.openxmlformats.org/drawingml/2006/main">
               <a:ext uri="{FF2B5EF4-FFF2-40B4-BE49-F238E27FC236}">
-                <a16:creationId xmlns:a16="http://schemas.microsoft.com/office/drawing/2014/main" id="{F3511E6F-65E7-42BC-8EED-8B77DEB28F8E}"/>
-              </a:ext>
-            </a:extLst>
-          </p:cNvPr>
-          <p:cNvSpPr>
-            <a:spLocks xmlns:a="http://schemas.openxmlformats.org/drawingml/2006/main" noGrp="1"/>
-          </p:cNvSpPr>
-          <p:nvPr/>
-        </p:nvSpPr>
-        <p:spPr>
-          <a:xfrm xmlns:a="http://schemas.openxmlformats.org/drawingml/2006/main">
-            <a:off x="2971800" y="4248150"/>
-            <a:ext cx="8343900" cy="400050"/>
+                <a16:creationId xmlns:a16="http://schemas.microsoft.com/office/drawing/2014/main" id="{9EE48200-3B8D-4F9B-9143-CDEC6EE2D3FD}"/>
+              </a:ext>
+            </a:extLst>
+          </p:cNvPr>
+          <p:cNvSpPr>
+            <a:spLocks xmlns:a="http://schemas.openxmlformats.org/drawingml/2006/main" noGrp="1"/>
+          </p:cNvSpPr>
+          <p:nvPr/>
+        </p:nvSpPr>
+        <p:spPr>
+          <a:xfrm xmlns:a="http://schemas.openxmlformats.org/drawingml/2006/main">
+            <a:off x="3257550" y="4267200"/>
+            <a:ext cx="8058150" cy="457200"/>
           </a:xfrm>
           <a:prstGeom xmlns:a="http://schemas.openxmlformats.org/drawingml/2006/main" prst="rect">
             <a:avLst/>
@@ -9736,14 +9783,14 @@
           <a:lstStyle xmlns:a="http://schemas.openxmlformats.org/drawingml/2006/main"/>
           <a:p xmlns:a="http://schemas.openxmlformats.org/drawingml/2006/main">
             <a:pPr algn="l">
-              <a:defRPr sz="1500" b="1">
+              <a:defRPr sz="1800" b="1">
                 <a:solidFill>
                   <a:srgbClr val="C8161E"/>
                 </a:solidFill>
               </a:defRPr>
             </a:pPr>
             <a:r>
-              <a:rPr sz="1500" b="1">
+              <a:rPr sz="1800" b="1">
                 <a:solidFill>
                   <a:srgbClr val="C8161E"/>
                 </a:solidFill>
@@ -9751,91 +9798,42 @@
                 <a:ea typeface="Microsoft YaHei"/>
                 <a:cs typeface="Microsoft YaHei"/>
               </a:rPr>
-              <a:t>×  端到端自动化适用于所有学科</a:t>
-            </a:r>
-          </a:p>
-        </p:txBody>
-      </p:sp>
-      <p:sp>
-        <p:nvSpPr>
-          <p:cNvPr id="13" name="p14-i-4">
-            <a:extLst xmlns:a="http://schemas.openxmlformats.org/drawingml/2006/main">
-              <a:ext uri="{FF2B5EF4-FFF2-40B4-BE49-F238E27FC236}">
-                <a16:creationId xmlns:a16="http://schemas.microsoft.com/office/drawing/2014/main" id="{24595DAD-2DB3-4D61-8233-35118641382E}"/>
-              </a:ext>
-            </a:extLst>
-          </p:cNvPr>
-          <p:cNvSpPr>
-            <a:spLocks xmlns:a="http://schemas.openxmlformats.org/drawingml/2006/main" noGrp="1"/>
-          </p:cNvSpPr>
-          <p:nvPr/>
-        </p:nvSpPr>
-        <p:spPr>
-          <a:xfrm xmlns:a="http://schemas.openxmlformats.org/drawingml/2006/main">
-            <a:off x="2971800" y="4781550"/>
-            <a:ext cx="8343900" cy="400050"/>
-          </a:xfrm>
-          <a:prstGeom xmlns:a="http://schemas.openxmlformats.org/drawingml/2006/main" prst="rect">
-            <a:avLst/>
-          </a:prstGeom>
-          <a:solidFill xmlns:a="http://schemas.openxmlformats.org/drawingml/2006/main">
-            <a:srgbClr val="F8E9EA"/>
-          </a:solidFill>
-          <a:ln xmlns:a="http://schemas.openxmlformats.org/drawingml/2006/main" w="0">
-            <a:noFill/>
-            <a:prstDash val="solid"/>
-          </a:ln>
-        </p:spPr>
-        <p:txBody>
-          <a:bodyPr xmlns:a="http://schemas.openxmlformats.org/drawingml/2006/main" lIns="76200" tIns="38100" rIns="76200" bIns="38100" anchor="ctr"/>
-          <a:lstStyle xmlns:a="http://schemas.openxmlformats.org/drawingml/2006/main"/>
-          <a:p xmlns:a="http://schemas.openxmlformats.org/drawingml/2006/main">
-            <a:pPr algn="l">
-              <a:defRPr sz="1500" b="1">
-                <a:solidFill>
-                  <a:srgbClr val="C8161E"/>
-                </a:solidFill>
-              </a:defRPr>
-            </a:pPr>
-            <a:r>
-              <a:rPr sz="1500" b="1">
-                <a:solidFill>
-                  <a:srgbClr val="C8161E"/>
-                </a:solidFill>
-                <a:latin typeface="Microsoft YaHei"/>
-                <a:ea typeface="Microsoft YaHei"/>
-                <a:cs typeface="Microsoft YaHei"/>
-              </a:rPr>
-              <a:t>×  失败实验可以被自动删除</a:t>
-            </a:r>
-          </a:p>
-        </p:txBody>
-      </p:sp>
-      <p:sp>
-        <p:nvSpPr>
-          <p:cNvPr id="14" name="p14-evidence">
-            <a:extLst xmlns:a="http://schemas.openxmlformats.org/drawingml/2006/main">
-              <a:ext uri="{FF2B5EF4-FFF2-40B4-BE49-F238E27FC236}">
-                <a16:creationId xmlns:a16="http://schemas.microsoft.com/office/drawing/2014/main" id="{701C21B9-9D81-4B9C-A037-CF930B3B5D45}"/>
-              </a:ext>
-            </a:extLst>
-          </p:cNvPr>
-          <p:cNvSpPr>
-            <a:spLocks xmlns:a="http://schemas.openxmlformats.org/drawingml/2006/main" noGrp="1"/>
-          </p:cNvSpPr>
-          <p:nvPr/>
-        </p:nvSpPr>
-        <p:spPr>
-          <a:xfrm xmlns:a="http://schemas.openxmlformats.org/drawingml/2006/main">
-            <a:off x="685800" y="5410200"/>
-            <a:ext cx="10820400" cy="400050"/>
-          </a:xfrm>
-          <a:prstGeom xmlns:a="http://schemas.openxmlformats.org/drawingml/2006/main" prst="rect">
-            <a:avLst/>
-          </a:prstGeom>
-          <a:noFill xmlns:a="http://schemas.openxmlformats.org/drawingml/2006/main"/>
-          <a:ln xmlns:a="http://schemas.openxmlformats.org/drawingml/2006/main" w="0">
-            <a:noFill/>
+              <a:t>×  失败实验可以选择性删除</a:t>
+            </a:r>
+          </a:p>
+        </p:txBody>
+      </p:sp>
+      <p:sp>
+        <p:nvSpPr>
+          <p:cNvPr id="13" name="p14-evidence">
+            <a:extLst xmlns:a="http://schemas.openxmlformats.org/drawingml/2006/main">
+              <a:ext uri="{FF2B5EF4-FFF2-40B4-BE49-F238E27FC236}">
+                <a16:creationId xmlns:a16="http://schemas.microsoft.com/office/drawing/2014/main" id="{FFCC1E3D-D352-4E18-A2E3-23D002041369}"/>
+              </a:ext>
+            </a:extLst>
+          </p:cNvPr>
+          <p:cNvSpPr>
+            <a:spLocks xmlns:a="http://schemas.openxmlformats.org/drawingml/2006/main" noGrp="1"/>
+          </p:cNvSpPr>
+          <p:nvPr/>
+        </p:nvSpPr>
+        <p:spPr>
+          <a:xfrm xmlns:a="http://schemas.openxmlformats.org/drawingml/2006/main">
+            <a:off x="685800" y="5010150"/>
+            <a:ext cx="10820400" cy="647700"/>
+          </a:xfrm>
+          <a:prstGeom xmlns:a="http://schemas.openxmlformats.org/drawingml/2006/main" prst="roundRect">
+            <a:avLst>
+              <a:gd name="adj" fmla="val 11765"/>
+            </a:avLst>
+          </a:prstGeom>
+          <a:solidFill xmlns:a="http://schemas.openxmlformats.org/drawingml/2006/main">
+            <a:srgbClr val="E8F0F6"/>
+          </a:solidFill>
+          <a:ln xmlns:a="http://schemas.openxmlformats.org/drawingml/2006/main" w="19050">
+            <a:solidFill>
+              <a:srgbClr val="18354E"/>
+            </a:solidFill>
             <a:prstDash val="solid"/>
           </a:ln>
         </p:spPr>
@@ -9844,22 +9842,26 @@
           <a:lstStyle xmlns:a="http://schemas.openxmlformats.org/drawingml/2006/main"/>
           <a:p xmlns:a="http://schemas.openxmlformats.org/drawingml/2006/main">
             <a:pPr algn="ctr">
-              <a:defRPr sz="1350" b="1">
-                <a:solidFill>
-                  <a:srgbClr val="667684"/>
-                </a:solidFill>
-              </a:defRPr>
-            </a:pPr>
-            <a:r>
-              <a:rPr sz="1350" b="1">
-                <a:solidFill>
-                  <a:srgbClr val="667684"/>
-                </a:solidFill>
-                <a:latin typeface="Microsoft YaHei"/>
-                <a:ea typeface="Microsoft YaHei"/>
-                <a:cs typeface="Microsoft YaHei"/>
-              </a:rPr>
-              <a:t>Nature 2026：三篇送审稿中一篇超过工作坊平均接收阈值；按预设协议撤回；研究团队判断三篇均未达 ICLR 主会标准。</a:t>
+              <a:lnSpc>
+                <a:spcPct val="118000"/>
+              </a:lnSpc>
+              <a:buNone/>
+              <a:defRPr sz="1800" b="1">
+                <a:solidFill>
+                  <a:srgbClr val="18354E"/>
+                </a:solidFill>
+              </a:defRPr>
+            </a:pPr>
+            <a:r>
+              <a:rPr sz="1800" b="1">
+                <a:solidFill>
+                  <a:srgbClr val="18354E"/>
+                </a:solidFill>
+                <a:latin typeface="Microsoft YaHei"/>
+                <a:ea typeface="Microsoft YaHei"/>
+                <a:cs typeface="Microsoft YaHei"/>
+              </a:rPr>
+              <a:t>Nature 2026 证据边界｜3 篇送审稿；1 篇超过工作坊平均阈值；按预设协议撤回；团队判断均未达 ICLR 主会标准。</a:t>
             </a:r>
           </a:p>
         </p:txBody>
@@ -9963,7 +9965,7 @@
           <p:cNvPr id="6" name="p15-case">
             <a:extLst xmlns:a="http://schemas.openxmlformats.org/drawingml/2006/main">
               <a:ext uri="{FF2B5EF4-FFF2-40B4-BE49-F238E27FC236}">
-                <a16:creationId xmlns:a16="http://schemas.microsoft.com/office/drawing/2014/main" id="{BF7A26BA-ABE1-4354-8ABB-1D07553C958A}"/>
+                <a16:creationId xmlns:a16="http://schemas.microsoft.com/office/drawing/2014/main" id="{6F53E20B-BE02-4092-A0EE-495CCFF5030D}"/>
               </a:ext>
             </a:extLst>
           </p:cNvPr>
@@ -10018,7 +10020,7 @@
           <p:cNvPr id="7" name="p15-left-h">
             <a:extLst xmlns:a="http://schemas.openxmlformats.org/drawingml/2006/main">
               <a:ext uri="{FF2B5EF4-FFF2-40B4-BE49-F238E27FC236}">
-                <a16:creationId xmlns:a16="http://schemas.microsoft.com/office/drawing/2014/main" id="{4E6F440E-17D3-473A-BCDE-B35C438B18EF}"/>
+                <a16:creationId xmlns:a16="http://schemas.microsoft.com/office/drawing/2014/main" id="{A3874179-8036-41A0-9695-19C6A48A08D6}"/>
               </a:ext>
             </a:extLst>
           </p:cNvPr>
@@ -10073,7 +10075,7 @@
           <p:cNvPr id="8" name="p15-left">
             <a:extLst xmlns:a="http://schemas.openxmlformats.org/drawingml/2006/main">
               <a:ext uri="{FF2B5EF4-FFF2-40B4-BE49-F238E27FC236}">
-                <a16:creationId xmlns:a16="http://schemas.microsoft.com/office/drawing/2014/main" id="{DBF3850A-B8BF-4373-B3B5-FC91C560D9FF}"/>
+                <a16:creationId xmlns:a16="http://schemas.microsoft.com/office/drawing/2014/main" id="{3139A4C9-F3AC-4150-90D7-A0AE8C642C1B}"/>
               </a:ext>
             </a:extLst>
           </p:cNvPr>
@@ -10204,7 +10206,7 @@
           <p:cNvPr id="9" name="p15-right-h">
             <a:extLst xmlns:a="http://schemas.openxmlformats.org/drawingml/2006/main">
               <a:ext uri="{FF2B5EF4-FFF2-40B4-BE49-F238E27FC236}">
-                <a16:creationId xmlns:a16="http://schemas.microsoft.com/office/drawing/2014/main" id="{20B6969C-BB91-4517-AF46-AC9B8D6FF9C5}"/>
+                <a16:creationId xmlns:a16="http://schemas.microsoft.com/office/drawing/2014/main" id="{C55A332A-C8D6-4456-B6DB-3B2C04708DDC}"/>
               </a:ext>
             </a:extLst>
           </p:cNvPr>
@@ -10259,7 +10261,7 @@
           <p:cNvPr id="10" name="p15-right">
             <a:extLst xmlns:a="http://schemas.openxmlformats.org/drawingml/2006/main">
               <a:ext uri="{FF2B5EF4-FFF2-40B4-BE49-F238E27FC236}">
-                <a16:creationId xmlns:a16="http://schemas.microsoft.com/office/drawing/2014/main" id="{38EB36DF-95A3-4453-9067-13D1487A0A44}"/>
+                <a16:creationId xmlns:a16="http://schemas.microsoft.com/office/drawing/2014/main" id="{A557585E-B15A-4F4D-9DAD-F3F2E3B75B12}"/>
               </a:ext>
             </a:extLst>
           </p:cNvPr>
@@ -10390,7 +10392,7 @@
           <p:cNvPr id="11" name="p15-human">
             <a:extLst xmlns:a="http://schemas.openxmlformats.org/drawingml/2006/main">
               <a:ext uri="{FF2B5EF4-FFF2-40B4-BE49-F238E27FC236}">
-                <a16:creationId xmlns:a16="http://schemas.microsoft.com/office/drawing/2014/main" id="{24B06A30-3F84-4332-81D1-C06A973B906F}"/>
+                <a16:creationId xmlns:a16="http://schemas.microsoft.com/office/drawing/2014/main" id="{F70287D8-C08B-4F02-957F-7D4D93EF0826}"/>
               </a:ext>
             </a:extLst>
           </p:cNvPr>
@@ -10541,7 +10543,7 @@
           <p:cNvPr id="6" name="p16-n-0">
             <a:extLst xmlns:a="http://schemas.openxmlformats.org/drawingml/2006/main">
               <a:ext uri="{FF2B5EF4-FFF2-40B4-BE49-F238E27FC236}">
-                <a16:creationId xmlns:a16="http://schemas.microsoft.com/office/drawing/2014/main" id="{09F6A399-29C3-48E4-BE63-E95867FA26CA}"/>
+                <a16:creationId xmlns:a16="http://schemas.microsoft.com/office/drawing/2014/main" id="{4C9B5FC5-E901-4817-A781-C75EF9E7B15E}"/>
               </a:ext>
             </a:extLst>
           </p:cNvPr>
@@ -10598,7 +10600,7 @@
           <p:cNvPr id="7" name="p16-t-0">
             <a:extLst xmlns:a="http://schemas.openxmlformats.org/drawingml/2006/main">
               <a:ext uri="{FF2B5EF4-FFF2-40B4-BE49-F238E27FC236}">
-                <a16:creationId xmlns:a16="http://schemas.microsoft.com/office/drawing/2014/main" id="{CAFE5F40-4E39-4587-B2A1-1B23070AEBA7}"/>
+                <a16:creationId xmlns:a16="http://schemas.microsoft.com/office/drawing/2014/main" id="{EF344A98-4CFC-4447-86C4-2F86CBD82CB5}"/>
               </a:ext>
             </a:extLst>
           </p:cNvPr>
@@ -10653,7 +10655,7 @@
           <p:cNvPr id="8" name="p16-n-1">
             <a:extLst xmlns:a="http://schemas.openxmlformats.org/drawingml/2006/main">
               <a:ext uri="{FF2B5EF4-FFF2-40B4-BE49-F238E27FC236}">
-                <a16:creationId xmlns:a16="http://schemas.microsoft.com/office/drawing/2014/main" id="{C791D9C2-47B4-4E7D-968A-4DBFCF8134C0}"/>
+                <a16:creationId xmlns:a16="http://schemas.microsoft.com/office/drawing/2014/main" id="{061C653B-26D4-44FD-878B-1C7C1C7B8A1A}"/>
               </a:ext>
             </a:extLst>
           </p:cNvPr>
@@ -10710,7 +10712,7 @@
           <p:cNvPr id="9" name="p16-t-1">
             <a:extLst xmlns:a="http://schemas.openxmlformats.org/drawingml/2006/main">
               <a:ext uri="{FF2B5EF4-FFF2-40B4-BE49-F238E27FC236}">
-                <a16:creationId xmlns:a16="http://schemas.microsoft.com/office/drawing/2014/main" id="{5CE47783-E629-4829-9A4E-6BD7B0DE52D6}"/>
+                <a16:creationId xmlns:a16="http://schemas.microsoft.com/office/drawing/2014/main" id="{1EEF9C4A-7E0C-4901-A620-57AF3267D424}"/>
               </a:ext>
             </a:extLst>
           </p:cNvPr>
@@ -10765,7 +10767,7 @@
           <p:cNvPr id="10" name="p16-n-2">
             <a:extLst xmlns:a="http://schemas.openxmlformats.org/drawingml/2006/main">
               <a:ext uri="{FF2B5EF4-FFF2-40B4-BE49-F238E27FC236}">
-                <a16:creationId xmlns:a16="http://schemas.microsoft.com/office/drawing/2014/main" id="{C62CC1A5-D92B-4BF9-9744-3B32E13B0CA2}"/>
+                <a16:creationId xmlns:a16="http://schemas.microsoft.com/office/drawing/2014/main" id="{CC690DA3-9A67-44FF-A56F-778F21CE21DE}"/>
               </a:ext>
             </a:extLst>
           </p:cNvPr>
@@ -10822,7 +10824,7 @@
           <p:cNvPr id="11" name="p16-t-2">
             <a:extLst xmlns:a="http://schemas.openxmlformats.org/drawingml/2006/main">
               <a:ext uri="{FF2B5EF4-FFF2-40B4-BE49-F238E27FC236}">
-                <a16:creationId xmlns:a16="http://schemas.microsoft.com/office/drawing/2014/main" id="{88ACAEA7-919F-44C1-9DC3-3D92A24542E2}"/>
+                <a16:creationId xmlns:a16="http://schemas.microsoft.com/office/drawing/2014/main" id="{16DE2724-F87B-4315-ACC4-C3C8EBA40297}"/>
               </a:ext>
             </a:extLst>
           </p:cNvPr>
@@ -10877,7 +10879,7 @@
           <p:cNvPr id="12" name="p16-n-3">
             <a:extLst xmlns:a="http://schemas.openxmlformats.org/drawingml/2006/main">
               <a:ext uri="{FF2B5EF4-FFF2-40B4-BE49-F238E27FC236}">
-                <a16:creationId xmlns:a16="http://schemas.microsoft.com/office/drawing/2014/main" id="{363E93CE-6CC7-46FB-BB24-311B6240248A}"/>
+                <a16:creationId xmlns:a16="http://schemas.microsoft.com/office/drawing/2014/main" id="{69C27966-2A70-4C48-9656-B583421BEA18}"/>
               </a:ext>
             </a:extLst>
           </p:cNvPr>
@@ -10934,7 +10936,7 @@
           <p:cNvPr id="13" name="p16-t-3">
             <a:extLst xmlns:a="http://schemas.openxmlformats.org/drawingml/2006/main">
               <a:ext uri="{FF2B5EF4-FFF2-40B4-BE49-F238E27FC236}">
-                <a16:creationId xmlns:a16="http://schemas.microsoft.com/office/drawing/2014/main" id="{97C537D9-D2FB-4614-98D7-F6728A377FAA}"/>
+                <a16:creationId xmlns:a16="http://schemas.microsoft.com/office/drawing/2014/main" id="{05F5C707-DC81-48DA-895A-9648127B678A}"/>
               </a:ext>
             </a:extLst>
           </p:cNvPr>
@@ -10989,7 +10991,7 @@
           <p:cNvPr id="14" name="p16-n-4">
             <a:extLst xmlns:a="http://schemas.openxmlformats.org/drawingml/2006/main">
               <a:ext uri="{FF2B5EF4-FFF2-40B4-BE49-F238E27FC236}">
-                <a16:creationId xmlns:a16="http://schemas.microsoft.com/office/drawing/2014/main" id="{DC0CF350-C252-4415-B09A-3706F09D2935}"/>
+                <a16:creationId xmlns:a16="http://schemas.microsoft.com/office/drawing/2014/main" id="{E9DBAD0B-53DB-4BCD-81D9-834E1E4E35CE}"/>
               </a:ext>
             </a:extLst>
           </p:cNvPr>
@@ -11046,7 +11048,7 @@
           <p:cNvPr id="15" name="p16-t-4">
             <a:extLst xmlns:a="http://schemas.openxmlformats.org/drawingml/2006/main">
               <a:ext uri="{FF2B5EF4-FFF2-40B4-BE49-F238E27FC236}">
-                <a16:creationId xmlns:a16="http://schemas.microsoft.com/office/drawing/2014/main" id="{3B799F46-EA34-4F19-8968-63BB276517E2}"/>
+                <a16:creationId xmlns:a16="http://schemas.microsoft.com/office/drawing/2014/main" id="{CF599A6E-E992-4A14-9372-C32A39060E5C}"/>
               </a:ext>
             </a:extLst>
           </p:cNvPr>
@@ -11101,7 +11103,7 @@
           <p:cNvPr id="16" name="p16-n-5">
             <a:extLst xmlns:a="http://schemas.openxmlformats.org/drawingml/2006/main">
               <a:ext uri="{FF2B5EF4-FFF2-40B4-BE49-F238E27FC236}">
-                <a16:creationId xmlns:a16="http://schemas.microsoft.com/office/drawing/2014/main" id="{3F47A363-D1D1-4A06-BD36-65750EE656CE}"/>
+                <a16:creationId xmlns:a16="http://schemas.microsoft.com/office/drawing/2014/main" id="{7E56D3C4-0000-4375-8913-FE53EA57F36A}"/>
               </a:ext>
             </a:extLst>
           </p:cNvPr>
@@ -11158,7 +11160,7 @@
           <p:cNvPr id="17" name="p16-t-5">
             <a:extLst xmlns:a="http://schemas.openxmlformats.org/drawingml/2006/main">
               <a:ext uri="{FF2B5EF4-FFF2-40B4-BE49-F238E27FC236}">
-                <a16:creationId xmlns:a16="http://schemas.microsoft.com/office/drawing/2014/main" id="{42280187-A3EE-48A9-A417-E02C498F96C0}"/>
+                <a16:creationId xmlns:a16="http://schemas.microsoft.com/office/drawing/2014/main" id="{5F58F2A7-AF00-41D2-B04E-84FF2D733907}"/>
               </a:ext>
             </a:extLst>
           </p:cNvPr>
@@ -11213,7 +11215,7 @@
           <p:cNvPr id="18" name="p16-out-h">
             <a:extLst xmlns:a="http://schemas.openxmlformats.org/drawingml/2006/main">
               <a:ext uri="{FF2B5EF4-FFF2-40B4-BE49-F238E27FC236}">
-                <a16:creationId xmlns:a16="http://schemas.microsoft.com/office/drawing/2014/main" id="{F152D7B8-522A-4AC5-9C0A-FEB320E5AF6A}"/>
+                <a16:creationId xmlns:a16="http://schemas.microsoft.com/office/drawing/2014/main" id="{3C9A0E89-C219-4EFD-B152-659F2EE0069D}"/>
               </a:ext>
             </a:extLst>
           </p:cNvPr>
@@ -11268,7 +11270,7 @@
           <p:cNvPr id="19" name="p16-out">
             <a:extLst xmlns:a="http://schemas.openxmlformats.org/drawingml/2006/main">
               <a:ext uri="{FF2B5EF4-FFF2-40B4-BE49-F238E27FC236}">
-                <a16:creationId xmlns:a16="http://schemas.microsoft.com/office/drawing/2014/main" id="{07B31A3B-8E53-4509-B840-964537A04635}"/>
+                <a16:creationId xmlns:a16="http://schemas.microsoft.com/office/drawing/2014/main" id="{295A23EA-6407-4349-ABA3-7A9641D8FDCC}"/>
               </a:ext>
             </a:extLst>
           </p:cNvPr>
@@ -11385,7 +11387,7 @@
           <p:cNvPr id="20" name="p16-question">
             <a:extLst xmlns:a="http://schemas.openxmlformats.org/drawingml/2006/main">
               <a:ext uri="{FF2B5EF4-FFF2-40B4-BE49-F238E27FC236}">
-                <a16:creationId xmlns:a16="http://schemas.microsoft.com/office/drawing/2014/main" id="{F9918000-FE47-4663-9AB8-0E9058A403D6}"/>
+                <a16:creationId xmlns:a16="http://schemas.microsoft.com/office/drawing/2014/main" id="{CE813140-29F9-451F-B3DF-F33A091F4CC4}"/>
               </a:ext>
             </a:extLst>
           </p:cNvPr>
@@ -11448,7 +11450,7 @@
           <p:cNvPr id="21" name="p16-fallback">
             <a:extLst xmlns:a="http://schemas.openxmlformats.org/drawingml/2006/main">
               <a:ext uri="{FF2B5EF4-FFF2-40B4-BE49-F238E27FC236}">
-                <a16:creationId xmlns:a16="http://schemas.microsoft.com/office/drawing/2014/main" id="{68C85F97-5AB3-44A4-964F-8C582EFF3243}"/>
+                <a16:creationId xmlns:a16="http://schemas.microsoft.com/office/drawing/2014/main" id="{B0101799-42C0-461E-A050-47A55B87AD42}"/>
               </a:ext>
             </a:extLst>
           </p:cNvPr>
@@ -11595,7 +11597,7 @@
           <p:cNvPr id="6" name="p17-left-h">
             <a:extLst xmlns:a="http://schemas.openxmlformats.org/drawingml/2006/main">
               <a:ext uri="{FF2B5EF4-FFF2-40B4-BE49-F238E27FC236}">
-                <a16:creationId xmlns:a16="http://schemas.microsoft.com/office/drawing/2014/main" id="{C53CC8E8-A9D6-45E2-A0E8-51C4E977D0F3}"/>
+                <a16:creationId xmlns:a16="http://schemas.microsoft.com/office/drawing/2014/main" id="{4DC57C3B-7593-4D10-B22A-03F8615C6034}"/>
               </a:ext>
             </a:extLst>
           </p:cNvPr>
@@ -11650,7 +11652,7 @@
           <p:cNvPr id="7" name="p17-c-0">
             <a:extLst xmlns:a="http://schemas.openxmlformats.org/drawingml/2006/main">
               <a:ext uri="{FF2B5EF4-FFF2-40B4-BE49-F238E27FC236}">
-                <a16:creationId xmlns:a16="http://schemas.microsoft.com/office/drawing/2014/main" id="{3964E212-4914-4381-90BF-FB1F8E23D84A}"/>
+                <a16:creationId xmlns:a16="http://schemas.microsoft.com/office/drawing/2014/main" id="{D3B38EDA-4DBB-455C-B142-5A1FF82D4921}"/>
               </a:ext>
             </a:extLst>
           </p:cNvPr>
@@ -11705,7 +11707,7 @@
           <p:cNvPr id="8" name="p17-c-1">
             <a:extLst xmlns:a="http://schemas.openxmlformats.org/drawingml/2006/main">
               <a:ext uri="{FF2B5EF4-FFF2-40B4-BE49-F238E27FC236}">
-                <a16:creationId xmlns:a16="http://schemas.microsoft.com/office/drawing/2014/main" id="{644A4408-78E2-4BB0-BB59-C7D199E7181E}"/>
+                <a16:creationId xmlns:a16="http://schemas.microsoft.com/office/drawing/2014/main" id="{432B43BD-92BF-4FEA-A7AE-3BABB8CB11A5}"/>
               </a:ext>
             </a:extLst>
           </p:cNvPr>
@@ -11760,7 +11762,7 @@
           <p:cNvPr id="9" name="p17-c-2">
             <a:extLst xmlns:a="http://schemas.openxmlformats.org/drawingml/2006/main">
               <a:ext uri="{FF2B5EF4-FFF2-40B4-BE49-F238E27FC236}">
-                <a16:creationId xmlns:a16="http://schemas.microsoft.com/office/drawing/2014/main" id="{8993FB17-16B1-432D-9225-4EBC086988FF}"/>
+                <a16:creationId xmlns:a16="http://schemas.microsoft.com/office/drawing/2014/main" id="{19DA4C6D-9F8D-4F73-BFEB-170D69AF7601}"/>
               </a:ext>
             </a:extLst>
           </p:cNvPr>
@@ -11815,7 +11817,7 @@
           <p:cNvPr id="10" name="p17-c-3">
             <a:extLst xmlns:a="http://schemas.openxmlformats.org/drawingml/2006/main">
               <a:ext uri="{FF2B5EF4-FFF2-40B4-BE49-F238E27FC236}">
-                <a16:creationId xmlns:a16="http://schemas.microsoft.com/office/drawing/2014/main" id="{049D50B2-B1CD-47A3-8351-BBDFCC8B0CB9}"/>
+                <a16:creationId xmlns:a16="http://schemas.microsoft.com/office/drawing/2014/main" id="{50D88AD3-2D5A-4AB0-9FFD-ACDC46E95F3F}"/>
               </a:ext>
             </a:extLst>
           </p:cNvPr>
@@ -11870,7 +11872,7 @@
           <p:cNvPr id="11" name="p17-c-4">
             <a:extLst xmlns:a="http://schemas.openxmlformats.org/drawingml/2006/main">
               <a:ext uri="{FF2B5EF4-FFF2-40B4-BE49-F238E27FC236}">
-                <a16:creationId xmlns:a16="http://schemas.microsoft.com/office/drawing/2014/main" id="{CB2B765A-3C25-462F-AC78-F288FC95BC1F}"/>
+                <a16:creationId xmlns:a16="http://schemas.microsoft.com/office/drawing/2014/main" id="{E92B6876-65F7-4C82-8853-D20820D89FAB}"/>
               </a:ext>
             </a:extLst>
           </p:cNvPr>
@@ -11925,7 +11927,7 @@
           <p:cNvPr id="12" name="p17-c-5">
             <a:extLst xmlns:a="http://schemas.openxmlformats.org/drawingml/2006/main">
               <a:ext uri="{FF2B5EF4-FFF2-40B4-BE49-F238E27FC236}">
-                <a16:creationId xmlns:a16="http://schemas.microsoft.com/office/drawing/2014/main" id="{93251545-B191-4FB9-A71F-C04CE5211700}"/>
+                <a16:creationId xmlns:a16="http://schemas.microsoft.com/office/drawing/2014/main" id="{A7484BF9-3951-4C3F-84A2-94C7AC974D89}"/>
               </a:ext>
             </a:extLst>
           </p:cNvPr>
@@ -11980,7 +11982,7 @@
           <p:cNvPr id="13" name="p17-c-6">
             <a:extLst xmlns:a="http://schemas.openxmlformats.org/drawingml/2006/main">
               <a:ext uri="{FF2B5EF4-FFF2-40B4-BE49-F238E27FC236}">
-                <a16:creationId xmlns:a16="http://schemas.microsoft.com/office/drawing/2014/main" id="{507B2FC1-D681-41FA-B77C-3D8E6D5F5C05}"/>
+                <a16:creationId xmlns:a16="http://schemas.microsoft.com/office/drawing/2014/main" id="{00B150A8-B2A3-4DDD-8513-DC292C60B88C}"/>
               </a:ext>
             </a:extLst>
           </p:cNvPr>
@@ -12035,7 +12037,7 @@
           <p:cNvPr id="14" name="p17-right-h">
             <a:extLst xmlns:a="http://schemas.openxmlformats.org/drawingml/2006/main">
               <a:ext uri="{FF2B5EF4-FFF2-40B4-BE49-F238E27FC236}">
-                <a16:creationId xmlns:a16="http://schemas.microsoft.com/office/drawing/2014/main" id="{E217AD86-C0D6-43B2-A13A-80EB21630FD9}"/>
+                <a16:creationId xmlns:a16="http://schemas.microsoft.com/office/drawing/2014/main" id="{E7EAE240-34DF-4207-94FE-9225E529B141}"/>
               </a:ext>
             </a:extLst>
           </p:cNvPr>
@@ -12090,7 +12092,7 @@
           <p:cNvPr id="15" name="p17-a-0">
             <a:extLst xmlns:a="http://schemas.openxmlformats.org/drawingml/2006/main">
               <a:ext uri="{FF2B5EF4-FFF2-40B4-BE49-F238E27FC236}">
-                <a16:creationId xmlns:a16="http://schemas.microsoft.com/office/drawing/2014/main" id="{4627C549-281C-4C47-AA2E-9007600A22E6}"/>
+                <a16:creationId xmlns:a16="http://schemas.microsoft.com/office/drawing/2014/main" id="{75062B39-B999-4E2E-9BD4-77E0C8C21E90}"/>
               </a:ext>
             </a:extLst>
           </p:cNvPr>
@@ -12145,7 +12147,7 @@
           <p:cNvPr id="16" name="p17-b-0">
             <a:extLst xmlns:a="http://schemas.openxmlformats.org/drawingml/2006/main">
               <a:ext uri="{FF2B5EF4-FFF2-40B4-BE49-F238E27FC236}">
-                <a16:creationId xmlns:a16="http://schemas.microsoft.com/office/drawing/2014/main" id="{B42D4C1F-902E-4A6F-9743-21335EE87135}"/>
+                <a16:creationId xmlns:a16="http://schemas.microsoft.com/office/drawing/2014/main" id="{27641F25-9F34-48D5-B254-C97252F4A1F5}"/>
               </a:ext>
             </a:extLst>
           </p:cNvPr>
@@ -12200,7 +12202,7 @@
           <p:cNvPr id="17" name="p17-a-1">
             <a:extLst xmlns:a="http://schemas.openxmlformats.org/drawingml/2006/main">
               <a:ext uri="{FF2B5EF4-FFF2-40B4-BE49-F238E27FC236}">
-                <a16:creationId xmlns:a16="http://schemas.microsoft.com/office/drawing/2014/main" id="{FD6FCE11-10D6-4831-908A-08F6B56C43EE}"/>
+                <a16:creationId xmlns:a16="http://schemas.microsoft.com/office/drawing/2014/main" id="{9200A771-8F59-447B-A882-E1C6FB43DC61}"/>
               </a:ext>
             </a:extLst>
           </p:cNvPr>
@@ -12255,7 +12257,7 @@
           <p:cNvPr id="18" name="p17-b-1">
             <a:extLst xmlns:a="http://schemas.openxmlformats.org/drawingml/2006/main">
               <a:ext uri="{FF2B5EF4-FFF2-40B4-BE49-F238E27FC236}">
-                <a16:creationId xmlns:a16="http://schemas.microsoft.com/office/drawing/2014/main" id="{6E92E859-4602-4D38-9BBC-18F631083941}"/>
+                <a16:creationId xmlns:a16="http://schemas.microsoft.com/office/drawing/2014/main" id="{B86D80C1-118C-44ED-A28B-BD4B45B64C11}"/>
               </a:ext>
             </a:extLst>
           </p:cNvPr>
@@ -12310,7 +12312,7 @@
           <p:cNvPr id="19" name="p17-a-2">
             <a:extLst xmlns:a="http://schemas.openxmlformats.org/drawingml/2006/main">
               <a:ext uri="{FF2B5EF4-FFF2-40B4-BE49-F238E27FC236}">
-                <a16:creationId xmlns:a16="http://schemas.microsoft.com/office/drawing/2014/main" id="{82856597-C08B-48DC-818F-89852544767C}"/>
+                <a16:creationId xmlns:a16="http://schemas.microsoft.com/office/drawing/2014/main" id="{3F898EB0-057E-4A5A-BC84-162BB65CEBC3}"/>
               </a:ext>
             </a:extLst>
           </p:cNvPr>
@@ -12365,7 +12367,7 @@
           <p:cNvPr id="20" name="p17-b-2">
             <a:extLst xmlns:a="http://schemas.openxmlformats.org/drawingml/2006/main">
               <a:ext uri="{FF2B5EF4-FFF2-40B4-BE49-F238E27FC236}">
-                <a16:creationId xmlns:a16="http://schemas.microsoft.com/office/drawing/2014/main" id="{A4A8F005-B244-439D-948C-772CE1FDC739}"/>
+                <a16:creationId xmlns:a16="http://schemas.microsoft.com/office/drawing/2014/main" id="{70A117F2-D4DE-4B7F-872E-07A0A8630E7D}"/>
               </a:ext>
             </a:extLst>
           </p:cNvPr>
@@ -12420,7 +12422,7 @@
           <p:cNvPr id="21" name="p17-a-3">
             <a:extLst xmlns:a="http://schemas.openxmlformats.org/drawingml/2006/main">
               <a:ext uri="{FF2B5EF4-FFF2-40B4-BE49-F238E27FC236}">
-                <a16:creationId xmlns:a16="http://schemas.microsoft.com/office/drawing/2014/main" id="{7FFA4090-3DBA-49CC-AB00-3A79ED60C902}"/>
+                <a16:creationId xmlns:a16="http://schemas.microsoft.com/office/drawing/2014/main" id="{563419D8-6025-4982-A32B-FC0333047E51}"/>
               </a:ext>
             </a:extLst>
           </p:cNvPr>
@@ -12475,7 +12477,7 @@
           <p:cNvPr id="22" name="p17-b-3">
             <a:extLst xmlns:a="http://schemas.openxmlformats.org/drawingml/2006/main">
               <a:ext uri="{FF2B5EF4-FFF2-40B4-BE49-F238E27FC236}">
-                <a16:creationId xmlns:a16="http://schemas.microsoft.com/office/drawing/2014/main" id="{FD95C3F0-2F20-448A-9E50-2359C19387A4}"/>
+                <a16:creationId xmlns:a16="http://schemas.microsoft.com/office/drawing/2014/main" id="{FEEF0262-6661-4917-AC3C-064C919BA234}"/>
               </a:ext>
             </a:extLst>
           </p:cNvPr>
@@ -12530,7 +12532,7 @@
           <p:cNvPr id="23" name="p17-a-4">
             <a:extLst xmlns:a="http://schemas.openxmlformats.org/drawingml/2006/main">
               <a:ext uri="{FF2B5EF4-FFF2-40B4-BE49-F238E27FC236}">
-                <a16:creationId xmlns:a16="http://schemas.microsoft.com/office/drawing/2014/main" id="{AE20CA0C-ED00-4F6B-8698-4960A7C31AA6}"/>
+                <a16:creationId xmlns:a16="http://schemas.microsoft.com/office/drawing/2014/main" id="{3D82B19D-CD75-41A9-94AF-0D1A17544A54}"/>
               </a:ext>
             </a:extLst>
           </p:cNvPr>
@@ -12585,7 +12587,7 @@
           <p:cNvPr id="24" name="p17-b-4">
             <a:extLst xmlns:a="http://schemas.openxmlformats.org/drawingml/2006/main">
               <a:ext uri="{FF2B5EF4-FFF2-40B4-BE49-F238E27FC236}">
-                <a16:creationId xmlns:a16="http://schemas.microsoft.com/office/drawing/2014/main" id="{DA167BA2-8E3D-4D00-A6E0-1EA1BC0EA787}"/>
+                <a16:creationId xmlns:a16="http://schemas.microsoft.com/office/drawing/2014/main" id="{FCD8A372-7DBC-4EA0-B005-C0C716CEDB0C}"/>
               </a:ext>
             </a:extLst>
           </p:cNvPr>
@@ -12640,7 +12642,7 @@
           <p:cNvPr id="25" name="p17-a-5">
             <a:extLst xmlns:a="http://schemas.openxmlformats.org/drawingml/2006/main">
               <a:ext uri="{FF2B5EF4-FFF2-40B4-BE49-F238E27FC236}">
-                <a16:creationId xmlns:a16="http://schemas.microsoft.com/office/drawing/2014/main" id="{FE7163BD-D793-402E-94B7-282F9CCBE7B9}"/>
+                <a16:creationId xmlns:a16="http://schemas.microsoft.com/office/drawing/2014/main" id="{D58D81F4-A653-4FB1-82BD-902B917C2D0A}"/>
               </a:ext>
             </a:extLst>
           </p:cNvPr>
@@ -12695,7 +12697,7 @@
           <p:cNvPr id="26" name="p17-b-5">
             <a:extLst xmlns:a="http://schemas.openxmlformats.org/drawingml/2006/main">
               <a:ext uri="{FF2B5EF4-FFF2-40B4-BE49-F238E27FC236}">
-                <a16:creationId xmlns:a16="http://schemas.microsoft.com/office/drawing/2014/main" id="{CF2D87AF-B423-4055-AEEC-9C7BF1E7C4C2}"/>
+                <a16:creationId xmlns:a16="http://schemas.microsoft.com/office/drawing/2014/main" id="{0B487F76-16CF-4F3E-B950-349E8391010D}"/>
               </a:ext>
             </a:extLst>
           </p:cNvPr>
@@ -12750,7 +12752,7 @@
           <p:cNvPr id="27" name="p17-a-6">
             <a:extLst xmlns:a="http://schemas.openxmlformats.org/drawingml/2006/main">
               <a:ext uri="{FF2B5EF4-FFF2-40B4-BE49-F238E27FC236}">
-                <a16:creationId xmlns:a16="http://schemas.microsoft.com/office/drawing/2014/main" id="{FBCC5C3B-2A6A-457F-A891-CC48D80E0F2B}"/>
+                <a16:creationId xmlns:a16="http://schemas.microsoft.com/office/drawing/2014/main" id="{326AA574-EEB7-4CDF-879A-C02773B21C44}"/>
               </a:ext>
             </a:extLst>
           </p:cNvPr>
@@ -12805,7 +12807,7 @@
           <p:cNvPr id="28" name="p17-b-6">
             <a:extLst xmlns:a="http://schemas.openxmlformats.org/drawingml/2006/main">
               <a:ext uri="{FF2B5EF4-FFF2-40B4-BE49-F238E27FC236}">
-                <a16:creationId xmlns:a16="http://schemas.microsoft.com/office/drawing/2014/main" id="{5050BCD7-3A2F-4663-A50B-F68F3A559A1E}"/>
+                <a16:creationId xmlns:a16="http://schemas.microsoft.com/office/drawing/2014/main" id="{29906B79-5BDC-4167-A17B-FC4149F234C5}"/>
               </a:ext>
             </a:extLst>
           </p:cNvPr>
@@ -12860,7 +12862,7 @@
           <p:cNvPr id="29" name="p17-eq">
             <a:extLst xmlns:a="http://schemas.openxmlformats.org/drawingml/2006/main">
               <a:ext uri="{FF2B5EF4-FFF2-40B4-BE49-F238E27FC236}">
-                <a16:creationId xmlns:a16="http://schemas.microsoft.com/office/drawing/2014/main" id="{0E9477EF-D1A2-4CF7-B6E3-DF9F80D5A09D}"/>
+                <a16:creationId xmlns:a16="http://schemas.microsoft.com/office/drawing/2014/main" id="{F2424136-64D0-42FC-8F1E-20D40E17A35C}"/>
               </a:ext>
             </a:extLst>
           </p:cNvPr>
@@ -13007,7 +13009,7 @@
           <p:cNvPr id="6" name="p18-left-h">
             <a:extLst xmlns:a="http://schemas.openxmlformats.org/drawingml/2006/main">
               <a:ext uri="{FF2B5EF4-FFF2-40B4-BE49-F238E27FC236}">
-                <a16:creationId xmlns:a16="http://schemas.microsoft.com/office/drawing/2014/main" id="{4ACA9855-B9A2-4C89-B0C0-827C5BD0FAA7}"/>
+                <a16:creationId xmlns:a16="http://schemas.microsoft.com/office/drawing/2014/main" id="{0DD88647-9603-4CA3-811D-01CB0BB556EF}"/>
               </a:ext>
             </a:extLst>
           </p:cNvPr>
@@ -13062,7 +13064,7 @@
           <p:cNvPr id="7" name="p18-left">
             <a:extLst xmlns:a="http://schemas.openxmlformats.org/drawingml/2006/main">
               <a:ext uri="{FF2B5EF4-FFF2-40B4-BE49-F238E27FC236}">
-                <a16:creationId xmlns:a16="http://schemas.microsoft.com/office/drawing/2014/main" id="{C0511FB3-EB39-42EC-B6BA-25F1AF0AE699}"/>
+                <a16:creationId xmlns:a16="http://schemas.microsoft.com/office/drawing/2014/main" id="{95E8AC9E-62B7-4B73-8786-5CF63410F22C}"/>
               </a:ext>
             </a:extLst>
           </p:cNvPr>
@@ -13193,7 +13195,7 @@
           <p:cNvPr id="8" name="p18-right-h">
             <a:extLst xmlns:a="http://schemas.openxmlformats.org/drawingml/2006/main">
               <a:ext uri="{FF2B5EF4-FFF2-40B4-BE49-F238E27FC236}">
-                <a16:creationId xmlns:a16="http://schemas.microsoft.com/office/drawing/2014/main" id="{ADA59586-3B78-4337-9CCF-A99DEB406640}"/>
+                <a16:creationId xmlns:a16="http://schemas.microsoft.com/office/drawing/2014/main" id="{96895D39-EF6E-491A-A742-8AE1E777EFA8}"/>
               </a:ext>
             </a:extLst>
           </p:cNvPr>
@@ -13248,7 +13250,7 @@
           <p:cNvPr id="9" name="p18-n-0">
             <a:extLst xmlns:a="http://schemas.openxmlformats.org/drawingml/2006/main">
               <a:ext uri="{FF2B5EF4-FFF2-40B4-BE49-F238E27FC236}">
-                <a16:creationId xmlns:a16="http://schemas.microsoft.com/office/drawing/2014/main" id="{397852E5-8C21-44B9-A690-2C02DF16978E}"/>
+                <a16:creationId xmlns:a16="http://schemas.microsoft.com/office/drawing/2014/main" id="{28E63B7B-F2F3-4B8F-A6B9-1922DAC58A52}"/>
               </a:ext>
             </a:extLst>
           </p:cNvPr>
@@ -13305,7 +13307,7 @@
           <p:cNvPr id="10" name="p18-q-0">
             <a:extLst xmlns:a="http://schemas.openxmlformats.org/drawingml/2006/main">
               <a:ext uri="{FF2B5EF4-FFF2-40B4-BE49-F238E27FC236}">
-                <a16:creationId xmlns:a16="http://schemas.microsoft.com/office/drawing/2014/main" id="{2BEA6F1D-787B-4B9E-8E6E-656AA20DC580}"/>
+                <a16:creationId xmlns:a16="http://schemas.microsoft.com/office/drawing/2014/main" id="{F4B24F98-E674-4AFB-BF1D-60D06B3DFE7A}"/>
               </a:ext>
             </a:extLst>
           </p:cNvPr>
@@ -13360,7 +13362,7 @@
           <p:cNvPr id="11" name="p18-n-1">
             <a:extLst xmlns:a="http://schemas.openxmlformats.org/drawingml/2006/main">
               <a:ext uri="{FF2B5EF4-FFF2-40B4-BE49-F238E27FC236}">
-                <a16:creationId xmlns:a16="http://schemas.microsoft.com/office/drawing/2014/main" id="{23C1C18C-F7D2-4A19-85F3-9CA06D66CFD6}"/>
+                <a16:creationId xmlns:a16="http://schemas.microsoft.com/office/drawing/2014/main" id="{AB7E1D31-748A-40C4-90D5-D53DACEE861B}"/>
               </a:ext>
             </a:extLst>
           </p:cNvPr>
@@ -13417,7 +13419,7 @@
           <p:cNvPr id="12" name="p18-q-1">
             <a:extLst xmlns:a="http://schemas.openxmlformats.org/drawingml/2006/main">
               <a:ext uri="{FF2B5EF4-FFF2-40B4-BE49-F238E27FC236}">
-                <a16:creationId xmlns:a16="http://schemas.microsoft.com/office/drawing/2014/main" id="{30334D4C-D254-476A-AEEB-D96B466C4FB4}"/>
+                <a16:creationId xmlns:a16="http://schemas.microsoft.com/office/drawing/2014/main" id="{B9AFA9A8-B642-46A8-AB2C-C5746F310817}"/>
               </a:ext>
             </a:extLst>
           </p:cNvPr>
@@ -13472,7 +13474,7 @@
           <p:cNvPr id="13" name="p18-n-2">
             <a:extLst xmlns:a="http://schemas.openxmlformats.org/drawingml/2006/main">
               <a:ext uri="{FF2B5EF4-FFF2-40B4-BE49-F238E27FC236}">
-                <a16:creationId xmlns:a16="http://schemas.microsoft.com/office/drawing/2014/main" id="{CDAE96D2-DBB1-49F1-9549-D8B51F4EE17B}"/>
+                <a16:creationId xmlns:a16="http://schemas.microsoft.com/office/drawing/2014/main" id="{0F5A674F-7523-48DF-8935-9052C29A8ADA}"/>
               </a:ext>
             </a:extLst>
           </p:cNvPr>
@@ -13529,7 +13531,7 @@
           <p:cNvPr id="14" name="p18-q-2">
             <a:extLst xmlns:a="http://schemas.openxmlformats.org/drawingml/2006/main">
               <a:ext uri="{FF2B5EF4-FFF2-40B4-BE49-F238E27FC236}">
-                <a16:creationId xmlns:a16="http://schemas.microsoft.com/office/drawing/2014/main" id="{F2EB0132-E745-46E4-B26B-E4239E1723D4}"/>
+                <a16:creationId xmlns:a16="http://schemas.microsoft.com/office/drawing/2014/main" id="{96BC0B50-BE1C-44ED-B8C1-CA1623CB04CC}"/>
               </a:ext>
             </a:extLst>
           </p:cNvPr>
@@ -13584,7 +13586,7 @@
           <p:cNvPr id="15" name="p18-n-3">
             <a:extLst xmlns:a="http://schemas.openxmlformats.org/drawingml/2006/main">
               <a:ext uri="{FF2B5EF4-FFF2-40B4-BE49-F238E27FC236}">
-                <a16:creationId xmlns:a16="http://schemas.microsoft.com/office/drawing/2014/main" id="{F3084DC0-3236-467E-A753-364A04218089}"/>
+                <a16:creationId xmlns:a16="http://schemas.microsoft.com/office/drawing/2014/main" id="{41F80F1E-8C86-49DE-AB03-30941C420532}"/>
               </a:ext>
             </a:extLst>
           </p:cNvPr>
@@ -13641,7 +13643,7 @@
           <p:cNvPr id="16" name="p18-q-3">
             <a:extLst xmlns:a="http://schemas.openxmlformats.org/drawingml/2006/main">
               <a:ext uri="{FF2B5EF4-FFF2-40B4-BE49-F238E27FC236}">
-                <a16:creationId xmlns:a16="http://schemas.microsoft.com/office/drawing/2014/main" id="{398ABCA6-B062-47EC-B38D-A61740465226}"/>
+                <a16:creationId xmlns:a16="http://schemas.microsoft.com/office/drawing/2014/main" id="{D5552600-E768-455D-A8C4-0C52D02FC14C}"/>
               </a:ext>
             </a:extLst>
           </p:cNvPr>
@@ -13696,7 +13698,7 @@
           <p:cNvPr id="17" name="p18-n-4">
             <a:extLst xmlns:a="http://schemas.openxmlformats.org/drawingml/2006/main">
               <a:ext uri="{FF2B5EF4-FFF2-40B4-BE49-F238E27FC236}">
-                <a16:creationId xmlns:a16="http://schemas.microsoft.com/office/drawing/2014/main" id="{05224A50-AB42-4FA7-B40F-E20C74583577}"/>
+                <a16:creationId xmlns:a16="http://schemas.microsoft.com/office/drawing/2014/main" id="{91443712-2152-4D98-AECD-79A22CF98BB5}"/>
               </a:ext>
             </a:extLst>
           </p:cNvPr>
@@ -13753,7 +13755,7 @@
           <p:cNvPr id="18" name="p18-q-4">
             <a:extLst xmlns:a="http://schemas.openxmlformats.org/drawingml/2006/main">
               <a:ext uri="{FF2B5EF4-FFF2-40B4-BE49-F238E27FC236}">
-                <a16:creationId xmlns:a16="http://schemas.microsoft.com/office/drawing/2014/main" id="{09CE5F42-D3F5-45CD-ABE2-9424A45943EB}"/>
+                <a16:creationId xmlns:a16="http://schemas.microsoft.com/office/drawing/2014/main" id="{B87C53E4-3D42-4E24-8BB6-935B68C4736E}"/>
               </a:ext>
             </a:extLst>
           </p:cNvPr>
@@ -13808,7 +13810,7 @@
           <p:cNvPr id="19" name="p18-bottom">
             <a:extLst xmlns:a="http://schemas.openxmlformats.org/drawingml/2006/main">
               <a:ext uri="{FF2B5EF4-FFF2-40B4-BE49-F238E27FC236}">
-                <a16:creationId xmlns:a16="http://schemas.microsoft.com/office/drawing/2014/main" id="{E124ADE7-B46D-4351-9AE7-5B0EA1552757}"/>
+                <a16:creationId xmlns:a16="http://schemas.microsoft.com/office/drawing/2014/main" id="{68B37481-F049-4494-8D22-363D98443897}"/>
               </a:ext>
             </a:extLst>
           </p:cNvPr>
@@ -13959,7 +13961,7 @@
           <p:cNvPr id="6" name="p19-left-h">
             <a:extLst xmlns:a="http://schemas.openxmlformats.org/drawingml/2006/main">
               <a:ext uri="{FF2B5EF4-FFF2-40B4-BE49-F238E27FC236}">
-                <a16:creationId xmlns:a16="http://schemas.microsoft.com/office/drawing/2014/main" id="{A1A78762-2002-45E2-A076-56FEEC8B2DE2}"/>
+                <a16:creationId xmlns:a16="http://schemas.microsoft.com/office/drawing/2014/main" id="{EDCA3F70-9960-4195-885E-4253381D5E0E}"/>
               </a:ext>
             </a:extLst>
           </p:cNvPr>
@@ -14012,7 +14014,7 @@
           <p:cNvPr id="7" name="p19-n-0">
             <a:extLst xmlns:a="http://schemas.openxmlformats.org/drawingml/2006/main">
               <a:ext uri="{FF2B5EF4-FFF2-40B4-BE49-F238E27FC236}">
-                <a16:creationId xmlns:a16="http://schemas.microsoft.com/office/drawing/2014/main" id="{2F28D03D-2C1F-4827-BB93-2A96112786FC}"/>
+                <a16:creationId xmlns:a16="http://schemas.microsoft.com/office/drawing/2014/main" id="{5AB31FEF-2823-46BD-8487-F2DBC2CFEDFD}"/>
               </a:ext>
             </a:extLst>
           </p:cNvPr>
@@ -14069,7 +14071,7 @@
           <p:cNvPr id="8" name="p19-q-0">
             <a:extLst xmlns:a="http://schemas.openxmlformats.org/drawingml/2006/main">
               <a:ext uri="{FF2B5EF4-FFF2-40B4-BE49-F238E27FC236}">
-                <a16:creationId xmlns:a16="http://schemas.microsoft.com/office/drawing/2014/main" id="{C9490E6A-E3EE-4A67-A325-4F4C9BA46BF7}"/>
+                <a16:creationId xmlns:a16="http://schemas.microsoft.com/office/drawing/2014/main" id="{4E3358AA-1F51-4C93-940D-1E7DB8B57D8F}"/>
               </a:ext>
             </a:extLst>
           </p:cNvPr>
@@ -14124,7 +14126,7 @@
           <p:cNvPr id="9" name="p19-n-1">
             <a:extLst xmlns:a="http://schemas.openxmlformats.org/drawingml/2006/main">
               <a:ext uri="{FF2B5EF4-FFF2-40B4-BE49-F238E27FC236}">
-                <a16:creationId xmlns:a16="http://schemas.microsoft.com/office/drawing/2014/main" id="{29CE8C04-ADD7-431F-A9E9-1E86F90203AD}"/>
+                <a16:creationId xmlns:a16="http://schemas.microsoft.com/office/drawing/2014/main" id="{4F308E6E-283E-461F-9226-6DA4379BA3BE}"/>
               </a:ext>
             </a:extLst>
           </p:cNvPr>
@@ -14181,7 +14183,7 @@
           <p:cNvPr id="10" name="p19-q-1">
             <a:extLst xmlns:a="http://schemas.openxmlformats.org/drawingml/2006/main">
               <a:ext uri="{FF2B5EF4-FFF2-40B4-BE49-F238E27FC236}">
-                <a16:creationId xmlns:a16="http://schemas.microsoft.com/office/drawing/2014/main" id="{C38BBF4E-6E01-443A-8241-056E913A8E55}"/>
+                <a16:creationId xmlns:a16="http://schemas.microsoft.com/office/drawing/2014/main" id="{B119FBEA-A27D-4862-8578-7A77E1201B8C}"/>
               </a:ext>
             </a:extLst>
           </p:cNvPr>
@@ -14236,7 +14238,7 @@
           <p:cNvPr id="11" name="p19-n-2">
             <a:extLst xmlns:a="http://schemas.openxmlformats.org/drawingml/2006/main">
               <a:ext uri="{FF2B5EF4-FFF2-40B4-BE49-F238E27FC236}">
-                <a16:creationId xmlns:a16="http://schemas.microsoft.com/office/drawing/2014/main" id="{8763EC87-5369-4DA2-A152-C39A8F15B7FD}"/>
+                <a16:creationId xmlns:a16="http://schemas.microsoft.com/office/drawing/2014/main" id="{49FCD9F5-00A0-48DC-8C7D-7BDBB0852813}"/>
               </a:ext>
             </a:extLst>
           </p:cNvPr>
@@ -14293,7 +14295,7 @@
           <p:cNvPr id="12" name="p19-q-2">
             <a:extLst xmlns:a="http://schemas.openxmlformats.org/drawingml/2006/main">
               <a:ext uri="{FF2B5EF4-FFF2-40B4-BE49-F238E27FC236}">
-                <a16:creationId xmlns:a16="http://schemas.microsoft.com/office/drawing/2014/main" id="{04D3B510-D0C7-4267-949C-A7513EAB27AB}"/>
+                <a16:creationId xmlns:a16="http://schemas.microsoft.com/office/drawing/2014/main" id="{60A963BD-194B-445B-9B56-B5763BD22110}"/>
               </a:ext>
             </a:extLst>
           </p:cNvPr>
@@ -14348,7 +14350,7 @@
           <p:cNvPr id="13" name="p19-n-3">
             <a:extLst xmlns:a="http://schemas.openxmlformats.org/drawingml/2006/main">
               <a:ext uri="{FF2B5EF4-FFF2-40B4-BE49-F238E27FC236}">
-                <a16:creationId xmlns:a16="http://schemas.microsoft.com/office/drawing/2014/main" id="{7E79810B-5748-40D9-B1AF-496F429EAB97}"/>
+                <a16:creationId xmlns:a16="http://schemas.microsoft.com/office/drawing/2014/main" id="{567C7C96-4CF9-4D8F-9F59-66FD5EF6AC42}"/>
               </a:ext>
             </a:extLst>
           </p:cNvPr>
@@ -14405,7 +14407,7 @@
           <p:cNvPr id="14" name="p19-q-3">
             <a:extLst xmlns:a="http://schemas.openxmlformats.org/drawingml/2006/main">
               <a:ext uri="{FF2B5EF4-FFF2-40B4-BE49-F238E27FC236}">
-                <a16:creationId xmlns:a16="http://schemas.microsoft.com/office/drawing/2014/main" id="{A87C038C-D3AC-4664-99C8-10B651C3CF45}"/>
+                <a16:creationId xmlns:a16="http://schemas.microsoft.com/office/drawing/2014/main" id="{81B0B8AB-7317-410E-950D-18303074E901}"/>
               </a:ext>
             </a:extLst>
           </p:cNvPr>
@@ -14460,7 +14462,7 @@
           <p:cNvPr id="15" name="p19-right-h">
             <a:extLst xmlns:a="http://schemas.openxmlformats.org/drawingml/2006/main">
               <a:ext uri="{FF2B5EF4-FFF2-40B4-BE49-F238E27FC236}">
-                <a16:creationId xmlns:a16="http://schemas.microsoft.com/office/drawing/2014/main" id="{358A7CA0-B9D6-424F-B368-187A7FA004B4}"/>
+                <a16:creationId xmlns:a16="http://schemas.microsoft.com/office/drawing/2014/main" id="{985278BB-3341-4954-BB09-2C4DEB9E41DA}"/>
               </a:ext>
             </a:extLst>
           </p:cNvPr>
@@ -14515,7 +14517,7 @@
           <p:cNvPr id="16" name="p19-line-0">
             <a:extLst xmlns:a="http://schemas.openxmlformats.org/drawingml/2006/main">
               <a:ext uri="{FF2B5EF4-FFF2-40B4-BE49-F238E27FC236}">
-                <a16:creationId xmlns:a16="http://schemas.microsoft.com/office/drawing/2014/main" id="{DC6B89D9-7CDF-4DB4-BB7D-0CA74085BA3B}"/>
+                <a16:creationId xmlns:a16="http://schemas.microsoft.com/office/drawing/2014/main" id="{B3ED17D2-9A23-4543-BE2C-88932B0A1F14}"/>
               </a:ext>
             </a:extLst>
           </p:cNvPr>
@@ -14546,7 +14548,7 @@
           <p:cNvPr id="17" name="p19-f-0">
             <a:extLst xmlns:a="http://schemas.openxmlformats.org/drawingml/2006/main">
               <a:ext uri="{FF2B5EF4-FFF2-40B4-BE49-F238E27FC236}">
-                <a16:creationId xmlns:a16="http://schemas.microsoft.com/office/drawing/2014/main" id="{CF6BBC39-6007-41E9-B4FD-EE0C4B4310CB}"/>
+                <a16:creationId xmlns:a16="http://schemas.microsoft.com/office/drawing/2014/main" id="{5CFC39DA-3F1C-496E-B663-24A233028260}"/>
               </a:ext>
             </a:extLst>
           </p:cNvPr>
@@ -14605,7 +14607,7 @@
           <p:cNvPr id="18" name="p19-line-1">
             <a:extLst xmlns:a="http://schemas.openxmlformats.org/drawingml/2006/main">
               <a:ext uri="{FF2B5EF4-FFF2-40B4-BE49-F238E27FC236}">
-                <a16:creationId xmlns:a16="http://schemas.microsoft.com/office/drawing/2014/main" id="{A5712603-1F62-4DD1-B513-F4FF506A6B61}"/>
+                <a16:creationId xmlns:a16="http://schemas.microsoft.com/office/drawing/2014/main" id="{DDBD2FB8-1667-4DB6-A493-90300BCCA440}"/>
               </a:ext>
             </a:extLst>
           </p:cNvPr>
@@ -14636,7 +14638,7 @@
           <p:cNvPr id="19" name="p19-f-1">
             <a:extLst xmlns:a="http://schemas.openxmlformats.org/drawingml/2006/main">
               <a:ext uri="{FF2B5EF4-FFF2-40B4-BE49-F238E27FC236}">
-                <a16:creationId xmlns:a16="http://schemas.microsoft.com/office/drawing/2014/main" id="{3A8B75C9-234A-4625-97F6-3562F02033FF}"/>
+                <a16:creationId xmlns:a16="http://schemas.microsoft.com/office/drawing/2014/main" id="{CE5EAEFE-800E-4735-807C-6DAA522D5DAD}"/>
               </a:ext>
             </a:extLst>
           </p:cNvPr>
@@ -14695,7 +14697,7 @@
           <p:cNvPr id="20" name="p19-line-2">
             <a:extLst xmlns:a="http://schemas.openxmlformats.org/drawingml/2006/main">
               <a:ext uri="{FF2B5EF4-FFF2-40B4-BE49-F238E27FC236}">
-                <a16:creationId xmlns:a16="http://schemas.microsoft.com/office/drawing/2014/main" id="{2EBA4C8A-C6B1-4CBB-BDFB-D6403FC68F57}"/>
+                <a16:creationId xmlns:a16="http://schemas.microsoft.com/office/drawing/2014/main" id="{90DD9D46-BC89-4281-8371-C0045880EA22}"/>
               </a:ext>
             </a:extLst>
           </p:cNvPr>
@@ -14726,7 +14728,7 @@
           <p:cNvPr id="21" name="p19-f-2">
             <a:extLst xmlns:a="http://schemas.openxmlformats.org/drawingml/2006/main">
               <a:ext uri="{FF2B5EF4-FFF2-40B4-BE49-F238E27FC236}">
-                <a16:creationId xmlns:a16="http://schemas.microsoft.com/office/drawing/2014/main" id="{36C92FEE-1E79-44B0-928F-AC7F2FB09CED}"/>
+                <a16:creationId xmlns:a16="http://schemas.microsoft.com/office/drawing/2014/main" id="{3B9529C5-48EE-448D-9D0D-47242ABB355F}"/>
               </a:ext>
             </a:extLst>
           </p:cNvPr>
@@ -14785,7 +14787,7 @@
           <p:cNvPr id="22" name="p19-f-3">
             <a:extLst xmlns:a="http://schemas.openxmlformats.org/drawingml/2006/main">
               <a:ext uri="{FF2B5EF4-FFF2-40B4-BE49-F238E27FC236}">
-                <a16:creationId xmlns:a16="http://schemas.microsoft.com/office/drawing/2014/main" id="{30352A3D-DF9D-4150-84C5-979A9BA56981}"/>
+                <a16:creationId xmlns:a16="http://schemas.microsoft.com/office/drawing/2014/main" id="{E6156BC4-6345-4E65-A3D9-C5CDBB7D8B5F}"/>
               </a:ext>
             </a:extLst>
           </p:cNvPr>
@@ -14844,7 +14846,7 @@
           <p:cNvPr id="23" name="p19-bottom">
             <a:extLst xmlns:a="http://schemas.openxmlformats.org/drawingml/2006/main">
               <a:ext uri="{FF2B5EF4-FFF2-40B4-BE49-F238E27FC236}">
-                <a16:creationId xmlns:a16="http://schemas.microsoft.com/office/drawing/2014/main" id="{753D1CBF-4979-4970-BBCC-D2CB4645003A}"/>
+                <a16:creationId xmlns:a16="http://schemas.microsoft.com/office/drawing/2014/main" id="{96D123C9-05B9-4A6C-A7A9-67DEA0A0D14C}"/>
               </a:ext>
             </a:extLst>
           </p:cNvPr>
@@ -14991,7 +14993,7 @@
           <p:cNvPr id="6" name="p02-left-title">
             <a:extLst xmlns:a="http://schemas.openxmlformats.org/drawingml/2006/main">
               <a:ext uri="{FF2B5EF4-FFF2-40B4-BE49-F238E27FC236}">
-                <a16:creationId xmlns:a16="http://schemas.microsoft.com/office/drawing/2014/main" id="{66F62669-6ED7-422B-AE02-D6326E0EF10A}"/>
+                <a16:creationId xmlns:a16="http://schemas.microsoft.com/office/drawing/2014/main" id="{4BC874C2-66C1-4827-B2BA-2995737443FE}"/>
               </a:ext>
             </a:extLst>
           </p:cNvPr>
@@ -15044,7 +15046,7 @@
           <p:cNvPr id="7" name="p02-l-0">
             <a:extLst xmlns:a="http://schemas.openxmlformats.org/drawingml/2006/main">
               <a:ext uri="{FF2B5EF4-FFF2-40B4-BE49-F238E27FC236}">
-                <a16:creationId xmlns:a16="http://schemas.microsoft.com/office/drawing/2014/main" id="{F4970E4E-CBAA-4DC8-94DA-B6E92D3176AF}"/>
+                <a16:creationId xmlns:a16="http://schemas.microsoft.com/office/drawing/2014/main" id="{EBC6D786-AE90-4BE3-B478-068E238A67D9}"/>
               </a:ext>
             </a:extLst>
           </p:cNvPr>
@@ -15101,7 +15103,7 @@
           <p:cNvPr id="8" name="p02-l-1">
             <a:extLst xmlns:a="http://schemas.openxmlformats.org/drawingml/2006/main">
               <a:ext uri="{FF2B5EF4-FFF2-40B4-BE49-F238E27FC236}">
-                <a16:creationId xmlns:a16="http://schemas.microsoft.com/office/drawing/2014/main" id="{529C151C-6411-4C96-9373-880AEA1ED561}"/>
+                <a16:creationId xmlns:a16="http://schemas.microsoft.com/office/drawing/2014/main" id="{C0242C49-5F34-43F1-B385-14A0858EC723}"/>
               </a:ext>
             </a:extLst>
           </p:cNvPr>
@@ -15158,7 +15160,7 @@
           <p:cNvPr id="9" name="p02-l-2">
             <a:extLst xmlns:a="http://schemas.openxmlformats.org/drawingml/2006/main">
               <a:ext uri="{FF2B5EF4-FFF2-40B4-BE49-F238E27FC236}">
-                <a16:creationId xmlns:a16="http://schemas.microsoft.com/office/drawing/2014/main" id="{F4F2E563-E7D9-44E1-9621-BF906CE28A72}"/>
+                <a16:creationId xmlns:a16="http://schemas.microsoft.com/office/drawing/2014/main" id="{E5CDD8A2-2E2F-4A12-92C7-FDA32B5A8BEF}"/>
               </a:ext>
             </a:extLst>
           </p:cNvPr>
@@ -15215,7 +15217,7 @@
           <p:cNvPr id="10" name="p02-ne">
             <a:extLst xmlns:a="http://schemas.openxmlformats.org/drawingml/2006/main">
               <a:ext uri="{FF2B5EF4-FFF2-40B4-BE49-F238E27FC236}">
-                <a16:creationId xmlns:a16="http://schemas.microsoft.com/office/drawing/2014/main" id="{C936044F-80C5-44FF-82A4-51E567D921CE}"/>
+                <a16:creationId xmlns:a16="http://schemas.microsoft.com/office/drawing/2014/main" id="{31145798-A056-4F07-97E7-375F6C3145AF}"/>
               </a:ext>
             </a:extLst>
           </p:cNvPr>
@@ -15268,7 +15270,7 @@
           <p:cNvPr id="11" name="p02-right-title">
             <a:extLst xmlns:a="http://schemas.openxmlformats.org/drawingml/2006/main">
               <a:ext uri="{FF2B5EF4-FFF2-40B4-BE49-F238E27FC236}">
-                <a16:creationId xmlns:a16="http://schemas.microsoft.com/office/drawing/2014/main" id="{F0CA6171-EA74-4C2D-8FF0-AC4C9A424253}"/>
+                <a16:creationId xmlns:a16="http://schemas.microsoft.com/office/drawing/2014/main" id="{C4A4A60C-B6F6-4AA4-9B36-917656A83A3D}"/>
               </a:ext>
             </a:extLst>
           </p:cNvPr>
@@ -15321,7 +15323,7 @@
           <p:cNvPr id="12" name="p02-r-0">
             <a:extLst xmlns:a="http://schemas.openxmlformats.org/drawingml/2006/main">
               <a:ext uri="{FF2B5EF4-FFF2-40B4-BE49-F238E27FC236}">
-                <a16:creationId xmlns:a16="http://schemas.microsoft.com/office/drawing/2014/main" id="{44AD30BA-3FB3-4B2B-8C57-A2BA351EAFD9}"/>
+                <a16:creationId xmlns:a16="http://schemas.microsoft.com/office/drawing/2014/main" id="{E205AC3C-8B6D-4117-936B-C791A479C0CF}"/>
               </a:ext>
             </a:extLst>
           </p:cNvPr>
@@ -15378,7 +15380,7 @@
           <p:cNvPr id="13" name="p02-r-1">
             <a:extLst xmlns:a="http://schemas.openxmlformats.org/drawingml/2006/main">
               <a:ext uri="{FF2B5EF4-FFF2-40B4-BE49-F238E27FC236}">
-                <a16:creationId xmlns:a16="http://schemas.microsoft.com/office/drawing/2014/main" id="{B103F5CC-8DBF-4814-8375-55DC82A21425}"/>
+                <a16:creationId xmlns:a16="http://schemas.microsoft.com/office/drawing/2014/main" id="{86E02CEF-CBA6-4847-863A-E14D556DFC4F}"/>
               </a:ext>
             </a:extLst>
           </p:cNvPr>
@@ -15435,7 +15437,7 @@
           <p:cNvPr id="14" name="p02-r-2">
             <a:extLst xmlns:a="http://schemas.openxmlformats.org/drawingml/2006/main">
               <a:ext uri="{FF2B5EF4-FFF2-40B4-BE49-F238E27FC236}">
-                <a16:creationId xmlns:a16="http://schemas.microsoft.com/office/drawing/2014/main" id="{982C6E99-E915-4ABD-9909-348E64581479}"/>
+                <a16:creationId xmlns:a16="http://schemas.microsoft.com/office/drawing/2014/main" id="{5B71F420-B58A-4DFA-8BD2-82BAAAA51DCD}"/>
               </a:ext>
             </a:extLst>
           </p:cNvPr>
@@ -15492,7 +15494,7 @@
           <p:cNvPr id="15" name="p02-r-3">
             <a:extLst xmlns:a="http://schemas.openxmlformats.org/drawingml/2006/main">
               <a:ext uri="{FF2B5EF4-FFF2-40B4-BE49-F238E27FC236}">
-                <a16:creationId xmlns:a16="http://schemas.microsoft.com/office/drawing/2014/main" id="{FB2605C9-FC9A-476F-9AD3-043004AE38C3}"/>
+                <a16:creationId xmlns:a16="http://schemas.microsoft.com/office/drawing/2014/main" id="{D5870874-3539-481E-9D92-A3BBE5A74D29}"/>
               </a:ext>
             </a:extLst>
           </p:cNvPr>
@@ -15549,19 +15551,19 @@
           <p:cNvPr id="16" name="p02-out">
             <a:extLst xmlns:a="http://schemas.openxmlformats.org/drawingml/2006/main">
               <a:ext uri="{FF2B5EF4-FFF2-40B4-BE49-F238E27FC236}">
-                <a16:creationId xmlns:a16="http://schemas.microsoft.com/office/drawing/2014/main" id="{8F19904A-1EE8-4F4C-AC48-A4FAD8A19CA1}"/>
-              </a:ext>
-            </a:extLst>
-          </p:cNvPr>
-          <p:cNvSpPr>
-            <a:spLocks xmlns:a="http://schemas.openxmlformats.org/drawingml/2006/main" noGrp="1"/>
-          </p:cNvSpPr>
-          <p:nvPr/>
-        </p:nvSpPr>
-        <p:spPr>
-          <a:xfrm xmlns:a="http://schemas.openxmlformats.org/drawingml/2006/main">
-            <a:off x="1790700" y="4972050"/>
-            <a:ext cx="8610600" cy="533400"/>
+                <a16:creationId xmlns:a16="http://schemas.microsoft.com/office/drawing/2014/main" id="{FC1D3BFB-572D-4AE0-8245-AFF58F4F3141}"/>
+              </a:ext>
+            </a:extLst>
+          </p:cNvPr>
+          <p:cNvSpPr>
+            <a:spLocks xmlns:a="http://schemas.openxmlformats.org/drawingml/2006/main" noGrp="1"/>
+          </p:cNvSpPr>
+          <p:nvPr/>
+        </p:nvSpPr>
+        <p:spPr>
+          <a:xfrm xmlns:a="http://schemas.openxmlformats.org/drawingml/2006/main">
+            <a:off x="1428750" y="4972050"/>
+            <a:ext cx="9334500" cy="533400"/>
           </a:xfrm>
           <a:prstGeom xmlns:a="http://schemas.openxmlformats.org/drawingml/2006/main" prst="roundRect">
             <a:avLst>
@@ -15581,14 +15583,14 @@
           <a:lstStyle xmlns:a="http://schemas.openxmlformats.org/drawingml/2006/main"/>
           <a:p xmlns:a="http://schemas.openxmlformats.org/drawingml/2006/main">
             <a:pPr algn="ctr">
-              <a:defRPr sz="1725" b="1">
+              <a:defRPr sz="1800" b="1">
                 <a:solidFill>
                   <a:srgbClr val="FFFFFF"/>
                 </a:solidFill>
               </a:defRPr>
             </a:pPr>
             <a:r>
-              <a:rPr sz="1725" b="1">
+              <a:rPr sz="1800" b="1">
                 <a:solidFill>
                   <a:srgbClr val="FFFFFF"/>
                 </a:solidFill>
@@ -15596,7 +15598,7 @@
                 <a:ea typeface="Microsoft YaHei"/>
                 <a:cs typeface="Microsoft YaHei"/>
               </a:rPr>
-              <a:t>本课产出｜受限循环说明 + 失败迭代记录 + 八维拆解表</a:t>
+              <a:t>1 分钟动作｜在现有记录中圈出最缺的一项：指标 / 预算 / 停止 / 回退</a:t>
             </a:r>
           </a:p>
         </p:txBody>
@@ -15700,7 +15702,7 @@
           <p:cNvPr id="6" name="p03-line-0">
             <a:extLst xmlns:a="http://schemas.openxmlformats.org/drawingml/2006/main">
               <a:ext uri="{FF2B5EF4-FFF2-40B4-BE49-F238E27FC236}">
-                <a16:creationId xmlns:a16="http://schemas.microsoft.com/office/drawing/2014/main" id="{D0E67B2E-BC9C-4A18-B4F3-2A7E45D7F850}"/>
+                <a16:creationId xmlns:a16="http://schemas.microsoft.com/office/drawing/2014/main" id="{FDB5113A-4B9A-4063-9816-16BA1809C4E2}"/>
               </a:ext>
             </a:extLst>
           </p:cNvPr>
@@ -15731,7 +15733,7 @@
           <p:cNvPr id="7" name="p03-line-1">
             <a:extLst xmlns:a="http://schemas.openxmlformats.org/drawingml/2006/main">
               <a:ext uri="{FF2B5EF4-FFF2-40B4-BE49-F238E27FC236}">
-                <a16:creationId xmlns:a16="http://schemas.microsoft.com/office/drawing/2014/main" id="{D5BD6FDB-0173-4FDC-BD29-D8AD474A516A}"/>
+                <a16:creationId xmlns:a16="http://schemas.microsoft.com/office/drawing/2014/main" id="{BE9BAABE-4B91-4E20-A3C8-785B83A1954A}"/>
               </a:ext>
             </a:extLst>
           </p:cNvPr>
@@ -15762,7 +15764,7 @@
           <p:cNvPr id="8" name="p03-line-2">
             <a:extLst xmlns:a="http://schemas.openxmlformats.org/drawingml/2006/main">
               <a:ext uri="{FF2B5EF4-FFF2-40B4-BE49-F238E27FC236}">
-                <a16:creationId xmlns:a16="http://schemas.microsoft.com/office/drawing/2014/main" id="{E3F901AA-4A6B-4A05-92E0-182D608D7988}"/>
+                <a16:creationId xmlns:a16="http://schemas.microsoft.com/office/drawing/2014/main" id="{5CB9AD8C-D0B4-45D3-9DE2-58F5F45C2E87}"/>
               </a:ext>
             </a:extLst>
           </p:cNvPr>
@@ -15793,7 +15795,7 @@
           <p:cNvPr id="9" name="p03-line-3">
             <a:extLst xmlns:a="http://schemas.openxmlformats.org/drawingml/2006/main">
               <a:ext uri="{FF2B5EF4-FFF2-40B4-BE49-F238E27FC236}">
-                <a16:creationId xmlns:a16="http://schemas.microsoft.com/office/drawing/2014/main" id="{B719F002-CD78-488B-BCCF-0D78FC774B86}"/>
+                <a16:creationId xmlns:a16="http://schemas.microsoft.com/office/drawing/2014/main" id="{DE0F67ED-8051-46A8-951E-70188B9D11C4}"/>
               </a:ext>
             </a:extLst>
           </p:cNvPr>
@@ -15824,7 +15826,7 @@
           <p:cNvPr id="10" name="p03-line-4">
             <a:extLst xmlns:a="http://schemas.openxmlformats.org/drawingml/2006/main">
               <a:ext uri="{FF2B5EF4-FFF2-40B4-BE49-F238E27FC236}">
-                <a16:creationId xmlns:a16="http://schemas.microsoft.com/office/drawing/2014/main" id="{59C422FD-B151-446B-B6B2-C9CF647B2EA6}"/>
+                <a16:creationId xmlns:a16="http://schemas.microsoft.com/office/drawing/2014/main" id="{952E4D9F-EAA2-4D4A-979E-F8E1C2262C91}"/>
               </a:ext>
             </a:extLst>
           </p:cNvPr>
@@ -15855,7 +15857,7 @@
           <p:cNvPr id="11" name="p03-n-0">
             <a:extLst xmlns:a="http://schemas.openxmlformats.org/drawingml/2006/main">
               <a:ext uri="{FF2B5EF4-FFF2-40B4-BE49-F238E27FC236}">
-                <a16:creationId xmlns:a16="http://schemas.microsoft.com/office/drawing/2014/main" id="{E54B990B-F59F-46AD-B4B7-038B126F2138}"/>
+                <a16:creationId xmlns:a16="http://schemas.microsoft.com/office/drawing/2014/main" id="{581D2E34-54D6-4435-8042-E04011C2E472}"/>
               </a:ext>
             </a:extLst>
           </p:cNvPr>
@@ -15912,7 +15914,7 @@
           <p:cNvPr id="12" name="p03-step-0">
             <a:extLst xmlns:a="http://schemas.openxmlformats.org/drawingml/2006/main">
               <a:ext uri="{FF2B5EF4-FFF2-40B4-BE49-F238E27FC236}">
-                <a16:creationId xmlns:a16="http://schemas.microsoft.com/office/drawing/2014/main" id="{CAB63572-F4F8-47CE-83C0-B452112F62DB}"/>
+                <a16:creationId xmlns:a16="http://schemas.microsoft.com/office/drawing/2014/main" id="{1097D1B7-4B46-4535-9455-A864CA0C94DC}"/>
               </a:ext>
             </a:extLst>
           </p:cNvPr>
@@ -15967,7 +15969,7 @@
           <p:cNvPr id="13" name="p03-n-1">
             <a:extLst xmlns:a="http://schemas.openxmlformats.org/drawingml/2006/main">
               <a:ext uri="{FF2B5EF4-FFF2-40B4-BE49-F238E27FC236}">
-                <a16:creationId xmlns:a16="http://schemas.microsoft.com/office/drawing/2014/main" id="{EB53AB49-9270-4D6A-B212-39A28319FDBF}"/>
+                <a16:creationId xmlns:a16="http://schemas.microsoft.com/office/drawing/2014/main" id="{5E497B00-D05C-41CB-A55D-47866E866938}"/>
               </a:ext>
             </a:extLst>
           </p:cNvPr>
@@ -16024,7 +16026,7 @@
           <p:cNvPr id="14" name="p03-step-1">
             <a:extLst xmlns:a="http://schemas.openxmlformats.org/drawingml/2006/main">
               <a:ext uri="{FF2B5EF4-FFF2-40B4-BE49-F238E27FC236}">
-                <a16:creationId xmlns:a16="http://schemas.microsoft.com/office/drawing/2014/main" id="{A37B4614-83D7-4DE4-B5B7-E37EF43A98CA}"/>
+                <a16:creationId xmlns:a16="http://schemas.microsoft.com/office/drawing/2014/main" id="{4625229B-B9D5-498B-A330-30E6B477DFC5}"/>
               </a:ext>
             </a:extLst>
           </p:cNvPr>
@@ -16079,7 +16081,7 @@
           <p:cNvPr id="15" name="p03-n-2">
             <a:extLst xmlns:a="http://schemas.openxmlformats.org/drawingml/2006/main">
               <a:ext uri="{FF2B5EF4-FFF2-40B4-BE49-F238E27FC236}">
-                <a16:creationId xmlns:a16="http://schemas.microsoft.com/office/drawing/2014/main" id="{75ACD19B-FF17-4BA7-9122-1B005E712019}"/>
+                <a16:creationId xmlns:a16="http://schemas.microsoft.com/office/drawing/2014/main" id="{E452EDA7-41E4-4E2E-A51A-C154B44C7DB1}"/>
               </a:ext>
             </a:extLst>
           </p:cNvPr>
@@ -16136,7 +16138,7 @@
           <p:cNvPr id="16" name="p03-step-2">
             <a:extLst xmlns:a="http://schemas.openxmlformats.org/drawingml/2006/main">
               <a:ext uri="{FF2B5EF4-FFF2-40B4-BE49-F238E27FC236}">
-                <a16:creationId xmlns:a16="http://schemas.microsoft.com/office/drawing/2014/main" id="{C9F18104-E8FE-481C-8715-C532D6527630}"/>
+                <a16:creationId xmlns:a16="http://schemas.microsoft.com/office/drawing/2014/main" id="{0380F07F-9786-4178-9588-ACC159C692E5}"/>
               </a:ext>
             </a:extLst>
           </p:cNvPr>
@@ -16191,7 +16193,7 @@
           <p:cNvPr id="17" name="p03-n-3">
             <a:extLst xmlns:a="http://schemas.openxmlformats.org/drawingml/2006/main">
               <a:ext uri="{FF2B5EF4-FFF2-40B4-BE49-F238E27FC236}">
-                <a16:creationId xmlns:a16="http://schemas.microsoft.com/office/drawing/2014/main" id="{EAB2197B-65D8-4400-94EF-F5FA8AF2D37C}"/>
+                <a16:creationId xmlns:a16="http://schemas.microsoft.com/office/drawing/2014/main" id="{6B663F27-BB8E-4425-BE79-E1A778130DF8}"/>
               </a:ext>
             </a:extLst>
           </p:cNvPr>
@@ -16248,7 +16250,7 @@
           <p:cNvPr id="18" name="p03-step-3">
             <a:extLst xmlns:a="http://schemas.openxmlformats.org/drawingml/2006/main">
               <a:ext uri="{FF2B5EF4-FFF2-40B4-BE49-F238E27FC236}">
-                <a16:creationId xmlns:a16="http://schemas.microsoft.com/office/drawing/2014/main" id="{EE8F7E1B-5E24-4654-AB43-D65AA14B7B5A}"/>
+                <a16:creationId xmlns:a16="http://schemas.microsoft.com/office/drawing/2014/main" id="{90B5091C-F674-4652-968C-5EFCA5C60D91}"/>
               </a:ext>
             </a:extLst>
           </p:cNvPr>
@@ -16303,7 +16305,7 @@
           <p:cNvPr id="19" name="p03-n-4">
             <a:extLst xmlns:a="http://schemas.openxmlformats.org/drawingml/2006/main">
               <a:ext uri="{FF2B5EF4-FFF2-40B4-BE49-F238E27FC236}">
-                <a16:creationId xmlns:a16="http://schemas.microsoft.com/office/drawing/2014/main" id="{ECBC4BFD-9577-4B82-BCB6-E3C3C2DE99BD}"/>
+                <a16:creationId xmlns:a16="http://schemas.microsoft.com/office/drawing/2014/main" id="{13A031DE-2209-4254-BE57-F5271FC45800}"/>
               </a:ext>
             </a:extLst>
           </p:cNvPr>
@@ -16360,7 +16362,7 @@
           <p:cNvPr id="20" name="p03-step-4">
             <a:extLst xmlns:a="http://schemas.openxmlformats.org/drawingml/2006/main">
               <a:ext uri="{FF2B5EF4-FFF2-40B4-BE49-F238E27FC236}">
-                <a16:creationId xmlns:a16="http://schemas.microsoft.com/office/drawing/2014/main" id="{D831CB26-90B1-4FC6-B0D4-56BE136B11CE}"/>
+                <a16:creationId xmlns:a16="http://schemas.microsoft.com/office/drawing/2014/main" id="{74AE9654-6A22-4D6F-B150-3BB061001FB5}"/>
               </a:ext>
             </a:extLst>
           </p:cNvPr>
@@ -16415,7 +16417,7 @@
           <p:cNvPr id="21" name="p03-n-5">
             <a:extLst xmlns:a="http://schemas.openxmlformats.org/drawingml/2006/main">
               <a:ext uri="{FF2B5EF4-FFF2-40B4-BE49-F238E27FC236}">
-                <a16:creationId xmlns:a16="http://schemas.microsoft.com/office/drawing/2014/main" id="{929EB910-DFE3-4F09-B05D-3084EE07C2C8}"/>
+                <a16:creationId xmlns:a16="http://schemas.microsoft.com/office/drawing/2014/main" id="{42F89993-AF7E-4FBE-96B1-FF683A13FFF3}"/>
               </a:ext>
             </a:extLst>
           </p:cNvPr>
@@ -16472,7 +16474,7 @@
           <p:cNvPr id="22" name="p03-step-5">
             <a:extLst xmlns:a="http://schemas.openxmlformats.org/drawingml/2006/main">
               <a:ext uri="{FF2B5EF4-FFF2-40B4-BE49-F238E27FC236}">
-                <a16:creationId xmlns:a16="http://schemas.microsoft.com/office/drawing/2014/main" id="{E3FC60BF-7A33-4152-A489-2C8721666C7B}"/>
+                <a16:creationId xmlns:a16="http://schemas.microsoft.com/office/drawing/2014/main" id="{C3BFD45B-5270-48C3-9523-01D4C1BC7F83}"/>
               </a:ext>
             </a:extLst>
           </p:cNvPr>
@@ -16527,7 +16529,7 @@
           <p:cNvPr id="23" name="p03-out-title">
             <a:extLst xmlns:a="http://schemas.openxmlformats.org/drawingml/2006/main">
               <a:ext uri="{FF2B5EF4-FFF2-40B4-BE49-F238E27FC236}">
-                <a16:creationId xmlns:a16="http://schemas.microsoft.com/office/drawing/2014/main" id="{643C702B-177F-4D0C-8CEE-07651B0A7005}"/>
+                <a16:creationId xmlns:a16="http://schemas.microsoft.com/office/drawing/2014/main" id="{B1338B8B-A60A-4D4E-A05E-EE6146F7F8EC}"/>
               </a:ext>
             </a:extLst>
           </p:cNvPr>
@@ -16580,7 +16582,7 @@
           <p:cNvPr id="24" name="p03-oh-0">
             <a:extLst xmlns:a="http://schemas.openxmlformats.org/drawingml/2006/main">
               <a:ext uri="{FF2B5EF4-FFF2-40B4-BE49-F238E27FC236}">
-                <a16:creationId xmlns:a16="http://schemas.microsoft.com/office/drawing/2014/main" id="{4060CFAF-3551-412D-9606-775564A9CD21}"/>
+                <a16:creationId xmlns:a16="http://schemas.microsoft.com/office/drawing/2014/main" id="{9BCD634E-55CE-4737-8B2B-337309AE983D}"/>
               </a:ext>
             </a:extLst>
           </p:cNvPr>
@@ -16635,7 +16637,7 @@
           <p:cNvPr id="25" name="p03-od-0">
             <a:extLst xmlns:a="http://schemas.openxmlformats.org/drawingml/2006/main">
               <a:ext uri="{FF2B5EF4-FFF2-40B4-BE49-F238E27FC236}">
-                <a16:creationId xmlns:a16="http://schemas.microsoft.com/office/drawing/2014/main" id="{38FF078F-5F32-41B1-821B-D6E1FA9F5041}"/>
+                <a16:creationId xmlns:a16="http://schemas.microsoft.com/office/drawing/2014/main" id="{A62B51BE-EF5A-4974-8CB0-E48168EC6D97}"/>
               </a:ext>
             </a:extLst>
           </p:cNvPr>
@@ -16690,7 +16692,7 @@
           <p:cNvPr id="26" name="p03-oh-1">
             <a:extLst xmlns:a="http://schemas.openxmlformats.org/drawingml/2006/main">
               <a:ext uri="{FF2B5EF4-FFF2-40B4-BE49-F238E27FC236}">
-                <a16:creationId xmlns:a16="http://schemas.microsoft.com/office/drawing/2014/main" id="{C8D6253C-CA01-46BB-855A-EEECE64D09BD}"/>
+                <a16:creationId xmlns:a16="http://schemas.microsoft.com/office/drawing/2014/main" id="{F3025F36-0CBD-46AE-8B23-82CFA4F85294}"/>
               </a:ext>
             </a:extLst>
           </p:cNvPr>
@@ -16745,7 +16747,7 @@
           <p:cNvPr id="27" name="p03-od-1">
             <a:extLst xmlns:a="http://schemas.openxmlformats.org/drawingml/2006/main">
               <a:ext uri="{FF2B5EF4-FFF2-40B4-BE49-F238E27FC236}">
-                <a16:creationId xmlns:a16="http://schemas.microsoft.com/office/drawing/2014/main" id="{8004203D-2030-4049-9F33-91502865854F}"/>
+                <a16:creationId xmlns:a16="http://schemas.microsoft.com/office/drawing/2014/main" id="{49C8DFDA-DEE1-48F6-B55A-3A7F556E7502}"/>
               </a:ext>
             </a:extLst>
           </p:cNvPr>
@@ -16800,7 +16802,7 @@
           <p:cNvPr id="28" name="p03-oh-2">
             <a:extLst xmlns:a="http://schemas.openxmlformats.org/drawingml/2006/main">
               <a:ext uri="{FF2B5EF4-FFF2-40B4-BE49-F238E27FC236}">
-                <a16:creationId xmlns:a16="http://schemas.microsoft.com/office/drawing/2014/main" id="{0328E74C-BBA9-49FA-BBCF-A4102E76FDB9}"/>
+                <a16:creationId xmlns:a16="http://schemas.microsoft.com/office/drawing/2014/main" id="{786FEAA8-D764-47CA-BFD0-BD511F13C4AF}"/>
               </a:ext>
             </a:extLst>
           </p:cNvPr>
@@ -16855,7 +16857,7 @@
           <p:cNvPr id="29" name="p03-od-2">
             <a:extLst xmlns:a="http://schemas.openxmlformats.org/drawingml/2006/main">
               <a:ext uri="{FF2B5EF4-FFF2-40B4-BE49-F238E27FC236}">
-                <a16:creationId xmlns:a16="http://schemas.microsoft.com/office/drawing/2014/main" id="{2239C63A-21B9-481C-9BE9-882EC450610D}"/>
+                <a16:creationId xmlns:a16="http://schemas.microsoft.com/office/drawing/2014/main" id="{3E809DD1-795A-4F22-8A67-7D5ADE332270}"/>
               </a:ext>
             </a:extLst>
           </p:cNvPr>
@@ -16910,7 +16912,7 @@
           <p:cNvPr id="30" name="p03-bottom">
             <a:extLst xmlns:a="http://schemas.openxmlformats.org/drawingml/2006/main">
               <a:ext uri="{FF2B5EF4-FFF2-40B4-BE49-F238E27FC236}">
-                <a16:creationId xmlns:a16="http://schemas.microsoft.com/office/drawing/2014/main" id="{A766F285-2E52-4A98-A73C-E6FFE1A54409}"/>
+                <a16:creationId xmlns:a16="http://schemas.microsoft.com/office/drawing/2014/main" id="{99EEEEA3-1E30-4220-92F7-1FC9DDF5454D}"/>
               </a:ext>
             </a:extLst>
           </p:cNvPr>
@@ -17057,7 +17059,7 @@
           <p:cNvPr id="6" name="p04-link-0">
             <a:extLst xmlns:a="http://schemas.openxmlformats.org/drawingml/2006/main">
               <a:ext uri="{FF2B5EF4-FFF2-40B4-BE49-F238E27FC236}">
-                <a16:creationId xmlns:a16="http://schemas.microsoft.com/office/drawing/2014/main" id="{DC6D8DE4-63E2-4518-A631-A63562F5121B}"/>
+                <a16:creationId xmlns:a16="http://schemas.microsoft.com/office/drawing/2014/main" id="{B5E02C4A-DD77-45B3-ABEA-FA96859AAFF0}"/>
               </a:ext>
             </a:extLst>
           </p:cNvPr>
@@ -17088,7 +17090,7 @@
           <p:cNvPr id="7" name="p04-link-1">
             <a:extLst xmlns:a="http://schemas.openxmlformats.org/drawingml/2006/main">
               <a:ext uri="{FF2B5EF4-FFF2-40B4-BE49-F238E27FC236}">
-                <a16:creationId xmlns:a16="http://schemas.microsoft.com/office/drawing/2014/main" id="{A58446CB-6BF7-4A87-8891-9486FF5363F1}"/>
+                <a16:creationId xmlns:a16="http://schemas.microsoft.com/office/drawing/2014/main" id="{1A432F8B-5C01-480D-9B22-026C696178F9}"/>
               </a:ext>
             </a:extLst>
           </p:cNvPr>
@@ -17119,7 +17121,7 @@
           <p:cNvPr id="8" name="p04-link-2">
             <a:extLst xmlns:a="http://schemas.openxmlformats.org/drawingml/2006/main">
               <a:ext uri="{FF2B5EF4-FFF2-40B4-BE49-F238E27FC236}">
-                <a16:creationId xmlns:a16="http://schemas.microsoft.com/office/drawing/2014/main" id="{24FD0662-1ADA-482C-9FF2-91F83B9C41F1}"/>
+                <a16:creationId xmlns:a16="http://schemas.microsoft.com/office/drawing/2014/main" id="{E0DC1AF7-0253-41E3-8A17-3FB704CD222A}"/>
               </a:ext>
             </a:extLst>
           </p:cNvPr>
@@ -17150,7 +17152,7 @@
           <p:cNvPr id="9" name="p04-link-3">
             <a:extLst xmlns:a="http://schemas.openxmlformats.org/drawingml/2006/main">
               <a:ext uri="{FF2B5EF4-FFF2-40B4-BE49-F238E27FC236}">
-                <a16:creationId xmlns:a16="http://schemas.microsoft.com/office/drawing/2014/main" id="{73E573A9-5BDD-4BD4-B7B3-DDBB02F19911}"/>
+                <a16:creationId xmlns:a16="http://schemas.microsoft.com/office/drawing/2014/main" id="{6CB71C72-35DF-4A6D-8610-41277E26E9B4}"/>
               </a:ext>
             </a:extLst>
           </p:cNvPr>
@@ -17181,7 +17183,7 @@
           <p:cNvPr id="10" name="p04-n-0">
             <a:extLst xmlns:a="http://schemas.openxmlformats.org/drawingml/2006/main">
               <a:ext uri="{FF2B5EF4-FFF2-40B4-BE49-F238E27FC236}">
-                <a16:creationId xmlns:a16="http://schemas.microsoft.com/office/drawing/2014/main" id="{428A25F7-7158-4CF8-9DA0-9C2856C7F089}"/>
+                <a16:creationId xmlns:a16="http://schemas.microsoft.com/office/drawing/2014/main" id="{7E9821A1-4DA8-4212-9413-0DA848051185}"/>
               </a:ext>
             </a:extLst>
           </p:cNvPr>
@@ -17238,7 +17240,7 @@
           <p:cNvPr id="11" name="p04-step-0">
             <a:extLst xmlns:a="http://schemas.openxmlformats.org/drawingml/2006/main">
               <a:ext uri="{FF2B5EF4-FFF2-40B4-BE49-F238E27FC236}">
-                <a16:creationId xmlns:a16="http://schemas.microsoft.com/office/drawing/2014/main" id="{E0080614-673E-4CAC-A2F7-2FA79CBB5CF9}"/>
+                <a16:creationId xmlns:a16="http://schemas.microsoft.com/office/drawing/2014/main" id="{5F8B1022-6D36-456B-9D13-D67868A2F2F0}"/>
               </a:ext>
             </a:extLst>
           </p:cNvPr>
@@ -17325,7 +17327,7 @@
           <p:cNvPr id="12" name="p04-n-1">
             <a:extLst xmlns:a="http://schemas.openxmlformats.org/drawingml/2006/main">
               <a:ext uri="{FF2B5EF4-FFF2-40B4-BE49-F238E27FC236}">
-                <a16:creationId xmlns:a16="http://schemas.microsoft.com/office/drawing/2014/main" id="{AF7E66B0-1651-41B1-A09A-904F34E191EA}"/>
+                <a16:creationId xmlns:a16="http://schemas.microsoft.com/office/drawing/2014/main" id="{B02727C2-BA8A-42FB-AC6E-2E0250691A55}"/>
               </a:ext>
             </a:extLst>
           </p:cNvPr>
@@ -17382,7 +17384,7 @@
           <p:cNvPr id="13" name="p04-step-1">
             <a:extLst xmlns:a="http://schemas.openxmlformats.org/drawingml/2006/main">
               <a:ext uri="{FF2B5EF4-FFF2-40B4-BE49-F238E27FC236}">
-                <a16:creationId xmlns:a16="http://schemas.microsoft.com/office/drawing/2014/main" id="{AB6E38C4-0695-4160-B599-3D5D28125C3F}"/>
+                <a16:creationId xmlns:a16="http://schemas.microsoft.com/office/drawing/2014/main" id="{CF3821AE-FB2F-4AA6-A9C4-EE5EBB72A8D7}"/>
               </a:ext>
             </a:extLst>
           </p:cNvPr>
@@ -17469,7 +17471,7 @@
           <p:cNvPr id="14" name="p04-n-2">
             <a:extLst xmlns:a="http://schemas.openxmlformats.org/drawingml/2006/main">
               <a:ext uri="{FF2B5EF4-FFF2-40B4-BE49-F238E27FC236}">
-                <a16:creationId xmlns:a16="http://schemas.microsoft.com/office/drawing/2014/main" id="{71881882-FC0E-4B97-9FF9-3012AB17AC00}"/>
+                <a16:creationId xmlns:a16="http://schemas.microsoft.com/office/drawing/2014/main" id="{A71A5C56-ED4E-4123-9EE7-C9579987AEAE}"/>
               </a:ext>
             </a:extLst>
           </p:cNvPr>
@@ -17526,7 +17528,7 @@
           <p:cNvPr id="15" name="p04-step-2">
             <a:extLst xmlns:a="http://schemas.openxmlformats.org/drawingml/2006/main">
               <a:ext uri="{FF2B5EF4-FFF2-40B4-BE49-F238E27FC236}">
-                <a16:creationId xmlns:a16="http://schemas.microsoft.com/office/drawing/2014/main" id="{F6A8AB9D-FC79-4DB5-A156-AFB058EE3E4E}"/>
+                <a16:creationId xmlns:a16="http://schemas.microsoft.com/office/drawing/2014/main" id="{D4D4ACDB-D70D-4E06-93D4-EABFB11D91AD}"/>
               </a:ext>
             </a:extLst>
           </p:cNvPr>
@@ -17613,7 +17615,7 @@
           <p:cNvPr id="16" name="p04-n-3">
             <a:extLst xmlns:a="http://schemas.openxmlformats.org/drawingml/2006/main">
               <a:ext uri="{FF2B5EF4-FFF2-40B4-BE49-F238E27FC236}">
-                <a16:creationId xmlns:a16="http://schemas.microsoft.com/office/drawing/2014/main" id="{1403977A-0C9C-4338-8DD7-454F88AD54FD}"/>
+                <a16:creationId xmlns:a16="http://schemas.microsoft.com/office/drawing/2014/main" id="{C0230266-923D-42E1-9B54-5C927A22B23B}"/>
               </a:ext>
             </a:extLst>
           </p:cNvPr>
@@ -17670,7 +17672,7 @@
           <p:cNvPr id="17" name="p04-step-3">
             <a:extLst xmlns:a="http://schemas.openxmlformats.org/drawingml/2006/main">
               <a:ext uri="{FF2B5EF4-FFF2-40B4-BE49-F238E27FC236}">
-                <a16:creationId xmlns:a16="http://schemas.microsoft.com/office/drawing/2014/main" id="{A265F8F8-845F-492F-B05E-9A238B0A3C0D}"/>
+                <a16:creationId xmlns:a16="http://schemas.microsoft.com/office/drawing/2014/main" id="{0753AE7C-0F13-4219-BBF6-EA53AF741A75}"/>
               </a:ext>
             </a:extLst>
           </p:cNvPr>
@@ -17757,7 +17759,7 @@
           <p:cNvPr id="18" name="p04-n-4">
             <a:extLst xmlns:a="http://schemas.openxmlformats.org/drawingml/2006/main">
               <a:ext uri="{FF2B5EF4-FFF2-40B4-BE49-F238E27FC236}">
-                <a16:creationId xmlns:a16="http://schemas.microsoft.com/office/drawing/2014/main" id="{48A66891-7ADA-4FD2-8401-4BF32410B722}"/>
+                <a16:creationId xmlns:a16="http://schemas.microsoft.com/office/drawing/2014/main" id="{E27CB319-2379-4F0E-94A5-CAA9660D5779}"/>
               </a:ext>
             </a:extLst>
           </p:cNvPr>
@@ -17814,7 +17816,7 @@
           <p:cNvPr id="19" name="p04-step-4">
             <a:extLst xmlns:a="http://schemas.openxmlformats.org/drawingml/2006/main">
               <a:ext uri="{FF2B5EF4-FFF2-40B4-BE49-F238E27FC236}">
-                <a16:creationId xmlns:a16="http://schemas.microsoft.com/office/drawing/2014/main" id="{083517C7-AEFE-46A3-A88F-8082F30AEF3E}"/>
+                <a16:creationId xmlns:a16="http://schemas.microsoft.com/office/drawing/2014/main" id="{8B84D225-439E-4E74-86FC-D9603017BC4A}"/>
               </a:ext>
             </a:extLst>
           </p:cNvPr>
@@ -17901,7 +17903,7 @@
           <p:cNvPr id="20" name="p04-return">
             <a:extLst xmlns:a="http://schemas.openxmlformats.org/drawingml/2006/main">
               <a:ext uri="{FF2B5EF4-FFF2-40B4-BE49-F238E27FC236}">
-                <a16:creationId xmlns:a16="http://schemas.microsoft.com/office/drawing/2014/main" id="{30C16B73-D895-4BB5-BC5E-50AFB62ED86F}"/>
+                <a16:creationId xmlns:a16="http://schemas.microsoft.com/office/drawing/2014/main" id="{DF64DA6F-6927-4A2D-8278-31324696862B}"/>
               </a:ext>
             </a:extLst>
           </p:cNvPr>
@@ -17932,7 +17934,7 @@
           <p:cNvPr id="21" name="p04-return-label">
             <a:extLst xmlns:a="http://schemas.openxmlformats.org/drawingml/2006/main">
               <a:ext uri="{FF2B5EF4-FFF2-40B4-BE49-F238E27FC236}">
-                <a16:creationId xmlns:a16="http://schemas.microsoft.com/office/drawing/2014/main" id="{CB5D8CDC-5052-4378-A1BD-3BB6330120B4}"/>
+                <a16:creationId xmlns:a16="http://schemas.microsoft.com/office/drawing/2014/main" id="{1CCA212A-1A80-40FA-B8BD-AE7A65D619DA}"/>
               </a:ext>
             </a:extLst>
           </p:cNvPr>
@@ -17989,7 +17991,7 @@
           <p:cNvPr id="22" name="p04-c-0">
             <a:extLst xmlns:a="http://schemas.openxmlformats.org/drawingml/2006/main">
               <a:ext uri="{FF2B5EF4-FFF2-40B4-BE49-F238E27FC236}">
-                <a16:creationId xmlns:a16="http://schemas.microsoft.com/office/drawing/2014/main" id="{789CEA18-550E-4B62-8EA9-AECF211CAB40}"/>
+                <a16:creationId xmlns:a16="http://schemas.microsoft.com/office/drawing/2014/main" id="{E5C6C066-08AD-48C5-9C37-E572D9715922}"/>
               </a:ext>
             </a:extLst>
           </p:cNvPr>
@@ -18044,7 +18046,7 @@
           <p:cNvPr id="23" name="p04-c-1">
             <a:extLst xmlns:a="http://schemas.openxmlformats.org/drawingml/2006/main">
               <a:ext uri="{FF2B5EF4-FFF2-40B4-BE49-F238E27FC236}">
-                <a16:creationId xmlns:a16="http://schemas.microsoft.com/office/drawing/2014/main" id="{85D34671-83F3-4A69-B0AB-D9CAC4B9C7B9}"/>
+                <a16:creationId xmlns:a16="http://schemas.microsoft.com/office/drawing/2014/main" id="{4B694A47-A21A-43EE-91E8-E3EFD907B9DF}"/>
               </a:ext>
             </a:extLst>
           </p:cNvPr>
@@ -18099,7 +18101,7 @@
           <p:cNvPr id="24" name="p04-c-2">
             <a:extLst xmlns:a="http://schemas.openxmlformats.org/drawingml/2006/main">
               <a:ext uri="{FF2B5EF4-FFF2-40B4-BE49-F238E27FC236}">
-                <a16:creationId xmlns:a16="http://schemas.microsoft.com/office/drawing/2014/main" id="{6808FE89-BF89-42A9-AE86-34B79B072B1D}"/>
+                <a16:creationId xmlns:a16="http://schemas.microsoft.com/office/drawing/2014/main" id="{8CBDB6F7-E23D-4941-8EEF-C863AE768155}"/>
               </a:ext>
             </a:extLst>
           </p:cNvPr>
@@ -18154,7 +18156,7 @@
           <p:cNvPr id="25" name="p04-bottom">
             <a:extLst xmlns:a="http://schemas.openxmlformats.org/drawingml/2006/main">
               <a:ext uri="{FF2B5EF4-FFF2-40B4-BE49-F238E27FC236}">
-                <a16:creationId xmlns:a16="http://schemas.microsoft.com/office/drawing/2014/main" id="{4D51DAB8-561C-47B3-BB5D-4FE02B046DC6}"/>
+                <a16:creationId xmlns:a16="http://schemas.microsoft.com/office/drawing/2014/main" id="{00F5E797-27A7-4C6D-8F11-2C02DA0B75F8}"/>
               </a:ext>
             </a:extLst>
           </p:cNvPr>
@@ -18301,7 +18303,7 @@
           <p:cNvPr id="6" name="p05-left-h">
             <a:extLst xmlns:a="http://schemas.openxmlformats.org/drawingml/2006/main">
               <a:ext uri="{FF2B5EF4-FFF2-40B4-BE49-F238E27FC236}">
-                <a16:creationId xmlns:a16="http://schemas.microsoft.com/office/drawing/2014/main" id="{124F0D16-BC4A-4466-AF93-2193EFFE79F6}"/>
+                <a16:creationId xmlns:a16="http://schemas.microsoft.com/office/drawing/2014/main" id="{57923330-74F2-4119-8D38-DDB3886A588E}"/>
               </a:ext>
             </a:extLst>
           </p:cNvPr>
@@ -18356,7 +18358,7 @@
           <p:cNvPr id="7" name="p05-l-0">
             <a:extLst xmlns:a="http://schemas.openxmlformats.org/drawingml/2006/main">
               <a:ext uri="{FF2B5EF4-FFF2-40B4-BE49-F238E27FC236}">
-                <a16:creationId xmlns:a16="http://schemas.microsoft.com/office/drawing/2014/main" id="{C8A941AD-D4B5-413E-80C0-3C68773746F6}"/>
+                <a16:creationId xmlns:a16="http://schemas.microsoft.com/office/drawing/2014/main" id="{C6FBE794-44B8-4CD3-B4C5-E710F0C6A83B}"/>
               </a:ext>
             </a:extLst>
           </p:cNvPr>
@@ -18411,7 +18413,7 @@
           <p:cNvPr id="8" name="p05-l-1">
             <a:extLst xmlns:a="http://schemas.openxmlformats.org/drawingml/2006/main">
               <a:ext uri="{FF2B5EF4-FFF2-40B4-BE49-F238E27FC236}">
-                <a16:creationId xmlns:a16="http://schemas.microsoft.com/office/drawing/2014/main" id="{BC1B23E5-BEDD-4A6A-A6C2-AC3A755F0346}"/>
+                <a16:creationId xmlns:a16="http://schemas.microsoft.com/office/drawing/2014/main" id="{DE39430C-AB00-4790-BC7F-48C4ECAF07A9}"/>
               </a:ext>
             </a:extLst>
           </p:cNvPr>
@@ -18466,7 +18468,7 @@
           <p:cNvPr id="9" name="p05-l-2">
             <a:extLst xmlns:a="http://schemas.openxmlformats.org/drawingml/2006/main">
               <a:ext uri="{FF2B5EF4-FFF2-40B4-BE49-F238E27FC236}">
-                <a16:creationId xmlns:a16="http://schemas.microsoft.com/office/drawing/2014/main" id="{CD0B502A-36D1-4B9B-AB37-26550B3A02F7}"/>
+                <a16:creationId xmlns:a16="http://schemas.microsoft.com/office/drawing/2014/main" id="{A70A5825-4DC0-46A5-A895-40317FE7B23C}"/>
               </a:ext>
             </a:extLst>
           </p:cNvPr>
@@ -18521,7 +18523,7 @@
           <p:cNvPr id="10" name="p05-l-3">
             <a:extLst xmlns:a="http://schemas.openxmlformats.org/drawingml/2006/main">
               <a:ext uri="{FF2B5EF4-FFF2-40B4-BE49-F238E27FC236}">
-                <a16:creationId xmlns:a16="http://schemas.microsoft.com/office/drawing/2014/main" id="{24C21412-6CF7-4D7E-AAFD-B88EEA4D9D00}"/>
+                <a16:creationId xmlns:a16="http://schemas.microsoft.com/office/drawing/2014/main" id="{0486B2C0-CE30-4842-9002-14BF662AC0EB}"/>
               </a:ext>
             </a:extLst>
           </p:cNvPr>
@@ -18576,7 +18578,7 @@
           <p:cNvPr id="11" name="p05-right-h">
             <a:extLst xmlns:a="http://schemas.openxmlformats.org/drawingml/2006/main">
               <a:ext uri="{FF2B5EF4-FFF2-40B4-BE49-F238E27FC236}">
-                <a16:creationId xmlns:a16="http://schemas.microsoft.com/office/drawing/2014/main" id="{512A215B-127E-4FB5-8C39-BE326FAF1EE0}"/>
+                <a16:creationId xmlns:a16="http://schemas.microsoft.com/office/drawing/2014/main" id="{56B850BB-17EF-48EA-8872-F67A4AC35A35}"/>
               </a:ext>
             </a:extLst>
           </p:cNvPr>
@@ -18631,7 +18633,7 @@
           <p:cNvPr id="12" name="p05-r-0">
             <a:extLst xmlns:a="http://schemas.openxmlformats.org/drawingml/2006/main">
               <a:ext uri="{FF2B5EF4-FFF2-40B4-BE49-F238E27FC236}">
-                <a16:creationId xmlns:a16="http://schemas.microsoft.com/office/drawing/2014/main" id="{14CD6A76-F532-47E6-BD84-8AA4857DFD14}"/>
+                <a16:creationId xmlns:a16="http://schemas.microsoft.com/office/drawing/2014/main" id="{362641B2-F37C-42D5-9823-47AFC8F1338F}"/>
               </a:ext>
             </a:extLst>
           </p:cNvPr>
@@ -18686,7 +18688,7 @@
           <p:cNvPr id="13" name="p05-r-1">
             <a:extLst xmlns:a="http://schemas.openxmlformats.org/drawingml/2006/main">
               <a:ext uri="{FF2B5EF4-FFF2-40B4-BE49-F238E27FC236}">
-                <a16:creationId xmlns:a16="http://schemas.microsoft.com/office/drawing/2014/main" id="{8163F74A-DF2A-4A26-977A-5B2D163EF868}"/>
+                <a16:creationId xmlns:a16="http://schemas.microsoft.com/office/drawing/2014/main" id="{BD64EB79-ABD1-43E4-BF74-277AB486221D}"/>
               </a:ext>
             </a:extLst>
           </p:cNvPr>
@@ -18741,7 +18743,7 @@
           <p:cNvPr id="14" name="p05-r-2">
             <a:extLst xmlns:a="http://schemas.openxmlformats.org/drawingml/2006/main">
               <a:ext uri="{FF2B5EF4-FFF2-40B4-BE49-F238E27FC236}">
-                <a16:creationId xmlns:a16="http://schemas.microsoft.com/office/drawing/2014/main" id="{4E8C8FD0-732C-4A00-BC79-710864EF3C65}"/>
+                <a16:creationId xmlns:a16="http://schemas.microsoft.com/office/drawing/2014/main" id="{F655D45A-56B8-4500-BDDA-585A1A3F4E2F}"/>
               </a:ext>
             </a:extLst>
           </p:cNvPr>
@@ -18796,7 +18798,7 @@
           <p:cNvPr id="15" name="p05-r-3">
             <a:extLst xmlns:a="http://schemas.openxmlformats.org/drawingml/2006/main">
               <a:ext uri="{FF2B5EF4-FFF2-40B4-BE49-F238E27FC236}">
-                <a16:creationId xmlns:a16="http://schemas.microsoft.com/office/drawing/2014/main" id="{CA87FA6A-42E4-44DD-BD22-A5AB3A96EBDC}"/>
+                <a16:creationId xmlns:a16="http://schemas.microsoft.com/office/drawing/2014/main" id="{24857DEE-F351-4956-9038-DF554959E586}"/>
               </a:ext>
             </a:extLst>
           </p:cNvPr>
@@ -18851,7 +18853,7 @@
           <p:cNvPr id="16" name="p05-bottom">
             <a:extLst xmlns:a="http://schemas.openxmlformats.org/drawingml/2006/main">
               <a:ext uri="{FF2B5EF4-FFF2-40B4-BE49-F238E27FC236}">
-                <a16:creationId xmlns:a16="http://schemas.microsoft.com/office/drawing/2014/main" id="{A604686A-C5EB-4559-9604-C130F255C261}"/>
+                <a16:creationId xmlns:a16="http://schemas.microsoft.com/office/drawing/2014/main" id="{CC071B7A-2133-4E2E-BB1A-07E1E030DCDD}"/>
               </a:ext>
             </a:extLst>
           </p:cNvPr>
@@ -19002,7 +19004,7 @@
           <p:cNvPr id="6" name="p06-label">
             <a:extLst xmlns:a="http://schemas.openxmlformats.org/drawingml/2006/main">
               <a:ext uri="{FF2B5EF4-FFF2-40B4-BE49-F238E27FC236}">
-                <a16:creationId xmlns:a16="http://schemas.microsoft.com/office/drawing/2014/main" id="{D880E67A-F875-461F-9CEC-2F258659DBCF}"/>
+                <a16:creationId xmlns:a16="http://schemas.microsoft.com/office/drawing/2014/main" id="{7F7700AA-2187-471D-BE04-6FC8DF93C06F}"/>
               </a:ext>
             </a:extLst>
           </p:cNvPr>
@@ -19057,7 +19059,7 @@
           <p:cNvPr id="7" name="p06-f-0">
             <a:extLst xmlns:a="http://schemas.openxmlformats.org/drawingml/2006/main">
               <a:ext uri="{FF2B5EF4-FFF2-40B4-BE49-F238E27FC236}">
-                <a16:creationId xmlns:a16="http://schemas.microsoft.com/office/drawing/2014/main" id="{85033378-1FE0-4D69-90C8-2A03BC26C029}"/>
+                <a16:creationId xmlns:a16="http://schemas.microsoft.com/office/drawing/2014/main" id="{5A944CE0-34BE-4030-B683-D042446FA9D5}"/>
               </a:ext>
             </a:extLst>
           </p:cNvPr>
@@ -19112,7 +19114,7 @@
           <p:cNvPr id="8" name="p06-v-0">
             <a:extLst xmlns:a="http://schemas.openxmlformats.org/drawingml/2006/main">
               <a:ext uri="{FF2B5EF4-FFF2-40B4-BE49-F238E27FC236}">
-                <a16:creationId xmlns:a16="http://schemas.microsoft.com/office/drawing/2014/main" id="{4DF7CAE9-9BFA-40BE-9A4F-DB9833D99CA7}"/>
+                <a16:creationId xmlns:a16="http://schemas.microsoft.com/office/drawing/2014/main" id="{C862AAE0-8A82-4C7A-B266-4C1B75F9527B}"/>
               </a:ext>
             </a:extLst>
           </p:cNvPr>
@@ -19167,7 +19169,7 @@
           <p:cNvPr id="9" name="p06-f-1">
             <a:extLst xmlns:a="http://schemas.openxmlformats.org/drawingml/2006/main">
               <a:ext uri="{FF2B5EF4-FFF2-40B4-BE49-F238E27FC236}">
-                <a16:creationId xmlns:a16="http://schemas.microsoft.com/office/drawing/2014/main" id="{7DCBAB6A-A478-4AA7-B468-D839ABE5C445}"/>
+                <a16:creationId xmlns:a16="http://schemas.microsoft.com/office/drawing/2014/main" id="{A5EC330B-273E-42AD-96A6-918CDBC01839}"/>
               </a:ext>
             </a:extLst>
           </p:cNvPr>
@@ -19222,7 +19224,7 @@
           <p:cNvPr id="10" name="p06-v-1">
             <a:extLst xmlns:a="http://schemas.openxmlformats.org/drawingml/2006/main">
               <a:ext uri="{FF2B5EF4-FFF2-40B4-BE49-F238E27FC236}">
-                <a16:creationId xmlns:a16="http://schemas.microsoft.com/office/drawing/2014/main" id="{F521168B-DE93-4387-945A-D01C824554FD}"/>
+                <a16:creationId xmlns:a16="http://schemas.microsoft.com/office/drawing/2014/main" id="{370106E8-B2FC-4061-A8A0-9CBE511EE13E}"/>
               </a:ext>
             </a:extLst>
           </p:cNvPr>
@@ -19277,7 +19279,7 @@
           <p:cNvPr id="11" name="p06-f-2">
             <a:extLst xmlns:a="http://schemas.openxmlformats.org/drawingml/2006/main">
               <a:ext uri="{FF2B5EF4-FFF2-40B4-BE49-F238E27FC236}">
-                <a16:creationId xmlns:a16="http://schemas.microsoft.com/office/drawing/2014/main" id="{C7DC9EC1-7D50-4E66-A5A5-3D958CAF7433}"/>
+                <a16:creationId xmlns:a16="http://schemas.microsoft.com/office/drawing/2014/main" id="{4769965F-88F7-4D68-83EC-BCD4882C0546}"/>
               </a:ext>
             </a:extLst>
           </p:cNvPr>
@@ -19332,7 +19334,7 @@
           <p:cNvPr id="12" name="p06-v-2">
             <a:extLst xmlns:a="http://schemas.openxmlformats.org/drawingml/2006/main">
               <a:ext uri="{FF2B5EF4-FFF2-40B4-BE49-F238E27FC236}">
-                <a16:creationId xmlns:a16="http://schemas.microsoft.com/office/drawing/2014/main" id="{836A3BF0-A030-4FD3-8760-9CA831F0D649}"/>
+                <a16:creationId xmlns:a16="http://schemas.microsoft.com/office/drawing/2014/main" id="{A644FDDA-2BF2-41C4-92B6-946A49483770}"/>
               </a:ext>
             </a:extLst>
           </p:cNvPr>
@@ -19387,7 +19389,7 @@
           <p:cNvPr id="13" name="p06-f-3">
             <a:extLst xmlns:a="http://schemas.openxmlformats.org/drawingml/2006/main">
               <a:ext uri="{FF2B5EF4-FFF2-40B4-BE49-F238E27FC236}">
-                <a16:creationId xmlns:a16="http://schemas.microsoft.com/office/drawing/2014/main" id="{5191D8BC-105A-448C-BA51-60DDFB9184A0}"/>
+                <a16:creationId xmlns:a16="http://schemas.microsoft.com/office/drawing/2014/main" id="{37141B0D-E3B2-4816-8ACD-7C4041A46F4E}"/>
               </a:ext>
             </a:extLst>
           </p:cNvPr>
@@ -19442,7 +19444,7 @@
           <p:cNvPr id="14" name="p06-v-3">
             <a:extLst xmlns:a="http://schemas.openxmlformats.org/drawingml/2006/main">
               <a:ext uri="{FF2B5EF4-FFF2-40B4-BE49-F238E27FC236}">
-                <a16:creationId xmlns:a16="http://schemas.microsoft.com/office/drawing/2014/main" id="{07FC0EB4-0088-445E-B42C-D6B976F0D009}"/>
+                <a16:creationId xmlns:a16="http://schemas.microsoft.com/office/drawing/2014/main" id="{45CEC07A-471B-4CC0-92B1-C15F44000551}"/>
               </a:ext>
             </a:extLst>
           </p:cNvPr>
@@ -19497,7 +19499,7 @@
           <p:cNvPr id="15" name="p06-f-4">
             <a:extLst xmlns:a="http://schemas.openxmlformats.org/drawingml/2006/main">
               <a:ext uri="{FF2B5EF4-FFF2-40B4-BE49-F238E27FC236}">
-                <a16:creationId xmlns:a16="http://schemas.microsoft.com/office/drawing/2014/main" id="{21DA9428-3D0A-4791-81F3-9C4F482F89FC}"/>
+                <a16:creationId xmlns:a16="http://schemas.microsoft.com/office/drawing/2014/main" id="{3596A3D6-3CC7-4318-973D-0E1AE8AB8E3D}"/>
               </a:ext>
             </a:extLst>
           </p:cNvPr>
@@ -19552,7 +19554,7 @@
           <p:cNvPr id="16" name="p06-v-4">
             <a:extLst xmlns:a="http://schemas.openxmlformats.org/drawingml/2006/main">
               <a:ext uri="{FF2B5EF4-FFF2-40B4-BE49-F238E27FC236}">
-                <a16:creationId xmlns:a16="http://schemas.microsoft.com/office/drawing/2014/main" id="{B2762F5A-D6DC-4A88-A801-106AE1208AA3}"/>
+                <a16:creationId xmlns:a16="http://schemas.microsoft.com/office/drawing/2014/main" id="{238A8157-3337-49D9-B2F4-A649E47D3877}"/>
               </a:ext>
             </a:extLst>
           </p:cNvPr>
@@ -19607,7 +19609,7 @@
           <p:cNvPr id="17" name="p06-right-h">
             <a:extLst xmlns:a="http://schemas.openxmlformats.org/drawingml/2006/main">
               <a:ext uri="{FF2B5EF4-FFF2-40B4-BE49-F238E27FC236}">
-                <a16:creationId xmlns:a16="http://schemas.microsoft.com/office/drawing/2014/main" id="{CE117E4F-2CD2-4AFD-B903-746E11EFE8FA}"/>
+                <a16:creationId xmlns:a16="http://schemas.microsoft.com/office/drawing/2014/main" id="{EFE51A74-E3BC-429A-A23A-B9BE30EC97D9}"/>
               </a:ext>
             </a:extLst>
           </p:cNvPr>
@@ -19662,7 +19664,7 @@
           <p:cNvPr id="18" name="p06-d-0">
             <a:extLst xmlns:a="http://schemas.openxmlformats.org/drawingml/2006/main">
               <a:ext uri="{FF2B5EF4-FFF2-40B4-BE49-F238E27FC236}">
-                <a16:creationId xmlns:a16="http://schemas.microsoft.com/office/drawing/2014/main" id="{EFF8CAD9-5736-4609-AD59-593D0AC92317}"/>
+                <a16:creationId xmlns:a16="http://schemas.microsoft.com/office/drawing/2014/main" id="{B6685FD2-A801-4D52-BFB1-9D1AB8A6B6EB}"/>
               </a:ext>
             </a:extLst>
           </p:cNvPr>
@@ -19717,7 +19719,7 @@
           <p:cNvPr id="19" name="p06-d-1">
             <a:extLst xmlns:a="http://schemas.openxmlformats.org/drawingml/2006/main">
               <a:ext uri="{FF2B5EF4-FFF2-40B4-BE49-F238E27FC236}">
-                <a16:creationId xmlns:a16="http://schemas.microsoft.com/office/drawing/2014/main" id="{A702FF57-A06E-4FB8-A3CD-1FD86C275972}"/>
+                <a16:creationId xmlns:a16="http://schemas.microsoft.com/office/drawing/2014/main" id="{7D533326-3530-411E-AAB9-0BF8EC83DBA5}"/>
               </a:ext>
             </a:extLst>
           </p:cNvPr>
@@ -19772,7 +19774,7 @@
           <p:cNvPr id="20" name="p06-d-2">
             <a:extLst xmlns:a="http://schemas.openxmlformats.org/drawingml/2006/main">
               <a:ext uri="{FF2B5EF4-FFF2-40B4-BE49-F238E27FC236}">
-                <a16:creationId xmlns:a16="http://schemas.microsoft.com/office/drawing/2014/main" id="{DC87FFB2-0452-433F-BC82-ABB8F9243AA2}"/>
+                <a16:creationId xmlns:a16="http://schemas.microsoft.com/office/drawing/2014/main" id="{5C86BBC7-D94C-4AF2-928D-A1C10E0FD255}"/>
               </a:ext>
             </a:extLst>
           </p:cNvPr>
@@ -19827,7 +19829,7 @@
           <p:cNvPr id="21" name="p06-check">
             <a:extLst xmlns:a="http://schemas.openxmlformats.org/drawingml/2006/main">
               <a:ext uri="{FF2B5EF4-FFF2-40B4-BE49-F238E27FC236}">
-                <a16:creationId xmlns:a16="http://schemas.microsoft.com/office/drawing/2014/main" id="{1C4BC85F-12D8-4483-B776-C4F4F11872C5}"/>
+                <a16:creationId xmlns:a16="http://schemas.microsoft.com/office/drawing/2014/main" id="{C95E1916-A58B-40E2-B68C-8BEE1ED0CCBA}"/>
               </a:ext>
             </a:extLst>
           </p:cNvPr>
@@ -19984,7 +19986,7 @@
           <p:cNvPr id="6" name="p07-budget-h">
             <a:extLst xmlns:a="http://schemas.openxmlformats.org/drawingml/2006/main">
               <a:ext uri="{FF2B5EF4-FFF2-40B4-BE49-F238E27FC236}">
-                <a16:creationId xmlns:a16="http://schemas.microsoft.com/office/drawing/2014/main" id="{A79D97C3-F514-4AD7-B5AC-7DB332556E73}"/>
+                <a16:creationId xmlns:a16="http://schemas.microsoft.com/office/drawing/2014/main" id="{376A7589-7947-43A3-97B8-9E7005262CDB}"/>
               </a:ext>
             </a:extLst>
           </p:cNvPr>
@@ -20037,7 +20039,7 @@
           <p:cNvPr id="7" name="p07-bh-0">
             <a:extLst xmlns:a="http://schemas.openxmlformats.org/drawingml/2006/main">
               <a:ext uri="{FF2B5EF4-FFF2-40B4-BE49-F238E27FC236}">
-                <a16:creationId xmlns:a16="http://schemas.microsoft.com/office/drawing/2014/main" id="{A2987EAC-9135-47DC-BB40-AC80CD138154}"/>
+                <a16:creationId xmlns:a16="http://schemas.microsoft.com/office/drawing/2014/main" id="{F204F010-9E25-4BE7-AC38-5FFB422A8F61}"/>
               </a:ext>
             </a:extLst>
           </p:cNvPr>
@@ -20094,7 +20096,7 @@
           <p:cNvPr id="8" name="p07-bd-0">
             <a:extLst xmlns:a="http://schemas.openxmlformats.org/drawingml/2006/main">
               <a:ext uri="{FF2B5EF4-FFF2-40B4-BE49-F238E27FC236}">
-                <a16:creationId xmlns:a16="http://schemas.microsoft.com/office/drawing/2014/main" id="{1857A50C-DD6C-4100-8785-74CBEE94C439}"/>
+                <a16:creationId xmlns:a16="http://schemas.microsoft.com/office/drawing/2014/main" id="{08BA9ACF-95C8-48CD-AD4D-838C2B6FA8EF}"/>
               </a:ext>
             </a:extLst>
           </p:cNvPr>
@@ -20149,7 +20151,7 @@
           <p:cNvPr id="9" name="p07-bh-1">
             <a:extLst xmlns:a="http://schemas.openxmlformats.org/drawingml/2006/main">
               <a:ext uri="{FF2B5EF4-FFF2-40B4-BE49-F238E27FC236}">
-                <a16:creationId xmlns:a16="http://schemas.microsoft.com/office/drawing/2014/main" id="{FCC4920D-EDA8-4948-83AD-507BC2F51E9A}"/>
+                <a16:creationId xmlns:a16="http://schemas.microsoft.com/office/drawing/2014/main" id="{E9AA2772-7390-4FB7-B20F-8F4614A042E6}"/>
               </a:ext>
             </a:extLst>
           </p:cNvPr>
@@ -20206,7 +20208,7 @@
           <p:cNvPr id="10" name="p07-bd-1">
             <a:extLst xmlns:a="http://schemas.openxmlformats.org/drawingml/2006/main">
               <a:ext uri="{FF2B5EF4-FFF2-40B4-BE49-F238E27FC236}">
-                <a16:creationId xmlns:a16="http://schemas.microsoft.com/office/drawing/2014/main" id="{66AEBE5B-373F-485F-B655-A581DAF5EE32}"/>
+                <a16:creationId xmlns:a16="http://schemas.microsoft.com/office/drawing/2014/main" id="{8D73B967-3B37-4F47-BB9B-CAEDE005B9C9}"/>
               </a:ext>
             </a:extLst>
           </p:cNvPr>
@@ -20261,7 +20263,7 @@
           <p:cNvPr id="11" name="p07-bh-2">
             <a:extLst xmlns:a="http://schemas.openxmlformats.org/drawingml/2006/main">
               <a:ext uri="{FF2B5EF4-FFF2-40B4-BE49-F238E27FC236}">
-                <a16:creationId xmlns:a16="http://schemas.microsoft.com/office/drawing/2014/main" id="{8438BA15-96A4-4F22-B5E6-25A63E5C129A}"/>
+                <a16:creationId xmlns:a16="http://schemas.microsoft.com/office/drawing/2014/main" id="{A8345969-8004-41F9-96A3-46941E47DB88}"/>
               </a:ext>
             </a:extLst>
           </p:cNvPr>
@@ -20318,7 +20320,7 @@
           <p:cNvPr id="12" name="p07-bd-2">
             <a:extLst xmlns:a="http://schemas.openxmlformats.org/drawingml/2006/main">
               <a:ext uri="{FF2B5EF4-FFF2-40B4-BE49-F238E27FC236}">
-                <a16:creationId xmlns:a16="http://schemas.microsoft.com/office/drawing/2014/main" id="{CDAADC31-5ADC-422C-A06D-D45683B2E357}"/>
+                <a16:creationId xmlns:a16="http://schemas.microsoft.com/office/drawing/2014/main" id="{3054952B-881C-4F6C-B6A8-6AC020A20779}"/>
               </a:ext>
             </a:extLst>
           </p:cNvPr>
@@ -20373,7 +20375,7 @@
           <p:cNvPr id="13" name="p07-bh-3">
             <a:extLst xmlns:a="http://schemas.openxmlformats.org/drawingml/2006/main">
               <a:ext uri="{FF2B5EF4-FFF2-40B4-BE49-F238E27FC236}">
-                <a16:creationId xmlns:a16="http://schemas.microsoft.com/office/drawing/2014/main" id="{93EC1766-5EC4-4488-8675-F4CEA465F311}"/>
+                <a16:creationId xmlns:a16="http://schemas.microsoft.com/office/drawing/2014/main" id="{8C308EE5-3E9F-4FB8-9C4B-5B48159D04AE}"/>
               </a:ext>
             </a:extLst>
           </p:cNvPr>
@@ -20430,7 +20432,7 @@
           <p:cNvPr id="14" name="p07-bd-3">
             <a:extLst xmlns:a="http://schemas.openxmlformats.org/drawingml/2006/main">
               <a:ext uri="{FF2B5EF4-FFF2-40B4-BE49-F238E27FC236}">
-                <a16:creationId xmlns:a16="http://schemas.microsoft.com/office/drawing/2014/main" id="{9464A946-9752-4FC1-9B87-EC750FE0823D}"/>
+                <a16:creationId xmlns:a16="http://schemas.microsoft.com/office/drawing/2014/main" id="{3968B67B-96A0-4967-A4EC-B10B4EFCA14D}"/>
               </a:ext>
             </a:extLst>
           </p:cNvPr>
@@ -20485,7 +20487,7 @@
           <p:cNvPr id="15" name="p07-stop-h">
             <a:extLst xmlns:a="http://schemas.openxmlformats.org/drawingml/2006/main">
               <a:ext uri="{FF2B5EF4-FFF2-40B4-BE49-F238E27FC236}">
-                <a16:creationId xmlns:a16="http://schemas.microsoft.com/office/drawing/2014/main" id="{9AD2055B-9F52-4C8B-B202-E6A48D00DEC1}"/>
+                <a16:creationId xmlns:a16="http://schemas.microsoft.com/office/drawing/2014/main" id="{30CB7EBA-D3D0-4C15-9CF2-8F5FA3E36AC2}"/>
               </a:ext>
             </a:extLst>
           </p:cNvPr>
@@ -20538,7 +20540,7 @@
           <p:cNvPr id="16" name="p07-sh-0">
             <a:extLst xmlns:a="http://schemas.openxmlformats.org/drawingml/2006/main">
               <a:ext uri="{FF2B5EF4-FFF2-40B4-BE49-F238E27FC236}">
-                <a16:creationId xmlns:a16="http://schemas.microsoft.com/office/drawing/2014/main" id="{0110C7B8-992D-4EC7-AEEC-A0C589E4AF2D}"/>
+                <a16:creationId xmlns:a16="http://schemas.microsoft.com/office/drawing/2014/main" id="{064FD537-F7ED-478A-AFEC-C9FA143E8A84}"/>
               </a:ext>
             </a:extLst>
           </p:cNvPr>
@@ -20593,7 +20595,7 @@
           <p:cNvPr id="17" name="p07-sd-0">
             <a:extLst xmlns:a="http://schemas.openxmlformats.org/drawingml/2006/main">
               <a:ext uri="{FF2B5EF4-FFF2-40B4-BE49-F238E27FC236}">
-                <a16:creationId xmlns:a16="http://schemas.microsoft.com/office/drawing/2014/main" id="{0F97A87C-69BC-48F4-A466-EA4B5E3CEF57}"/>
+                <a16:creationId xmlns:a16="http://schemas.microsoft.com/office/drawing/2014/main" id="{D52483A6-ADC7-4B00-B892-6A5B27A84C58}"/>
               </a:ext>
             </a:extLst>
           </p:cNvPr>
@@ -20676,7 +20678,7 @@
           <p:cNvPr id="18" name="p07-sh-1">
             <a:extLst xmlns:a="http://schemas.openxmlformats.org/drawingml/2006/main">
               <a:ext uri="{FF2B5EF4-FFF2-40B4-BE49-F238E27FC236}">
-                <a16:creationId xmlns:a16="http://schemas.microsoft.com/office/drawing/2014/main" id="{A8DCAC85-C091-403E-9D6E-8301C1E43923}"/>
+                <a16:creationId xmlns:a16="http://schemas.microsoft.com/office/drawing/2014/main" id="{30649F8A-5E29-414A-AE75-EC413F0040F7}"/>
               </a:ext>
             </a:extLst>
           </p:cNvPr>
@@ -20731,7 +20733,7 @@
           <p:cNvPr id="19" name="p07-sd-1">
             <a:extLst xmlns:a="http://schemas.openxmlformats.org/drawingml/2006/main">
               <a:ext uri="{FF2B5EF4-FFF2-40B4-BE49-F238E27FC236}">
-                <a16:creationId xmlns:a16="http://schemas.microsoft.com/office/drawing/2014/main" id="{D4DFB090-BCCA-4AEB-9018-8B2B1202496C}"/>
+                <a16:creationId xmlns:a16="http://schemas.microsoft.com/office/drawing/2014/main" id="{E9A9C48C-EDB3-4E5E-B164-3989D928D653}"/>
               </a:ext>
             </a:extLst>
           </p:cNvPr>
@@ -20814,7 +20816,7 @@
           <p:cNvPr id="20" name="p07-sh-2">
             <a:extLst xmlns:a="http://schemas.openxmlformats.org/drawingml/2006/main">
               <a:ext uri="{FF2B5EF4-FFF2-40B4-BE49-F238E27FC236}">
-                <a16:creationId xmlns:a16="http://schemas.microsoft.com/office/drawing/2014/main" id="{E925486C-C222-485F-9275-E6FDBD11F564}"/>
+                <a16:creationId xmlns:a16="http://schemas.microsoft.com/office/drawing/2014/main" id="{D5EE3FEB-6CE4-4722-B6E8-1DA41F17ECEE}"/>
               </a:ext>
             </a:extLst>
           </p:cNvPr>
@@ -20869,7 +20871,7 @@
           <p:cNvPr id="21" name="p07-sd-2">
             <a:extLst xmlns:a="http://schemas.openxmlformats.org/drawingml/2006/main">
               <a:ext uri="{FF2B5EF4-FFF2-40B4-BE49-F238E27FC236}">
-                <a16:creationId xmlns:a16="http://schemas.microsoft.com/office/drawing/2014/main" id="{A56D03F3-A643-4E5A-98D6-3724F9B42057}"/>
+                <a16:creationId xmlns:a16="http://schemas.microsoft.com/office/drawing/2014/main" id="{0B15FD57-778E-4CAC-8B08-B8EA966F8BB8}"/>
               </a:ext>
             </a:extLst>
           </p:cNvPr>
@@ -20952,7 +20954,7 @@
           <p:cNvPr id="22" name="p07-bottom">
             <a:extLst xmlns:a="http://schemas.openxmlformats.org/drawingml/2006/main">
               <a:ext uri="{FF2B5EF4-FFF2-40B4-BE49-F238E27FC236}">
-                <a16:creationId xmlns:a16="http://schemas.microsoft.com/office/drawing/2014/main" id="{6DFE75F4-2F63-43D3-87BC-82F5DF889E65}"/>
+                <a16:creationId xmlns:a16="http://schemas.microsoft.com/office/drawing/2014/main" id="{5C8F0A50-6F36-497A-855E-65836D554E15}"/>
               </a:ext>
             </a:extLst>
           </p:cNvPr>
@@ -21099,7 +21101,7 @@
           <p:cNvPr id="6" name="p08-left-h">
             <a:extLst xmlns:a="http://schemas.openxmlformats.org/drawingml/2006/main">
               <a:ext uri="{FF2B5EF4-FFF2-40B4-BE49-F238E27FC236}">
-                <a16:creationId xmlns:a16="http://schemas.microsoft.com/office/drawing/2014/main" id="{28D6D539-3498-447D-9F01-CEEF4ADDA770}"/>
+                <a16:creationId xmlns:a16="http://schemas.microsoft.com/office/drawing/2014/main" id="{3689E227-D2D0-4F1F-951D-1C5C7EFD247C}"/>
               </a:ext>
             </a:extLst>
           </p:cNvPr>
@@ -21154,7 +21156,7 @@
           <p:cNvPr id="7" name="p08-l-0">
             <a:extLst xmlns:a="http://schemas.openxmlformats.org/drawingml/2006/main">
               <a:ext uri="{FF2B5EF4-FFF2-40B4-BE49-F238E27FC236}">
-                <a16:creationId xmlns:a16="http://schemas.microsoft.com/office/drawing/2014/main" id="{080805E0-37EE-4A74-899C-1037FD2286C7}"/>
+                <a16:creationId xmlns:a16="http://schemas.microsoft.com/office/drawing/2014/main" id="{2507BA25-FEE4-47BB-BA12-C5E1EF3DE904}"/>
               </a:ext>
             </a:extLst>
           </p:cNvPr>
@@ -21209,7 +21211,7 @@
           <p:cNvPr id="8" name="p08-l-1">
             <a:extLst xmlns:a="http://schemas.openxmlformats.org/drawingml/2006/main">
               <a:ext uri="{FF2B5EF4-FFF2-40B4-BE49-F238E27FC236}">
-                <a16:creationId xmlns:a16="http://schemas.microsoft.com/office/drawing/2014/main" id="{7DAE8B1A-8969-4C07-9841-3D7324FFC14D}"/>
+                <a16:creationId xmlns:a16="http://schemas.microsoft.com/office/drawing/2014/main" id="{A55F56A7-8EB1-4025-B840-B715BEB256E9}"/>
               </a:ext>
             </a:extLst>
           </p:cNvPr>
@@ -21264,7 +21266,7 @@
           <p:cNvPr id="9" name="p08-l-2">
             <a:extLst xmlns:a="http://schemas.openxmlformats.org/drawingml/2006/main">
               <a:ext uri="{FF2B5EF4-FFF2-40B4-BE49-F238E27FC236}">
-                <a16:creationId xmlns:a16="http://schemas.microsoft.com/office/drawing/2014/main" id="{559F7D46-6B15-4F59-B3B6-95BD9C05C12A}"/>
+                <a16:creationId xmlns:a16="http://schemas.microsoft.com/office/drawing/2014/main" id="{CCE2D82E-0632-4B17-9728-D30A9F84A0E0}"/>
               </a:ext>
             </a:extLst>
           </p:cNvPr>
@@ -21319,7 +21321,7 @@
           <p:cNvPr id="10" name="p08-l-3">
             <a:extLst xmlns:a="http://schemas.openxmlformats.org/drawingml/2006/main">
               <a:ext uri="{FF2B5EF4-FFF2-40B4-BE49-F238E27FC236}">
-                <a16:creationId xmlns:a16="http://schemas.microsoft.com/office/drawing/2014/main" id="{A2859448-81E0-4821-BBDB-07053E02498D}"/>
+                <a16:creationId xmlns:a16="http://schemas.microsoft.com/office/drawing/2014/main" id="{CADDCB25-5960-460D-98B1-814059E74364}"/>
               </a:ext>
             </a:extLst>
           </p:cNvPr>
@@ -21374,7 +21376,7 @@
           <p:cNvPr id="11" name="p08-right-h">
             <a:extLst xmlns:a="http://schemas.openxmlformats.org/drawingml/2006/main">
               <a:ext uri="{FF2B5EF4-FFF2-40B4-BE49-F238E27FC236}">
-                <a16:creationId xmlns:a16="http://schemas.microsoft.com/office/drawing/2014/main" id="{DDDAEA40-7688-4E3D-AE8D-CA92417CD3F8}"/>
+                <a16:creationId xmlns:a16="http://schemas.microsoft.com/office/drawing/2014/main" id="{EA9303C6-DA12-4AC9-A75C-0BF7B46CF73A}"/>
               </a:ext>
             </a:extLst>
           </p:cNvPr>
@@ -21429,7 +21431,7 @@
           <p:cNvPr id="12" name="p08-r-0">
             <a:extLst xmlns:a="http://schemas.openxmlformats.org/drawingml/2006/main">
               <a:ext uri="{FF2B5EF4-FFF2-40B4-BE49-F238E27FC236}">
-                <a16:creationId xmlns:a16="http://schemas.microsoft.com/office/drawing/2014/main" id="{11AB38E8-E908-45DA-A1AC-490A13ADCA16}"/>
+                <a16:creationId xmlns:a16="http://schemas.microsoft.com/office/drawing/2014/main" id="{1D789B56-DC21-42D3-B1EA-B5B3DE893AB8}"/>
               </a:ext>
             </a:extLst>
           </p:cNvPr>
@@ -21484,7 +21486,7 @@
           <p:cNvPr id="13" name="p08-r-1">
             <a:extLst xmlns:a="http://schemas.openxmlformats.org/drawingml/2006/main">
               <a:ext uri="{FF2B5EF4-FFF2-40B4-BE49-F238E27FC236}">
-                <a16:creationId xmlns:a16="http://schemas.microsoft.com/office/drawing/2014/main" id="{215692F5-16CD-4C6D-837B-31B06D6D4530}"/>
+                <a16:creationId xmlns:a16="http://schemas.microsoft.com/office/drawing/2014/main" id="{AF9F3E74-78EA-41DB-99A6-7303B8F82A9D}"/>
               </a:ext>
             </a:extLst>
           </p:cNvPr>
@@ -21539,7 +21541,7 @@
           <p:cNvPr id="14" name="p08-r-2">
             <a:extLst xmlns:a="http://schemas.openxmlformats.org/drawingml/2006/main">
               <a:ext uri="{FF2B5EF4-FFF2-40B4-BE49-F238E27FC236}">
-                <a16:creationId xmlns:a16="http://schemas.microsoft.com/office/drawing/2014/main" id="{EC734502-4E44-463A-8478-C085BCB42899}"/>
+                <a16:creationId xmlns:a16="http://schemas.microsoft.com/office/drawing/2014/main" id="{B21DC66A-D845-42C8-9F11-83A0993F4E78}"/>
               </a:ext>
             </a:extLst>
           </p:cNvPr>
@@ -21594,7 +21596,7 @@
           <p:cNvPr id="15" name="p08-r-3">
             <a:extLst xmlns:a="http://schemas.openxmlformats.org/drawingml/2006/main">
               <a:ext uri="{FF2B5EF4-FFF2-40B4-BE49-F238E27FC236}">
-                <a16:creationId xmlns:a16="http://schemas.microsoft.com/office/drawing/2014/main" id="{4F60253A-6CD1-4EA6-8E22-E724593A052E}"/>
+                <a16:creationId xmlns:a16="http://schemas.microsoft.com/office/drawing/2014/main" id="{3C1EF135-AFCB-455E-A030-FF59C6C68EDA}"/>
               </a:ext>
             </a:extLst>
           </p:cNvPr>
@@ -21649,7 +21651,7 @@
           <p:cNvPr id="16" name="p08-bottom">
             <a:extLst xmlns:a="http://schemas.openxmlformats.org/drawingml/2006/main">
               <a:ext uri="{FF2B5EF4-FFF2-40B4-BE49-F238E27FC236}">
-                <a16:creationId xmlns:a16="http://schemas.microsoft.com/office/drawing/2014/main" id="{59E690BE-D64F-408E-8A57-39D00A942E14}"/>
+                <a16:creationId xmlns:a16="http://schemas.microsoft.com/office/drawing/2014/main" id="{DC6DD30E-E577-4BA8-95EF-B80E9ACE60E7}"/>
               </a:ext>
             </a:extLst>
           </p:cNvPr>
@@ -21800,7 +21802,7 @@
           <p:cNvPr id="6" name="p09-case">
             <a:extLst xmlns:a="http://schemas.openxmlformats.org/drawingml/2006/main">
               <a:ext uri="{FF2B5EF4-FFF2-40B4-BE49-F238E27FC236}">
-                <a16:creationId xmlns:a16="http://schemas.microsoft.com/office/drawing/2014/main" id="{E85CCFDF-E727-4A40-BEC7-65F34543AC2A}"/>
+                <a16:creationId xmlns:a16="http://schemas.microsoft.com/office/drawing/2014/main" id="{3EB09E5E-C5F2-41C1-981E-B1AE7D9607D3}"/>
               </a:ext>
             </a:extLst>
           </p:cNvPr>
@@ -21855,7 +21857,7 @@
           <p:cNvPr id="7" name="p09-log">
             <a:extLst xmlns:a="http://schemas.openxmlformats.org/drawingml/2006/main">
               <a:ext uri="{FF2B5EF4-FFF2-40B4-BE49-F238E27FC236}">
-                <a16:creationId xmlns:a16="http://schemas.microsoft.com/office/drawing/2014/main" id="{55FD4B24-CB66-42B8-84A1-C16688DF8CF1}"/>
+                <a16:creationId xmlns:a16="http://schemas.microsoft.com/office/drawing/2014/main" id="{04AF897B-CCD9-4489-B32E-FB49B44517E5}"/>
               </a:ext>
             </a:extLst>
           </p:cNvPr>
@@ -21966,7 +21968,7 @@
           <p:cNvPr id="8" name="p09-problem">
             <a:extLst xmlns:a="http://schemas.openxmlformats.org/drawingml/2006/main">
               <a:ext uri="{FF2B5EF4-FFF2-40B4-BE49-F238E27FC236}">
-                <a16:creationId xmlns:a16="http://schemas.microsoft.com/office/drawing/2014/main" id="{C0285040-4922-4DF7-A6BA-959C1EE3670D}"/>
+                <a16:creationId xmlns:a16="http://schemas.microsoft.com/office/drawing/2014/main" id="{2D177E9E-9BD5-4439-9E0F-4DA0851BF19D}"/>
               </a:ext>
             </a:extLst>
           </p:cNvPr>
@@ -22075,7 +22077,7 @@
           <p:cNvPr id="9" name="p09-fix-h">
             <a:extLst xmlns:a="http://schemas.openxmlformats.org/drawingml/2006/main">
               <a:ext uri="{FF2B5EF4-FFF2-40B4-BE49-F238E27FC236}">
-                <a16:creationId xmlns:a16="http://schemas.microsoft.com/office/drawing/2014/main" id="{31ADED61-FCF1-4318-AAEC-2B75567F96FE}"/>
+                <a16:creationId xmlns:a16="http://schemas.microsoft.com/office/drawing/2014/main" id="{349A4D0B-6C39-4FE0-9EB6-1068FD651CCC}"/>
               </a:ext>
             </a:extLst>
           </p:cNvPr>
@@ -22130,7 +22132,7 @@
           <p:cNvPr id="10" name="p09-fix">
             <a:extLst xmlns:a="http://schemas.openxmlformats.org/drawingml/2006/main">
               <a:ext uri="{FF2B5EF4-FFF2-40B4-BE49-F238E27FC236}">
-                <a16:creationId xmlns:a16="http://schemas.microsoft.com/office/drawing/2014/main" id="{D1B9229F-5CA0-455A-BDA8-3C888DC92551}"/>
+                <a16:creationId xmlns:a16="http://schemas.microsoft.com/office/drawing/2014/main" id="{0A1D4326-F2E7-4548-A414-2E297F9FF7C1}"/>
               </a:ext>
             </a:extLst>
           </p:cNvPr>
@@ -22189,7 +22191,7 @@
           <p:cNvPr id="11" name="p09-question">
             <a:extLst xmlns:a="http://schemas.openxmlformats.org/drawingml/2006/main">
               <a:ext uri="{FF2B5EF4-FFF2-40B4-BE49-F238E27FC236}">
-                <a16:creationId xmlns:a16="http://schemas.microsoft.com/office/drawing/2014/main" id="{C31FAAD6-1573-4FD3-8556-87BE1431A95A}"/>
+                <a16:creationId xmlns:a16="http://schemas.microsoft.com/office/drawing/2014/main" id="{84018E3C-AF2A-4190-9EFE-4D0209FE3ACC}"/>
               </a:ext>
             </a:extLst>
           </p:cNvPr>
